--- a/KHBD_Tin_học/Lớp_7/Tuần_04/Slide_Tin_hoc_Lop_7_Bai03_04.pptx
+++ b/KHBD_Tin_học/Lớp_7/Tuần_04/Slide_Tin_hoc_Lop_7_Bai03_04.pptx
@@ -14,6 +14,7 @@
     <p:sldId id="262" r:id="rId12"/>
     <p:sldId id="263" r:id="rId13"/>
     <p:sldId id="264" r:id="rId14"/>
+    <p:sldId id="265" r:id="rId15"/>
   </p:sldIdLst>
   <p:sldSz cx="12192000" cy="6858000"/>
   <p:notesSz cx="6858000" cy="9144000"/>
@@ -3397,16 +3398,104 @@
       <p:grpSpPr/>
       <p:sp>
         <p:nvSpPr>
-          <p:cNvPr id="3" name="Rectangle 2"/>
+          <p:cNvPr id="2" name="Rectangle 1"/>
           <p:cNvSpPr/>
           <p:nvPr/>
         </p:nvSpPr>
         <p:spPr>
           <a:xfrm>
             <a:off x="0" y="1051560"/>
-            <a:ext cx="12188952" cy="1645920"/>
+            <a:ext cx="12188952" cy="4754879"/>
           </a:xfrm>
           <a:prstGeom prst="rect">
+            <a:avLst/>
+          </a:prstGeom>
+          <a:solidFill>
+            <a:srgbClr val="0369A1"/>
+          </a:solidFill>
+          <a:ln>
+            <a:noFill/>
+          </a:ln>
+        </p:spPr>
+        <p:style>
+          <a:lnRef idx="1">
+            <a:schemeClr val="accent1"/>
+          </a:lnRef>
+          <a:fillRef idx="3">
+            <a:schemeClr val="accent1"/>
+          </a:fillRef>
+          <a:effectRef idx="2">
+            <a:schemeClr val="accent1"/>
+          </a:effectRef>
+          <a:fontRef idx="minor">
+            <a:schemeClr val="lt1"/>
+          </a:fontRef>
+        </p:style>
+        <p:txBody>
+          <a:bodyPr rtlCol="0" anchor="ctr"/>
+          <a:lstStyle/>
+          <a:p>
+            <a:pPr algn="ctr"/>
+          </a:p>
+        </p:txBody>
+      </p:sp>
+      <p:sp>
+        <p:nvSpPr>
+          <p:cNvPr id="3" name="Rounded Rectangle 2"/>
+          <p:cNvSpPr/>
+          <p:nvPr/>
+        </p:nvSpPr>
+        <p:spPr>
+          <a:xfrm>
+            <a:off x="1097280" y="1463040"/>
+            <a:ext cx="9994392" cy="3657599"/>
+          </a:xfrm>
+          <a:prstGeom prst="roundRect">
+            <a:avLst/>
+          </a:prstGeom>
+          <a:solidFill>
+            <a:srgbClr val="FFFFFF"/>
+          </a:solidFill>
+          <a:ln w="19050">
+            <a:solidFill>
+              <a:srgbClr val="0EA5E9"/>
+            </a:solidFill>
+          </a:ln>
+        </p:spPr>
+        <p:style>
+          <a:lnRef idx="1">
+            <a:schemeClr val="accent1"/>
+          </a:lnRef>
+          <a:fillRef idx="3">
+            <a:schemeClr val="accent1"/>
+          </a:fillRef>
+          <a:effectRef idx="2">
+            <a:schemeClr val="accent1"/>
+          </a:effectRef>
+          <a:fontRef idx="minor">
+            <a:schemeClr val="lt1"/>
+          </a:fontRef>
+        </p:style>
+        <p:txBody>
+          <a:bodyPr rtlCol="0" anchor="ctr"/>
+          <a:lstStyle/>
+          <a:p>
+            <a:pPr algn="ctr"/>
+          </a:p>
+        </p:txBody>
+      </p:sp>
+      <p:sp>
+        <p:nvSpPr>
+          <p:cNvPr id="4" name="Rounded Rectangle 3"/>
+          <p:cNvSpPr/>
+          <p:nvPr/>
+        </p:nvSpPr>
+        <p:spPr>
+          <a:xfrm>
+            <a:off x="1097280" y="1463040"/>
+            <a:ext cx="9994392" cy="182879"/>
+          </a:xfrm>
+          <a:prstGeom prst="roundRect">
             <a:avLst/>
           </a:prstGeom>
           <a:solidFill>
@@ -3440,6 +3529,175 @@
       </p:sp>
       <p:sp>
         <p:nvSpPr>
+          <p:cNvPr id="5" name="TextBox 4"/>
+          <p:cNvSpPr txBox="1"/>
+          <p:nvPr/>
+        </p:nvSpPr>
+        <p:spPr>
+          <a:xfrm>
+            <a:off x="1371600" y="1828800"/>
+            <a:ext cx="9445752" cy="457200"/>
+          </a:xfrm>
+          <a:prstGeom prst="rect">
+            <a:avLst/>
+          </a:prstGeom>
+          <a:noFill/>
+        </p:spPr>
+        <p:txBody>
+          <a:bodyPr wrap="square" lIns="73152" rIns="73152" tIns="54864" bIns="54864">
+            <a:spAutoFit/>
+          </a:bodyPr>
+          <a:lstStyle/>
+          <a:p>
+            <a:pPr algn="ctr">
+              <a:defRPr sz="1500" b="1">
+                <a:solidFill>
+                  <a:srgbClr val="0369A1"/>
+                </a:solidFill>
+                <a:latin typeface="Arial"/>
+              </a:defRPr>
+            </a:pPr>
+            <a:r>
+              <a:t>TRƯỜNG TIỂU HỌC &amp; THCS UNIGO</a:t>
+            </a:r>
+          </a:p>
+        </p:txBody>
+      </p:sp>
+      <p:sp>
+        <p:nvSpPr>
+          <p:cNvPr id="6" name="TextBox 5"/>
+          <p:cNvSpPr txBox="1"/>
+          <p:nvPr/>
+        </p:nvSpPr>
+        <p:spPr>
+          <a:xfrm>
+            <a:off x="1371600" y="2377440"/>
+            <a:ext cx="9445752" cy="1280160"/>
+          </a:xfrm>
+          <a:prstGeom prst="rect">
+            <a:avLst/>
+          </a:prstGeom>
+          <a:noFill/>
+        </p:spPr>
+        <p:txBody>
+          <a:bodyPr wrap="square" lIns="73152" rIns="73152" tIns="54864" bIns="54864">
+            <a:spAutoFit/>
+          </a:bodyPr>
+          <a:lstStyle/>
+          <a:p>
+            <a:pPr algn="ctr">
+              <a:defRPr sz="2800" b="1">
+                <a:solidFill>
+                  <a:srgbClr val="0F172A"/>
+                </a:solidFill>
+                <a:latin typeface="Arial"/>
+              </a:defRPr>
+            </a:pPr>
+            <a:r>
+              <a:t>QUẢN LÝ DỮ LIỆU &amp;</a:t>
+            </a:r>
+            <a:br/>
+            <a:r>
+              <a:t>MẠNG XÃ HỘI INTERNET</a:t>
+            </a:r>
+          </a:p>
+        </p:txBody>
+      </p:sp>
+      <p:sp>
+        <p:nvSpPr>
+          <p:cNvPr id="7" name="TextBox 6"/>
+          <p:cNvSpPr txBox="1"/>
+          <p:nvPr/>
+        </p:nvSpPr>
+        <p:spPr>
+          <a:xfrm>
+            <a:off x="1371600" y="3749039"/>
+            <a:ext cx="9445752" cy="548639"/>
+          </a:xfrm>
+          <a:prstGeom prst="rect">
+            <a:avLst/>
+          </a:prstGeom>
+          <a:noFill/>
+        </p:spPr>
+        <p:txBody>
+          <a:bodyPr wrap="square" lIns="73152" rIns="73152" tIns="54864" bIns="54864">
+            <a:spAutoFit/>
+          </a:bodyPr>
+          <a:lstStyle/>
+          <a:p>
+            <a:pPr algn="ctr">
+              <a:defRPr sz="1800" b="0">
+                <a:solidFill>
+                  <a:srgbClr val="0369A1"/>
+                </a:solidFill>
+                <a:latin typeface="Arial"/>
+              </a:defRPr>
+            </a:pPr>
+            <a:r>
+              <a:t>Tin học • Lớp 7 • Tuần 04 (Tiết 3 &amp; Tiết 4)</a:t>
+            </a:r>
+          </a:p>
+        </p:txBody>
+      </p:sp>
+      <p:sp>
+        <p:nvSpPr>
+          <p:cNvPr id="8" name="TextBox 7"/>
+          <p:cNvSpPr txBox="1"/>
+          <p:nvPr/>
+        </p:nvSpPr>
+        <p:spPr>
+          <a:xfrm>
+            <a:off x="1371600" y="4389120"/>
+            <a:ext cx="9445752" cy="365760"/>
+          </a:xfrm>
+          <a:prstGeom prst="rect">
+            <a:avLst/>
+          </a:prstGeom>
+          <a:noFill/>
+        </p:spPr>
+        <p:txBody>
+          <a:bodyPr wrap="square" lIns="73152" rIns="73152" tIns="54864" bIns="54864">
+            <a:spAutoFit/>
+          </a:bodyPr>
+          <a:lstStyle/>
+          <a:p>
+            <a:pPr algn="ctr">
+              <a:defRPr sz="1400" b="0">
+                <a:solidFill>
+                  <a:srgbClr val="64748B"/>
+                </a:solidFill>
+                <a:latin typeface="Arial"/>
+              </a:defRPr>
+            </a:pPr>
+            <a:r>
+              <a:t>GV: Đậu Đình Nguyên • Bộ môn Tin học</a:t>
+            </a:r>
+          </a:p>
+        </p:txBody>
+      </p:sp>
+    </p:spTree>
+  </p:cSld>
+  <p:clrMapOvr>
+    <a:masterClrMapping/>
+  </p:clrMapOvr>
+  <p:transition spd="med">
+    <p:wipe/>
+  </p:transition>
+</p:sld>
+</file>
+
+<file path=ppt/slides/slide10.xml><?xml version="1.0" encoding="utf-8"?>
+<p:sld xmlns:a="http://schemas.openxmlformats.org/drawingml/2006/main" xmlns:p="http://schemas.openxmlformats.org/presentationml/2006/main" xmlns:r="http://schemas.openxmlformats.org/officeDocument/2006/relationships">
+  <p:cSld>
+    <p:spTree>
+      <p:nvGrpSpPr>
+        <p:cNvPr id="1" name=""/>
+        <p:cNvGrpSpPr/>
+        <p:nvPr/>
+      </p:nvGrpSpPr>
+      <p:grpSpPr/>
+      <p:sp>
+        <p:nvSpPr>
           <p:cNvPr id="2" name="Rectangle 1"/>
           <p:cNvSpPr/>
           <p:nvPr/>
@@ -3483,14 +3741,102 @@
       </p:sp>
       <p:sp>
         <p:nvSpPr>
-          <p:cNvPr id="4" name="TextBox 3"/>
+          <p:cNvPr id="3" name="Rounded Rectangle 2"/>
+          <p:cNvSpPr/>
+          <p:nvPr/>
+        </p:nvSpPr>
+        <p:spPr>
+          <a:xfrm>
+            <a:off x="1828800" y="1645920"/>
+            <a:ext cx="8531352" cy="3474720"/>
+          </a:xfrm>
+          <a:prstGeom prst="roundRect">
+            <a:avLst/>
+          </a:prstGeom>
+          <a:solidFill>
+            <a:srgbClr val="FFFFFF"/>
+          </a:solidFill>
+          <a:ln w="19050">
+            <a:solidFill>
+              <a:srgbClr val="0EA5E9"/>
+            </a:solidFill>
+          </a:ln>
+        </p:spPr>
+        <p:style>
+          <a:lnRef idx="1">
+            <a:schemeClr val="accent1"/>
+          </a:lnRef>
+          <a:fillRef idx="3">
+            <a:schemeClr val="accent1"/>
+          </a:fillRef>
+          <a:effectRef idx="2">
+            <a:schemeClr val="accent1"/>
+          </a:effectRef>
+          <a:fontRef idx="minor">
+            <a:schemeClr val="lt1"/>
+          </a:fontRef>
+        </p:style>
+        <p:txBody>
+          <a:bodyPr rtlCol="0" anchor="ctr"/>
+          <a:lstStyle/>
+          <a:p>
+            <a:pPr algn="ctr"/>
+          </a:p>
+        </p:txBody>
+      </p:sp>
+      <p:sp>
+        <p:nvSpPr>
+          <p:cNvPr id="4" name="Rounded Rectangle 3"/>
+          <p:cNvSpPr/>
+          <p:nvPr/>
+        </p:nvSpPr>
+        <p:spPr>
+          <a:xfrm>
+            <a:off x="1828800" y="1645920"/>
+            <a:ext cx="8531352" cy="182879"/>
+          </a:xfrm>
+          <a:prstGeom prst="roundRect">
+            <a:avLst/>
+          </a:prstGeom>
+          <a:solidFill>
+            <a:srgbClr val="0EA5E9"/>
+          </a:solidFill>
+          <a:ln>
+            <a:noFill/>
+          </a:ln>
+        </p:spPr>
+        <p:style>
+          <a:lnRef idx="1">
+            <a:schemeClr val="accent1"/>
+          </a:lnRef>
+          <a:fillRef idx="3">
+            <a:schemeClr val="accent1"/>
+          </a:fillRef>
+          <a:effectRef idx="2">
+            <a:schemeClr val="accent1"/>
+          </a:effectRef>
+          <a:fontRef idx="minor">
+            <a:schemeClr val="lt1"/>
+          </a:fontRef>
+        </p:style>
+        <p:txBody>
+          <a:bodyPr rtlCol="0" anchor="ctr"/>
+          <a:lstStyle/>
+          <a:p>
+            <a:pPr algn="ctr"/>
+          </a:p>
+        </p:txBody>
+      </p:sp>
+      <p:sp>
+        <p:nvSpPr>
+          <p:cNvPr id="5" name="TextBox 4"/>
           <p:cNvSpPr txBox="1"/>
           <p:nvPr/>
         </p:nvSpPr>
         <p:spPr>
           <a:xfrm>
-            <a:off x="731520" y="1828800"/>
-            <a:ext cx="6858000" cy="1371600"/>
+            <a:off x="2011680" y="2011680"/>
+            <a:ext cx="8165592" cy="731519"/>
           </a:xfrm>
           <a:prstGeom prst="rect">
             <a:avLst/>
@@ -3498,34 +3844,35 @@
           <a:noFill/>
         </p:spPr>
         <p:txBody>
-          <a:bodyPr wrap="square">
+          <a:bodyPr wrap="square" lIns="73152" rIns="73152" tIns="54864" bIns="54864">
             <a:spAutoFit/>
           </a:bodyPr>
           <a:lstStyle/>
           <a:p>
-            <a:pPr algn="l"/>
-            <a:r>
-              <a:rPr sz="3400" b="1">
+            <a:pPr algn="ctr">
+              <a:defRPr sz="2400" b="1">
                 <a:solidFill>
-                  <a:srgbClr val="FFFFFF"/>
+                  <a:srgbClr val="0369A1"/>
                 </a:solidFill>
                 <a:latin typeface="Arial"/>
-              </a:rPr>
-              <a:t>Quản lý dữ liệu &amp; Mạng xã hội 📱</a:t>
-            </a:r>
-          </a:p>
-        </p:txBody>
-      </p:sp>
-      <p:sp>
-        <p:nvSpPr>
-          <p:cNvPr id="5" name="TextBox 4"/>
+              </a:defRPr>
+            </a:pPr>
+            <a:r>
+              <a:t>BÀI HỌC KẾT THÚC! 🚀</a:t>
+            </a:r>
+          </a:p>
+        </p:txBody>
+      </p:sp>
+      <p:sp>
+        <p:nvSpPr>
+          <p:cNvPr id="6" name="TextBox 5"/>
           <p:cNvSpPr txBox="1"/>
           <p:nvPr/>
         </p:nvSpPr>
         <p:spPr>
           <a:xfrm>
-            <a:off x="731520" y="3474720"/>
-            <a:ext cx="6858000" cy="731520"/>
+            <a:off x="2011680" y="2834640"/>
+            <a:ext cx="8165592" cy="1097279"/>
           </a:xfrm>
           <a:prstGeom prst="rect">
             <a:avLst/>
@@ -3533,55 +3880,68 @@
           <a:noFill/>
         </p:spPr>
         <p:txBody>
-          <a:bodyPr wrap="square">
+          <a:bodyPr wrap="square" lIns="73152" rIns="73152" tIns="54864" bIns="54864">
             <a:spAutoFit/>
           </a:bodyPr>
           <a:lstStyle/>
           <a:p>
-            <a:pPr algn="l"/>
-            <a:r>
-              <a:rPr sz="2000" b="0">
+            <a:pPr algn="ctr">
+              <a:defRPr sz="1700" b="0">
                 <a:solidFill>
-                  <a:srgbClr val="FFFFFF"/>
+                  <a:srgbClr val="0F172A"/>
                 </a:solidFill>
                 <a:latin typeface="Arial"/>
-              </a:rPr>
-              <a:t>Tin học • Lớp 7 • Tiết 3 &amp; 4</a:t>
-            </a:r>
-          </a:p>
-        </p:txBody>
-      </p:sp>
-      <p:pic>
-        <p:nvPicPr>
-          <p:cNvPr id="6" name="Picture 5" descr="learn1_card1.png"/>
-          <p:cNvPicPr>
-            <a:picLocks noChangeAspect="1"/>
-          </p:cNvPicPr>
-          <p:nvPr/>
-        </p:nvPicPr>
-        <p:blipFill>
-          <a:blip r:embed="rId2"/>
-          <a:stretch>
-            <a:fillRect/>
-          </a:stretch>
-        </p:blipFill>
-        <p:spPr>
-          <a:xfrm>
-            <a:off x="8074152" y="1325880"/>
-            <a:ext cx="3474720" cy="3474720"/>
+              </a:defRPr>
+            </a:pPr>
+            <a:r>
+              <a:t>BTVN: Hoàn thành phiếu học tập và thực hiện bảo mật 2 lớp cho các tài khoản trực tuyến!</a:t>
+            </a:r>
+          </a:p>
+        </p:txBody>
+      </p:sp>
+      <p:sp>
+        <p:nvSpPr>
+          <p:cNvPr id="7" name="TextBox 6"/>
+          <p:cNvSpPr txBox="1"/>
+          <p:nvPr/>
+        </p:nvSpPr>
+        <p:spPr>
+          <a:xfrm>
+            <a:off x="2011680" y="4114800"/>
+            <a:ext cx="8165592" cy="548639"/>
           </a:xfrm>
           <a:prstGeom prst="rect">
             <a:avLst/>
           </a:prstGeom>
-        </p:spPr>
-      </p:pic>
+          <a:noFill/>
+        </p:spPr>
+        <p:txBody>
+          <a:bodyPr wrap="square" lIns="73152" rIns="73152" tIns="54864" bIns="54864">
+            <a:spAutoFit/>
+          </a:bodyPr>
+          <a:lstStyle/>
+          <a:p>
+            <a:pPr algn="ctr">
+              <a:defRPr sz="1600" b="1">
+                <a:solidFill>
+                  <a:srgbClr val="0EA5E9"/>
+                </a:solidFill>
+                <a:latin typeface="Arial"/>
+              </a:defRPr>
+            </a:pPr>
+            <a:r>
+              <a:t>Hẹn gặp lại các em ở bài học tuần sau! 🚀</a:t>
+            </a:r>
+          </a:p>
+        </p:txBody>
+      </p:sp>
     </p:spTree>
   </p:cSld>
   <p:clrMapOvr>
     <a:masterClrMapping/>
   </p:clrMapOvr>
   <p:transition spd="med">
-    <p:fade/>
+    <p:cover/>
   </p:transition>
 </p:sld>
 </file>
@@ -3641,16 +4001,16 @@
       </p:sp>
       <p:sp>
         <p:nvSpPr>
-          <p:cNvPr id="3" name="Rectangle 2"/>
+          <p:cNvPr id="3" name="Rounded Rectangle 2"/>
           <p:cNvSpPr/>
           <p:nvPr/>
         </p:nvSpPr>
         <p:spPr>
           <a:xfrm>
-            <a:off x="0" y="1097280"/>
-            <a:ext cx="12188952" cy="411479"/>
-          </a:xfrm>
-          <a:prstGeom prst="rect">
+            <a:off x="1371600" y="1645920"/>
+            <a:ext cx="9445752" cy="3474720"/>
+          </a:xfrm>
+          <a:prstGeom prst="roundRect">
             <a:avLst/>
           </a:prstGeom>
           <a:solidFill>
@@ -3684,129 +4044,16 @@
       </p:sp>
       <p:sp>
         <p:nvSpPr>
-          <p:cNvPr id="4" name="TextBox 3"/>
-          <p:cNvSpPr txBox="1"/>
-          <p:nvPr/>
-        </p:nvSpPr>
-        <p:spPr>
-          <a:xfrm>
-            <a:off x="274320" y="1124712"/>
-            <a:ext cx="11640312" cy="365760"/>
-          </a:xfrm>
-          <a:prstGeom prst="rect">
-            <a:avLst/>
-          </a:prstGeom>
-          <a:noFill/>
-        </p:spPr>
-        <p:txBody>
-          <a:bodyPr wrap="square">
-            <a:spAutoFit/>
-          </a:bodyPr>
-          <a:lstStyle/>
-          <a:p>
-            <a:pPr algn="l"/>
-            <a:r>
-              <a:rPr sz="1300" b="1">
-                <a:solidFill>
-                  <a:srgbClr val="FFFFFF"/>
-                </a:solidFill>
-                <a:latin typeface="Arial"/>
-              </a:rPr>
-              <a:t>  LỚP 7 • BÀI 3. QUẢN LÝ DỮ LIỆU &amp; BÀI 4. MẠNG XÃ HỘI</a:t>
-            </a:r>
-          </a:p>
-        </p:txBody>
-      </p:sp>
-      <p:sp>
-        <p:nvSpPr>
-          <p:cNvPr id="5" name="TextBox 4"/>
-          <p:cNvSpPr txBox="1"/>
-          <p:nvPr/>
-        </p:nvSpPr>
-        <p:spPr>
-          <a:xfrm>
-            <a:off x="457200" y="1600200"/>
-            <a:ext cx="7315200" cy="594360"/>
-          </a:xfrm>
-          <a:prstGeom prst="rect">
-            <a:avLst/>
-          </a:prstGeom>
-          <a:noFill/>
-        </p:spPr>
-        <p:txBody>
-          <a:bodyPr wrap="square">
-            <a:spAutoFit/>
-          </a:bodyPr>
-          <a:lstStyle/>
-          <a:p>
-            <a:pPr algn="l"/>
-            <a:r>
-              <a:rPr sz="2600" b="1">
-                <a:solidFill>
-                  <a:srgbClr val="0C4A6E"/>
-                </a:solidFill>
-                <a:latin typeface="Arial"/>
-              </a:rPr>
-              <a:t>Bảo vệ thông tin cá nhân trên không gian mạng!</a:t>
-            </a:r>
-          </a:p>
-        </p:txBody>
-      </p:sp>
-      <p:sp>
-        <p:nvSpPr>
-          <p:cNvPr id="6" name="Rounded Rectangle 5"/>
+          <p:cNvPr id="4" name="Rounded Rectangle 3"/>
           <p:cNvSpPr/>
           <p:nvPr/>
         </p:nvSpPr>
         <p:spPr>
           <a:xfrm>
-            <a:off x="365760" y="2286000"/>
-            <a:ext cx="6858000" cy="3383279"/>
+            <a:off x="1371600" y="1645920"/>
+            <a:ext cx="365760" cy="3474720"/>
           </a:xfrm>
           <a:prstGeom prst="roundRect">
-            <a:avLst/>
-          </a:prstGeom>
-          <a:solidFill>
-            <a:srgbClr val="FFFFFF"/>
-          </a:solidFill>
-          <a:ln>
-            <a:noFill/>
-          </a:ln>
-        </p:spPr>
-        <p:style>
-          <a:lnRef idx="1">
-            <a:schemeClr val="accent1"/>
-          </a:lnRef>
-          <a:fillRef idx="3">
-            <a:schemeClr val="accent1"/>
-          </a:fillRef>
-          <a:effectRef idx="2">
-            <a:schemeClr val="accent1"/>
-          </a:effectRef>
-          <a:fontRef idx="minor">
-            <a:schemeClr val="lt1"/>
-          </a:fontRef>
-        </p:style>
-        <p:txBody>
-          <a:bodyPr rtlCol="0" anchor="ctr"/>
-          <a:lstStyle/>
-          <a:p>
-            <a:pPr algn="ctr"/>
-          </a:p>
-        </p:txBody>
-      </p:sp>
-      <p:sp>
-        <p:nvSpPr>
-          <p:cNvPr id="7" name="Rectangle 6"/>
-          <p:cNvSpPr/>
-          <p:nvPr/>
-        </p:nvSpPr>
-        <p:spPr>
-          <a:xfrm>
-            <a:off x="365760" y="2286000"/>
-            <a:ext cx="109728" cy="3383279"/>
-          </a:xfrm>
-          <a:prstGeom prst="rect">
             <a:avLst/>
           </a:prstGeom>
           <a:solidFill>
@@ -3840,14 +4087,14 @@
       </p:sp>
       <p:sp>
         <p:nvSpPr>
-          <p:cNvPr id="8" name="TextBox 7"/>
+          <p:cNvPr id="5" name="TextBox 4"/>
           <p:cNvSpPr txBox="1"/>
           <p:nvPr/>
         </p:nvSpPr>
         <p:spPr>
           <a:xfrm>
-            <a:off x="731520" y="2468880"/>
-            <a:ext cx="6309360" cy="3017520"/>
+            <a:off x="2103120" y="2011680"/>
+            <a:ext cx="8046720" cy="548640"/>
           </a:xfrm>
           <a:prstGeom prst="rect">
             <a:avLst/>
@@ -3855,75 +4102,104 @@
           <a:noFill/>
         </p:spPr>
         <p:txBody>
-          <a:bodyPr wrap="square">
+          <a:bodyPr wrap="square" lIns="73152" rIns="73152" tIns="54864" bIns="54864">
             <a:spAutoFit/>
           </a:bodyPr>
           <a:lstStyle/>
           <a:p>
             <a:pPr algn="l">
-              <a:spcAft>
-                <a:spcPts val="600"/>
-              </a:spcAft>
-            </a:pPr>
-            <a:r>
-              <a:rPr sz="2000" b="0">
+              <a:defRPr sz="1600" b="1">
                 <a:solidFill>
-                  <a:srgbClr val="0C4A6E"/>
+                  <a:srgbClr val="FEF08A"/>
                 </a:solidFill>
                 <a:latin typeface="Arial"/>
-              </a:rPr>
-              <a:t>Mạng xã hội giúp em kết nối với bạn bè khắp nơi.</a:t>
-            </a:r>
-          </a:p>
+              </a:defRPr>
+            </a:pPr>
+            <a:r>
+              <a:t>KHÁM PHÁ KIẾN THỨC MỚI</a:t>
+            </a:r>
+          </a:p>
+        </p:txBody>
+      </p:sp>
+      <p:sp>
+        <p:nvSpPr>
+          <p:cNvPr id="6" name="TextBox 5"/>
+          <p:cNvSpPr txBox="1"/>
+          <p:nvPr/>
+        </p:nvSpPr>
+        <p:spPr>
+          <a:xfrm>
+            <a:off x="2103120" y="2651760"/>
+            <a:ext cx="8046720" cy="1371600"/>
+          </a:xfrm>
+          <a:prstGeom prst="rect">
+            <a:avLst/>
+          </a:prstGeom>
+          <a:noFill/>
+        </p:spPr>
+        <p:txBody>
+          <a:bodyPr wrap="square" lIns="73152" rIns="73152" tIns="54864" bIns="54864">
+            <a:spAutoFit/>
+          </a:bodyPr>
+          <a:lstStyle/>
           <a:p>
             <a:pPr algn="l">
-              <a:spcAft>
-                <a:spcPts val="600"/>
-              </a:spcAft>
-            </a:pPr>
-            <a:r>
-              <a:rPr sz="2000" b="0">
+              <a:defRPr sz="2600" b="1">
                 <a:solidFill>
-                  <a:srgbClr val="0C4A6E"/>
+                  <a:srgbClr val="FFFFFF"/>
                 </a:solidFill>
                 <a:latin typeface="Arial"/>
-              </a:rPr>
-              <a:t>Nhưng làm sao để bảo vệ dữ liệu cá nhân không bị đánh cắp và lừa đảo?</a:t>
-            </a:r>
-          </a:p>
-        </p:txBody>
-      </p:sp>
-      <p:pic>
-        <p:nvPicPr>
-          <p:cNvPr id="9" name="Picture 8" descr="learn1_card1.png"/>
-          <p:cNvPicPr>
-            <a:picLocks noChangeAspect="1"/>
-          </p:cNvPicPr>
-          <p:nvPr/>
-        </p:nvPicPr>
-        <p:blipFill>
-          <a:blip r:embed="rId2"/>
-          <a:stretch>
-            <a:fillRect/>
-          </a:stretch>
-        </p:blipFill>
-        <p:spPr>
-          <a:xfrm>
-            <a:off x="7589520" y="2286000"/>
-            <a:ext cx="4114799" cy="3383279"/>
+              </a:defRPr>
+            </a:pPr>
+            <a:r>
+              <a:t>TIẾT 3: BÀI 3. QUẢN LÝ DỮ LIỆU TRONG MÁY TÍNH</a:t>
+            </a:r>
+          </a:p>
+        </p:txBody>
+      </p:sp>
+      <p:sp>
+        <p:nvSpPr>
+          <p:cNvPr id="7" name="TextBox 6"/>
+          <p:cNvSpPr txBox="1"/>
+          <p:nvPr/>
+        </p:nvSpPr>
+        <p:spPr>
+          <a:xfrm>
+            <a:off x="2103120" y="4023360"/>
+            <a:ext cx="8046720" cy="731519"/>
           </a:xfrm>
           <a:prstGeom prst="rect">
             <a:avLst/>
           </a:prstGeom>
-        </p:spPr>
-      </p:pic>
+          <a:noFill/>
+        </p:spPr>
+        <p:txBody>
+          <a:bodyPr wrap="square" lIns="73152" rIns="73152" tIns="54864" bIns="54864">
+            <a:spAutoFit/>
+          </a:bodyPr>
+          <a:lstStyle/>
+          <a:p>
+            <a:pPr algn="l">
+              <a:defRPr sz="1600" b="0">
+                <a:solidFill>
+                  <a:srgbClr val="F1F5F9"/>
+                </a:solidFill>
+                <a:latin typeface="Arial"/>
+              </a:defRPr>
+            </a:pPr>
+            <a:r>
+              <a:t>Nắm vững phần mở rộng tệp, thao tác File Explorer và kỹ thuật sao lưu dự phòng</a:t>
+            </a:r>
+          </a:p>
+        </p:txBody>
+      </p:sp>
     </p:spTree>
   </p:cSld>
   <p:clrMapOvr>
     <a:masterClrMapping/>
   </p:clrMapOvr>
   <p:transition spd="med">
-    <p:push dir="l"/>
+    <p:push/>
   </p:transition>
 </p:sld>
 </file>
@@ -3983,20 +4259,20 @@
       </p:sp>
       <p:sp>
         <p:nvSpPr>
-          <p:cNvPr id="3" name="Rectangle 2"/>
+          <p:cNvPr id="3" name="Rounded Rectangle 2"/>
           <p:cNvSpPr/>
           <p:nvPr/>
         </p:nvSpPr>
         <p:spPr>
           <a:xfrm>
-            <a:off x="0" y="1097280"/>
-            <a:ext cx="12188952" cy="411479"/>
-          </a:xfrm>
-          <a:prstGeom prst="rect">
+            <a:off x="365760" y="1143000"/>
+            <a:ext cx="2926080" cy="347471"/>
+          </a:xfrm>
+          <a:prstGeom prst="roundRect">
             <a:avLst/>
           </a:prstGeom>
           <a:solidFill>
-            <a:srgbClr val="DC2626"/>
+            <a:srgbClr val="0369A1"/>
           </a:solidFill>
           <a:ln>
             <a:noFill/>
@@ -4032,8 +4308,8 @@
         </p:nvSpPr>
         <p:spPr>
           <a:xfrm>
-            <a:off x="274320" y="1124712"/>
-            <a:ext cx="11640312" cy="365760"/>
+            <a:off x="365760" y="1143000"/>
+            <a:ext cx="2926080" cy="347471"/>
           </a:xfrm>
           <a:prstGeom prst="rect">
             <a:avLst/>
@@ -4041,20 +4317,21 @@
           <a:noFill/>
         </p:spPr>
         <p:txBody>
-          <a:bodyPr wrap="square">
+          <a:bodyPr wrap="square" lIns="73152" rIns="73152" tIns="54864" bIns="54864">
             <a:spAutoFit/>
           </a:bodyPr>
           <a:lstStyle/>
           <a:p>
-            <a:pPr algn="l"/>
-            <a:r>
-              <a:rPr sz="1300" b="1">
+            <a:pPr algn="ctr">
+              <a:defRPr sz="1300" b="1">
                 <a:solidFill>
                   <a:srgbClr val="FFFFFF"/>
                 </a:solidFill>
                 <a:latin typeface="Arial"/>
-              </a:rPr>
-              <a:t>  LỚP 7 • KHÁM PHÁ VIDEO BÀI HỌC</a:t>
+              </a:defRPr>
+            </a:pPr>
+            <a:r>
+              <a:t>QUY TRÌNH &amp; THAO TÁC</a:t>
             </a:r>
           </a:p>
         </p:txBody>
@@ -4067,8 +4344,8 @@
         </p:nvSpPr>
         <p:spPr>
           <a:xfrm>
-            <a:off x="457200" y="1600200"/>
-            <a:ext cx="11274552" cy="594360"/>
+            <a:off x="3474720" y="1115568"/>
+            <a:ext cx="8046720" cy="411479"/>
           </a:xfrm>
           <a:prstGeom prst="rect">
             <a:avLst/>
@@ -4076,45 +4353,44 @@
           <a:noFill/>
         </p:spPr>
         <p:txBody>
-          <a:bodyPr wrap="square">
+          <a:bodyPr wrap="square" lIns="73152" rIns="73152" tIns="54864" bIns="54864">
             <a:spAutoFit/>
           </a:bodyPr>
           <a:lstStyle/>
           <a:p>
-            <a:pPr algn="l"/>
-            <a:r>
-              <a:rPr sz="2600" b="1">
+            <a:pPr algn="l">
+              <a:defRPr sz="2100" b="1">
                 <a:solidFill>
                   <a:srgbClr val="0C4A6E"/>
                 </a:solidFill>
                 <a:latin typeface="Arial"/>
-              </a:rPr>
-              <a:t>Quản lý dữ liệu &amp; Văn hóa Mạng xã hội 🎬</a:t>
-            </a:r>
-          </a:p>
-        </p:txBody>
-      </p:sp>
-      <p:sp>
-        <p:nvSpPr>
-          <p:cNvPr id="6" name="Rounded Rectangle 5"/>
+              </a:defRPr>
+            </a:pPr>
+            <a:r>
+              <a:t>Các phần mở rộng tệp (File Extensions) thông dụng</a:t>
+            </a:r>
+          </a:p>
+        </p:txBody>
+      </p:sp>
+      <p:sp>
+        <p:nvSpPr>
+          <p:cNvPr id="6" name="Chevron 5"/>
           <p:cNvSpPr/>
           <p:nvPr/>
         </p:nvSpPr>
         <p:spPr>
           <a:xfrm>
-            <a:off x="365760" y="2286000"/>
-            <a:ext cx="6858000" cy="3383279"/>
-          </a:xfrm>
-          <a:prstGeom prst="roundRect">
+            <a:off x="365760" y="1645920"/>
+            <a:ext cx="4754880" cy="685799"/>
+          </a:xfrm>
+          <a:prstGeom prst="chevron">
             <a:avLst/>
           </a:prstGeom>
           <a:solidFill>
-            <a:srgbClr val="FFFFFF"/>
+            <a:srgbClr val="0369A1"/>
           </a:solidFill>
-          <a:ln w="12700">
-            <a:solidFill>
-              <a:srgbClr val="EF4444"/>
-            </a:solidFill>
+          <a:ln>
+            <a:noFill/>
           </a:ln>
         </p:spPr>
         <p:style>
@@ -4141,20 +4417,56 @@
       </p:sp>
       <p:sp>
         <p:nvSpPr>
-          <p:cNvPr id="7" name="Rectangle 6"/>
+          <p:cNvPr id="7" name="TextBox 6"/>
+          <p:cNvSpPr txBox="1"/>
+          <p:nvPr/>
+        </p:nvSpPr>
+        <p:spPr>
+          <a:xfrm>
+            <a:off x="640080" y="1719072"/>
+            <a:ext cx="4206240" cy="548639"/>
+          </a:xfrm>
+          <a:prstGeom prst="rect">
+            <a:avLst/>
+          </a:prstGeom>
+          <a:noFill/>
+        </p:spPr>
+        <p:txBody>
+          <a:bodyPr wrap="square" lIns="73152" rIns="73152" tIns="54864" bIns="54864">
+            <a:spAutoFit/>
+          </a:bodyPr>
+          <a:lstStyle/>
+          <a:p>
+            <a:pPr algn="l">
+              <a:defRPr sz="1400" b="1">
+                <a:solidFill>
+                  <a:srgbClr val="FFFFFF"/>
+                </a:solidFill>
+                <a:latin typeface="Arial"/>
+              </a:defRPr>
+            </a:pPr>
+            <a:r>
+              <a:t>.docx / .pdf: Tệp văn bản và tài liệu</a:t>
+            </a:r>
+          </a:p>
+        </p:txBody>
+      </p:sp>
+      <p:sp>
+        <p:nvSpPr>
+          <p:cNvPr id="8" name="Chevron 7"/>
           <p:cNvSpPr/>
           <p:nvPr/>
         </p:nvSpPr>
         <p:spPr>
           <a:xfrm>
-            <a:off x="365760" y="2286000"/>
-            <a:ext cx="109728" cy="3383279"/>
-          </a:xfrm>
-          <a:prstGeom prst="rect">
+            <a:off x="365760" y="2441448"/>
+            <a:ext cx="4754880" cy="685800"/>
+          </a:xfrm>
+          <a:prstGeom prst="chevron">
             <a:avLst/>
           </a:prstGeom>
           <a:solidFill>
-            <a:srgbClr val="EF4444"/>
+            <a:srgbClr val="0EA5E9"/>
           </a:solidFill>
           <a:ln>
             <a:noFill/>
@@ -4184,14 +4496,14 @@
       </p:sp>
       <p:sp>
         <p:nvSpPr>
-          <p:cNvPr id="8" name="TextBox 7"/>
+          <p:cNvPr id="9" name="TextBox 8"/>
           <p:cNvSpPr txBox="1"/>
           <p:nvPr/>
         </p:nvSpPr>
         <p:spPr>
           <a:xfrm>
-            <a:off x="731520" y="2468880"/>
-            <a:ext cx="6309360" cy="3017520"/>
+            <a:off x="640080" y="2514600"/>
+            <a:ext cx="4206240" cy="548640"/>
           </a:xfrm>
           <a:prstGeom prst="rect">
             <a:avLst/>
@@ -4199,111 +4511,310 @@
           <a:noFill/>
         </p:spPr>
         <p:txBody>
-          <a:bodyPr wrap="square">
+          <a:bodyPr wrap="square" lIns="73152" rIns="73152" tIns="54864" bIns="54864">
             <a:spAutoFit/>
           </a:bodyPr>
           <a:lstStyle/>
           <a:p>
             <a:pPr algn="l">
-              <a:spcAft>
-                <a:spcPts val="600"/>
-              </a:spcAft>
-            </a:pPr>
-            <a:r>
-              <a:rPr sz="1700" b="0">
+              <a:defRPr sz="1400" b="1">
                 <a:solidFill>
-                  <a:srgbClr val="0C4A6E"/>
+                  <a:srgbClr val="FFFFFF"/>
                 </a:solidFill>
                 <a:latin typeface="Arial"/>
-              </a:rPr>
-              <a:t>Video chia sẻ kỹ năng quản lý tệp tin an toàn và các nguyên tắc ứng xử văn minh trên mạng xã hội!</a:t>
-            </a:r>
-          </a:p>
+              </a:defRPr>
+            </a:pPr>
+            <a:r>
+              <a:t>.xlsx: Tệp bảng tính điện tử Excel</a:t>
+            </a:r>
+          </a:p>
+        </p:txBody>
+      </p:sp>
+      <p:sp>
+        <p:nvSpPr>
+          <p:cNvPr id="10" name="Chevron 9"/>
+          <p:cNvSpPr/>
+          <p:nvPr/>
+        </p:nvSpPr>
+        <p:spPr>
+          <a:xfrm>
+            <a:off x="365760" y="3236976"/>
+            <a:ext cx="4754880" cy="685800"/>
+          </a:xfrm>
+          <a:prstGeom prst="chevron">
+            <a:avLst/>
+          </a:prstGeom>
+          <a:solidFill>
+            <a:srgbClr val="0D9488"/>
+          </a:solidFill>
+          <a:ln>
+            <a:noFill/>
+          </a:ln>
+        </p:spPr>
+        <p:style>
+          <a:lnRef idx="1">
+            <a:schemeClr val="accent1"/>
+          </a:lnRef>
+          <a:fillRef idx="3">
+            <a:schemeClr val="accent1"/>
+          </a:fillRef>
+          <a:effectRef idx="2">
+            <a:schemeClr val="accent1"/>
+          </a:effectRef>
+          <a:fontRef idx="minor">
+            <a:schemeClr val="lt1"/>
+          </a:fontRef>
+        </p:style>
+        <p:txBody>
+          <a:bodyPr rtlCol="0" anchor="ctr"/>
+          <a:lstStyle/>
+          <a:p>
+            <a:pPr algn="ctr"/>
+          </a:p>
+        </p:txBody>
+      </p:sp>
+      <p:sp>
+        <p:nvSpPr>
+          <p:cNvPr id="11" name="TextBox 10"/>
+          <p:cNvSpPr txBox="1"/>
+          <p:nvPr/>
+        </p:nvSpPr>
+        <p:spPr>
+          <a:xfrm>
+            <a:off x="640080" y="3310128"/>
+            <a:ext cx="4206240" cy="548639"/>
+          </a:xfrm>
+          <a:prstGeom prst="rect">
+            <a:avLst/>
+          </a:prstGeom>
+          <a:noFill/>
+        </p:spPr>
+        <p:txBody>
+          <a:bodyPr wrap="square" lIns="73152" rIns="73152" tIns="54864" bIns="54864">
+            <a:spAutoFit/>
+          </a:bodyPr>
+          <a:lstStyle/>
           <a:p>
             <a:pPr algn="l">
-              <a:spcAft>
-                <a:spcPts val="600"/>
-              </a:spcAft>
-            </a:pPr>
-            <a:r>
-              <a:rPr sz="1700" b="0">
+              <a:defRPr sz="1400" b="1">
                 <a:solidFill>
-                  <a:srgbClr val="0C4A6E"/>
+                  <a:srgbClr val="FFFFFF"/>
                 </a:solidFill>
                 <a:latin typeface="Arial"/>
-              </a:rPr>
-              <a:t/>
-            </a:r>
-          </a:p>
+              </a:defRPr>
+            </a:pPr>
+            <a:r>
+              <a:t>.pptx: Tệp bài trình chiếu PowerPoint</a:t>
+            </a:r>
+          </a:p>
+        </p:txBody>
+      </p:sp>
+      <p:sp>
+        <p:nvSpPr>
+          <p:cNvPr id="12" name="Chevron 11"/>
+          <p:cNvSpPr/>
+          <p:nvPr/>
+        </p:nvSpPr>
+        <p:spPr>
+          <a:xfrm>
+            <a:off x="365760" y="4032504"/>
+            <a:ext cx="4754880" cy="685800"/>
+          </a:xfrm>
+          <a:prstGeom prst="chevron">
+            <a:avLst/>
+          </a:prstGeom>
+          <a:solidFill>
+            <a:srgbClr val="D97706"/>
+          </a:solidFill>
+          <a:ln>
+            <a:noFill/>
+          </a:ln>
+        </p:spPr>
+        <p:style>
+          <a:lnRef idx="1">
+            <a:schemeClr val="accent1"/>
+          </a:lnRef>
+          <a:fillRef idx="3">
+            <a:schemeClr val="accent1"/>
+          </a:fillRef>
+          <a:effectRef idx="2">
+            <a:schemeClr val="accent1"/>
+          </a:effectRef>
+          <a:fontRef idx="minor">
+            <a:schemeClr val="lt1"/>
+          </a:fontRef>
+        </p:style>
+        <p:txBody>
+          <a:bodyPr rtlCol="0" anchor="ctr"/>
+          <a:lstStyle/>
+          <a:p>
+            <a:pPr algn="ctr"/>
+          </a:p>
+        </p:txBody>
+      </p:sp>
+      <p:sp>
+        <p:nvSpPr>
+          <p:cNvPr id="13" name="TextBox 12"/>
+          <p:cNvSpPr txBox="1"/>
+          <p:nvPr/>
+        </p:nvSpPr>
+        <p:spPr>
+          <a:xfrm>
+            <a:off x="640080" y="4105656"/>
+            <a:ext cx="4206240" cy="548639"/>
+          </a:xfrm>
+          <a:prstGeom prst="rect">
+            <a:avLst/>
+          </a:prstGeom>
+          <a:noFill/>
+        </p:spPr>
+        <p:txBody>
+          <a:bodyPr wrap="square" lIns="73152" rIns="73152" tIns="54864" bIns="54864">
+            <a:spAutoFit/>
+          </a:bodyPr>
+          <a:lstStyle/>
           <a:p>
             <a:pPr algn="l">
-              <a:spcAft>
-                <a:spcPts val="600"/>
-              </a:spcAft>
-            </a:pPr>
-            <a:r>
-              <a:rPr sz="1700" b="0">
+              <a:defRPr sz="1400" b="1">
                 <a:solidFill>
-                  <a:srgbClr val="0C4A6E"/>
+                  <a:srgbClr val="FFFFFF"/>
                 </a:solidFill>
                 <a:latin typeface="Arial"/>
-              </a:rPr>
-              <a:t>🔗 Đường link video tham khảo:</a:t>
-            </a:r>
-          </a:p>
+              </a:defRPr>
+            </a:pPr>
+            <a:r>
+              <a:t>.jpg / .png: Tệp hình ảnh đồ họa</a:t>
+            </a:r>
+          </a:p>
+        </p:txBody>
+      </p:sp>
+      <p:sp>
+        <p:nvSpPr>
+          <p:cNvPr id="14" name="Chevron 13"/>
+          <p:cNvSpPr/>
+          <p:nvPr/>
+        </p:nvSpPr>
+        <p:spPr>
+          <a:xfrm>
+            <a:off x="365760" y="4828032"/>
+            <a:ext cx="4754880" cy="685800"/>
+          </a:xfrm>
+          <a:prstGeom prst="chevron">
+            <a:avLst/>
+          </a:prstGeom>
+          <a:solidFill>
+            <a:srgbClr val="7C3AED"/>
+          </a:solidFill>
+          <a:ln>
+            <a:noFill/>
+          </a:ln>
+        </p:spPr>
+        <p:style>
+          <a:lnRef idx="1">
+            <a:schemeClr val="accent1"/>
+          </a:lnRef>
+          <a:fillRef idx="3">
+            <a:schemeClr val="accent1"/>
+          </a:fillRef>
+          <a:effectRef idx="2">
+            <a:schemeClr val="accent1"/>
+          </a:effectRef>
+          <a:fontRef idx="minor">
+            <a:schemeClr val="lt1"/>
+          </a:fontRef>
+        </p:style>
+        <p:txBody>
+          <a:bodyPr rtlCol="0" anchor="ctr"/>
+          <a:lstStyle/>
+          <a:p>
+            <a:pPr algn="ctr"/>
+          </a:p>
+        </p:txBody>
+      </p:sp>
+      <p:sp>
+        <p:nvSpPr>
+          <p:cNvPr id="15" name="TextBox 14"/>
+          <p:cNvSpPr txBox="1"/>
+          <p:nvPr/>
+        </p:nvSpPr>
+        <p:spPr>
+          <a:xfrm>
+            <a:off x="640080" y="4901184"/>
+            <a:ext cx="4206240" cy="548639"/>
+          </a:xfrm>
+          <a:prstGeom prst="rect">
+            <a:avLst/>
+          </a:prstGeom>
+          <a:noFill/>
+        </p:spPr>
+        <p:txBody>
+          <a:bodyPr wrap="square" lIns="73152" rIns="73152" tIns="54864" bIns="54864">
+            <a:spAutoFit/>
+          </a:bodyPr>
+          <a:lstStyle/>
           <a:p>
             <a:pPr algn="l">
-              <a:spcAft>
-                <a:spcPts val="600"/>
-              </a:spcAft>
-            </a:pPr>
-            <a:r>
-              <a:rPr sz="1700" b="0">
+              <a:defRPr sz="1400" b="1">
                 <a:solidFill>
-                  <a:srgbClr val="0C4A6E"/>
+                  <a:srgbClr val="FFFFFF"/>
                 </a:solidFill>
                 <a:latin typeface="Arial"/>
-              </a:rPr>
-              <a:t>https://www.youtube.com/watch?v=5Vj6m7k8n0P</a:t>
-            </a:r>
-          </a:p>
-          <a:p>
-            <a:pPr algn="l">
-              <a:spcAft>
-                <a:spcPts val="600"/>
-              </a:spcAft>
+              </a:defRPr>
             </a:pPr>
             <a:r>
-              <a:rPr sz="1700" b="0">
-                <a:solidFill>
-                  <a:srgbClr val="0C4A6E"/>
-                </a:solidFill>
-                <a:latin typeface="Arial"/>
-              </a:rPr>
-              <a:t/>
-            </a:r>
-          </a:p>
-          <a:p>
-            <a:pPr algn="l">
-              <a:spcAft>
-                <a:spcPts val="600"/>
-              </a:spcAft>
-            </a:pPr>
-            <a:r>
-              <a:rPr sz="1700" b="0">
-                <a:solidFill>
-                  <a:srgbClr val="0C4A6E"/>
-                </a:solidFill>
-                <a:latin typeface="Arial"/>
-              </a:rPr>
-              <a:t>💡 Thầy/Cô sẽ chiếu video cho các em quan sát nhé!</a:t>
-            </a:r>
+              <a:t>.mp3 / .mp4: Tệp âm thanh và video đa phương tiện</a:t>
+            </a:r>
+          </a:p>
+        </p:txBody>
+      </p:sp>
+      <p:sp>
+        <p:nvSpPr>
+          <p:cNvPr id="16" name="Rounded Rectangle 15"/>
+          <p:cNvSpPr/>
+          <p:nvPr/>
+        </p:nvSpPr>
+        <p:spPr>
+          <a:xfrm>
+            <a:off x="5394960" y="1645920"/>
+            <a:ext cx="6309360" cy="3977639"/>
+          </a:xfrm>
+          <a:prstGeom prst="roundRect">
+            <a:avLst/>
+          </a:prstGeom>
+          <a:solidFill>
+            <a:srgbClr val="FFFFFF"/>
+          </a:solidFill>
+          <a:ln w="19050">
+            <a:solidFill>
+              <a:srgbClr val="CBD5E1"/>
+            </a:solidFill>
+          </a:ln>
+        </p:spPr>
+        <p:style>
+          <a:lnRef idx="1">
+            <a:schemeClr val="accent1"/>
+          </a:lnRef>
+          <a:fillRef idx="3">
+            <a:schemeClr val="accent1"/>
+          </a:fillRef>
+          <a:effectRef idx="2">
+            <a:schemeClr val="accent1"/>
+          </a:effectRef>
+          <a:fontRef idx="minor">
+            <a:schemeClr val="lt1"/>
+          </a:fontRef>
+        </p:style>
+        <p:txBody>
+          <a:bodyPr rtlCol="0" anchor="ctr"/>
+          <a:lstStyle/>
+          <a:p>
+            <a:pPr algn="ctr"/>
           </a:p>
         </p:txBody>
       </p:sp>
       <p:pic>
         <p:nvPicPr>
-          <p:cNvPr id="9" name="Picture 8" descr="learn1_card1.png"/>
+          <p:cNvPr id="17" name="Picture 16" descr="sgk_lop7_bai3_hinh32_duoi_mo_rong_tep.png"/>
           <p:cNvPicPr>
             <a:picLocks noChangeAspect="1"/>
           </p:cNvPicPr>
@@ -4317,8 +4828,8 @@
         </p:blipFill>
         <p:spPr>
           <a:xfrm>
-            <a:off x="7589520" y="2286000"/>
-            <a:ext cx="4114799" cy="3383279"/>
+            <a:off x="5486400" y="1737360"/>
+            <a:ext cx="6126480" cy="3794760"/>
           </a:xfrm>
           <a:prstGeom prst="rect">
             <a:avLst/>
@@ -4331,7 +4842,7 @@
     <a:masterClrMapping/>
   </p:clrMapOvr>
   <p:transition spd="med">
-    <p:cover/>
+    <p:fade/>
   </p:transition>
 </p:sld>
 </file>
@@ -4391,16 +4902,16 @@
       </p:sp>
       <p:sp>
         <p:nvSpPr>
-          <p:cNvPr id="3" name="Rectangle 2"/>
+          <p:cNvPr id="3" name="Rounded Rectangle 2"/>
           <p:cNvSpPr/>
           <p:nvPr/>
         </p:nvSpPr>
         <p:spPr>
           <a:xfrm>
-            <a:off x="0" y="1097280"/>
-            <a:ext cx="12188952" cy="411479"/>
-          </a:xfrm>
-          <a:prstGeom prst="rect">
+            <a:off x="365760" y="1143000"/>
+            <a:ext cx="2926080" cy="347471"/>
+          </a:xfrm>
+          <a:prstGeom prst="roundRect">
             <a:avLst/>
           </a:prstGeom>
           <a:solidFill>
@@ -4440,8 +4951,8 @@
         </p:nvSpPr>
         <p:spPr>
           <a:xfrm>
-            <a:off x="274320" y="1124712"/>
-            <a:ext cx="11640312" cy="365760"/>
+            <a:off x="365760" y="1143000"/>
+            <a:ext cx="2926080" cy="347471"/>
           </a:xfrm>
           <a:prstGeom prst="rect">
             <a:avLst/>
@@ -4449,20 +4960,21 @@
           <a:noFill/>
         </p:spPr>
         <p:txBody>
-          <a:bodyPr wrap="square">
+          <a:bodyPr wrap="square" lIns="73152" rIns="73152" tIns="54864" bIns="54864">
             <a:spAutoFit/>
           </a:bodyPr>
           <a:lstStyle/>
           <a:p>
-            <a:pPr algn="l"/>
-            <a:r>
-              <a:rPr sz="1300" b="1">
+            <a:pPr algn="ctr">
+              <a:defRPr sz="1300" b="1">
                 <a:solidFill>
                   <a:srgbClr val="FFFFFF"/>
                 </a:solidFill>
                 <a:latin typeface="Arial"/>
-              </a:rPr>
-              <a:t>  LỚP 7 • BÀI 3. QUẢN LÝ DỮ LIỆU &amp; BÀI 4. MẠNG XÃ HỘI</a:t>
+              </a:defRPr>
+            </a:pPr>
+            <a:r>
+              <a:t>HOẠT ĐỘNG KHÁM PHÁ</a:t>
             </a:r>
           </a:p>
         </p:txBody>
@@ -4475,8 +4987,8 @@
         </p:nvSpPr>
         <p:spPr>
           <a:xfrm>
-            <a:off x="457200" y="1600200"/>
-            <a:ext cx="11274552" cy="594360"/>
+            <a:off x="3474720" y="1115568"/>
+            <a:ext cx="8046720" cy="411479"/>
           </a:xfrm>
           <a:prstGeom prst="rect">
             <a:avLst/>
@@ -4484,27 +4996,305 @@
           <a:noFill/>
         </p:spPr>
         <p:txBody>
-          <a:bodyPr wrap="square">
+          <a:bodyPr wrap="square" lIns="73152" rIns="73152" tIns="54864" bIns="54864">
             <a:spAutoFit/>
           </a:bodyPr>
           <a:lstStyle/>
           <a:p>
-            <a:pPr algn="l"/>
-            <a:r>
-              <a:rPr sz="2600" b="1">
+            <a:pPr algn="l">
+              <a:defRPr sz="2100" b="1">
                 <a:solidFill>
                   <a:srgbClr val="0C4A6E"/>
                 </a:solidFill>
                 <a:latin typeface="Arial"/>
-              </a:rPr>
-              <a:t>Tiết 3: Quản lý dữ liệu trong máy tính</a:t>
-            </a:r>
+              </a:defRPr>
+            </a:pPr>
+            <a:r>
+              <a:t>Sao lưu dữ liệu &amp; Phòng chống Virus máy tính</a:t>
+            </a:r>
+          </a:p>
+        </p:txBody>
+      </p:sp>
+      <p:sp>
+        <p:nvSpPr>
+          <p:cNvPr id="6" name="Rounded Rectangle 5"/>
+          <p:cNvSpPr/>
+          <p:nvPr/>
+        </p:nvSpPr>
+        <p:spPr>
+          <a:xfrm>
+            <a:off x="365760" y="1645920"/>
+            <a:ext cx="3840480" cy="3977639"/>
+          </a:xfrm>
+          <a:prstGeom prst="roundRect">
+            <a:avLst/>
+          </a:prstGeom>
+          <a:solidFill>
+            <a:srgbClr val="FFFFFF"/>
+          </a:solidFill>
+          <a:ln w="19050">
+            <a:solidFill>
+              <a:srgbClr val="0EA5E9"/>
+            </a:solidFill>
+          </a:ln>
+        </p:spPr>
+        <p:style>
+          <a:lnRef idx="1">
+            <a:schemeClr val="accent1"/>
+          </a:lnRef>
+          <a:fillRef idx="3">
+            <a:schemeClr val="accent1"/>
+          </a:fillRef>
+          <a:effectRef idx="2">
+            <a:schemeClr val="accent1"/>
+          </a:effectRef>
+          <a:fontRef idx="minor">
+            <a:schemeClr val="lt1"/>
+          </a:fontRef>
+        </p:style>
+        <p:txBody>
+          <a:bodyPr rtlCol="0" anchor="ctr"/>
+          <a:lstStyle/>
+          <a:p>
+            <a:pPr algn="ctr"/>
+          </a:p>
+        </p:txBody>
+      </p:sp>
+      <p:sp>
+        <p:nvSpPr>
+          <p:cNvPr id="7" name="Rounded Rectangle 6"/>
+          <p:cNvSpPr/>
+          <p:nvPr/>
+        </p:nvSpPr>
+        <p:spPr>
+          <a:xfrm>
+            <a:off x="365760" y="1645920"/>
+            <a:ext cx="164592" cy="3977639"/>
+          </a:xfrm>
+          <a:prstGeom prst="roundRect">
+            <a:avLst/>
+          </a:prstGeom>
+          <a:solidFill>
+            <a:srgbClr val="0EA5E9"/>
+          </a:solidFill>
+          <a:ln>
+            <a:noFill/>
+          </a:ln>
+        </p:spPr>
+        <p:style>
+          <a:lnRef idx="1">
+            <a:schemeClr val="accent1"/>
+          </a:lnRef>
+          <a:fillRef idx="3">
+            <a:schemeClr val="accent1"/>
+          </a:fillRef>
+          <a:effectRef idx="2">
+            <a:schemeClr val="accent1"/>
+          </a:effectRef>
+          <a:fontRef idx="minor">
+            <a:schemeClr val="lt1"/>
+          </a:fontRef>
+        </p:style>
+        <p:txBody>
+          <a:bodyPr rtlCol="0" anchor="ctr"/>
+          <a:lstStyle/>
+          <a:p>
+            <a:pPr algn="ctr"/>
+          </a:p>
+        </p:txBody>
+      </p:sp>
+      <p:sp>
+        <p:nvSpPr>
+          <p:cNvPr id="8" name="TextBox 7"/>
+          <p:cNvSpPr txBox="1"/>
+          <p:nvPr/>
+        </p:nvSpPr>
+        <p:spPr>
+          <a:xfrm>
+            <a:off x="640080" y="1783080"/>
+            <a:ext cx="3429000" cy="640080"/>
+          </a:xfrm>
+          <a:prstGeom prst="rect">
+            <a:avLst/>
+          </a:prstGeom>
+          <a:noFill/>
+        </p:spPr>
+        <p:txBody>
+          <a:bodyPr wrap="square" lIns="73152" rIns="73152" tIns="54864" bIns="54864">
+            <a:spAutoFit/>
+          </a:bodyPr>
+          <a:lstStyle/>
+          <a:p>
+            <a:pPr algn="l">
+              <a:defRPr sz="1500" b="1">
+                <a:solidFill>
+                  <a:srgbClr val="0F172A"/>
+                </a:solidFill>
+                <a:latin typeface="Arial"/>
+              </a:defRPr>
+            </a:pPr>
+            <a:r>
+              <a:t>• Sao lưu định kỳ (Backup) ra USB, ổ cứng ngoài, Cloud</a:t>
+            </a:r>
+          </a:p>
+        </p:txBody>
+      </p:sp>
+      <p:sp>
+        <p:nvSpPr>
+          <p:cNvPr id="9" name="TextBox 8"/>
+          <p:cNvSpPr txBox="1"/>
+          <p:nvPr/>
+        </p:nvSpPr>
+        <p:spPr>
+          <a:xfrm>
+            <a:off x="640080" y="2468880"/>
+            <a:ext cx="3429000" cy="640080"/>
+          </a:xfrm>
+          <a:prstGeom prst="rect">
+            <a:avLst/>
+          </a:prstGeom>
+          <a:noFill/>
+        </p:spPr>
+        <p:txBody>
+          <a:bodyPr wrap="square" lIns="73152" rIns="73152" tIns="54864" bIns="54864">
+            <a:spAutoFit/>
+          </a:bodyPr>
+          <a:lstStyle/>
+          <a:p>
+            <a:pPr algn="l">
+              <a:defRPr sz="1500" b="1">
+                <a:solidFill>
+                  <a:srgbClr val="0F172A"/>
+                </a:solidFill>
+                <a:latin typeface="Arial"/>
+              </a:defRPr>
+            </a:pPr>
+            <a:r>
+              <a:t>• Tránh mất dữ liệu khi máy tính bị hỏng hóc</a:t>
+            </a:r>
+          </a:p>
+        </p:txBody>
+      </p:sp>
+      <p:sp>
+        <p:nvSpPr>
+          <p:cNvPr id="10" name="TextBox 9"/>
+          <p:cNvSpPr txBox="1"/>
+          <p:nvPr/>
+        </p:nvSpPr>
+        <p:spPr>
+          <a:xfrm>
+            <a:off x="640080" y="3154680"/>
+            <a:ext cx="3429000" cy="640080"/>
+          </a:xfrm>
+          <a:prstGeom prst="rect">
+            <a:avLst/>
+          </a:prstGeom>
+          <a:noFill/>
+        </p:spPr>
+        <p:txBody>
+          <a:bodyPr wrap="square" lIns="73152" rIns="73152" tIns="54864" bIns="54864">
+            <a:spAutoFit/>
+          </a:bodyPr>
+          <a:lstStyle/>
+          <a:p>
+            <a:pPr algn="l">
+              <a:defRPr sz="1500" b="1">
+                <a:solidFill>
+                  <a:srgbClr val="0F172A"/>
+                </a:solidFill>
+                <a:latin typeface="Arial"/>
+              </a:defRPr>
+            </a:pPr>
+            <a:r>
+              <a:t>• Bật tường lửa và phần mềm diệt virus (Windows Defender)</a:t>
+            </a:r>
+          </a:p>
+        </p:txBody>
+      </p:sp>
+      <p:sp>
+        <p:nvSpPr>
+          <p:cNvPr id="11" name="TextBox 10"/>
+          <p:cNvSpPr txBox="1"/>
+          <p:nvPr/>
+        </p:nvSpPr>
+        <p:spPr>
+          <a:xfrm>
+            <a:off x="640080" y="3840480"/>
+            <a:ext cx="3429000" cy="640080"/>
+          </a:xfrm>
+          <a:prstGeom prst="rect">
+            <a:avLst/>
+          </a:prstGeom>
+          <a:noFill/>
+        </p:spPr>
+        <p:txBody>
+          <a:bodyPr wrap="square" lIns="73152" rIns="73152" tIns="54864" bIns="54864">
+            <a:spAutoFit/>
+          </a:bodyPr>
+          <a:lstStyle/>
+          <a:p>
+            <a:pPr algn="l">
+              <a:defRPr sz="1500" b="1">
+                <a:solidFill>
+                  <a:srgbClr val="0F172A"/>
+                </a:solidFill>
+                <a:latin typeface="Arial"/>
+              </a:defRPr>
+            </a:pPr>
+            <a:r>
+              <a:t>• Tuyệt đối không mở các tệp đính kèm lạ có đuôi .exe, .bat</a:t>
+            </a:r>
+          </a:p>
+        </p:txBody>
+      </p:sp>
+      <p:sp>
+        <p:nvSpPr>
+          <p:cNvPr id="12" name="Rounded Rectangle 11"/>
+          <p:cNvSpPr/>
+          <p:nvPr/>
+        </p:nvSpPr>
+        <p:spPr>
+          <a:xfrm>
+            <a:off x="4480560" y="1645920"/>
+            <a:ext cx="7223760" cy="3977639"/>
+          </a:xfrm>
+          <a:prstGeom prst="roundRect">
+            <a:avLst/>
+          </a:prstGeom>
+          <a:solidFill>
+            <a:srgbClr val="FFFFFF"/>
+          </a:solidFill>
+          <a:ln w="19050">
+            <a:solidFill>
+              <a:srgbClr val="CBD5E1"/>
+            </a:solidFill>
+          </a:ln>
+        </p:spPr>
+        <p:style>
+          <a:lnRef idx="1">
+            <a:schemeClr val="accent1"/>
+          </a:lnRef>
+          <a:fillRef idx="3">
+            <a:schemeClr val="accent1"/>
+          </a:fillRef>
+          <a:effectRef idx="2">
+            <a:schemeClr val="accent1"/>
+          </a:effectRef>
+          <a:fontRef idx="minor">
+            <a:schemeClr val="lt1"/>
+          </a:fontRef>
+        </p:style>
+        <p:txBody>
+          <a:bodyPr rtlCol="0" anchor="ctr"/>
+          <a:lstStyle/>
+          <a:p>
+            <a:pPr algn="ctr"/>
           </a:p>
         </p:txBody>
       </p:sp>
       <p:pic>
         <p:nvPicPr>
-          <p:cNvPr id="6" name="Picture 5" descr="learn1_card1.png"/>
+          <p:cNvPr id="13" name="Picture 12" descr="sgk_lop7_bai3_hinh33_sao_luu_du_lieu.png"/>
           <p:cNvPicPr>
             <a:picLocks noChangeAspect="1"/>
           </p:cNvPicPr>
@@ -4518,585 +5308,21 @@
         </p:blipFill>
         <p:spPr>
           <a:xfrm>
-            <a:off x="457200" y="2286000"/>
-            <a:ext cx="2194560" cy="733805"/>
+            <a:off x="4572000" y="1737360"/>
+            <a:ext cx="7040880" cy="3794760"/>
           </a:xfrm>
           <a:prstGeom prst="rect">
             <a:avLst/>
           </a:prstGeom>
         </p:spPr>
       </p:pic>
-      <p:sp>
-        <p:nvSpPr>
-          <p:cNvPr id="7" name="Rounded Rectangle 6"/>
-          <p:cNvSpPr/>
-          <p:nvPr/>
-        </p:nvSpPr>
-        <p:spPr>
-          <a:xfrm>
-            <a:off x="2880360" y="2286000"/>
-            <a:ext cx="8851392" cy="733805"/>
-          </a:xfrm>
-          <a:prstGeom prst="roundRect">
-            <a:avLst/>
-          </a:prstGeom>
-          <a:solidFill>
-            <a:srgbClr val="FFFFFF"/>
-          </a:solidFill>
-          <a:ln w="12700">
-            <a:solidFill>
-              <a:srgbClr val="0EA5E9"/>
-            </a:solidFill>
-          </a:ln>
-        </p:spPr>
-        <p:style>
-          <a:lnRef idx="1">
-            <a:schemeClr val="accent1"/>
-          </a:lnRef>
-          <a:fillRef idx="3">
-            <a:schemeClr val="accent1"/>
-          </a:fillRef>
-          <a:effectRef idx="2">
-            <a:schemeClr val="accent1"/>
-          </a:effectRef>
-          <a:fontRef idx="minor">
-            <a:schemeClr val="lt1"/>
-          </a:fontRef>
-        </p:style>
-        <p:txBody>
-          <a:bodyPr rtlCol="0" anchor="ctr"/>
-          <a:lstStyle/>
-          <a:p>
-            <a:pPr algn="ctr"/>
-          </a:p>
-        </p:txBody>
-      </p:sp>
-      <p:sp>
-        <p:nvSpPr>
-          <p:cNvPr id="8" name="Rectangle 7"/>
-          <p:cNvSpPr/>
-          <p:nvPr/>
-        </p:nvSpPr>
-        <p:spPr>
-          <a:xfrm>
-            <a:off x="2880360" y="2286000"/>
-            <a:ext cx="91440" cy="733805"/>
-          </a:xfrm>
-          <a:prstGeom prst="rect">
-            <a:avLst/>
-          </a:prstGeom>
-          <a:solidFill>
-            <a:srgbClr val="0EA5E9"/>
-          </a:solidFill>
-          <a:ln>
-            <a:noFill/>
-          </a:ln>
-        </p:spPr>
-        <p:style>
-          <a:lnRef idx="1">
-            <a:schemeClr val="accent1"/>
-          </a:lnRef>
-          <a:fillRef idx="3">
-            <a:schemeClr val="accent1"/>
-          </a:fillRef>
-          <a:effectRef idx="2">
-            <a:schemeClr val="accent1"/>
-          </a:effectRef>
-          <a:fontRef idx="minor">
-            <a:schemeClr val="lt1"/>
-          </a:fontRef>
-        </p:style>
-        <p:txBody>
-          <a:bodyPr rtlCol="0" anchor="ctr"/>
-          <a:lstStyle/>
-          <a:p>
-            <a:pPr algn="ctr"/>
-          </a:p>
-        </p:txBody>
-      </p:sp>
-      <p:sp>
-        <p:nvSpPr>
-          <p:cNvPr id="9" name="TextBox 8"/>
-          <p:cNvSpPr txBox="1"/>
-          <p:nvPr/>
-        </p:nvSpPr>
-        <p:spPr>
-          <a:xfrm>
-            <a:off x="3108960" y="2423160"/>
-            <a:ext cx="8485632" cy="459485"/>
-          </a:xfrm>
-          <a:prstGeom prst="rect">
-            <a:avLst/>
-          </a:prstGeom>
-          <a:noFill/>
-        </p:spPr>
-        <p:txBody>
-          <a:bodyPr wrap="square">
-            <a:spAutoFit/>
-          </a:bodyPr>
-          <a:lstStyle/>
-          <a:p>
-            <a:pPr algn="l"/>
-            <a:r>
-              <a:rPr sz="1800" b="1">
-                <a:solidFill>
-                  <a:srgbClr val="0F172A"/>
-                </a:solidFill>
-                <a:latin typeface="Arial"/>
-              </a:rPr>
-              <a:t>Phần mềm quản lý tệp tin (File Explorer)</a:t>
-            </a:r>
-          </a:p>
-        </p:txBody>
-      </p:sp>
-      <p:pic>
-        <p:nvPicPr>
-          <p:cNvPr id="10" name="Picture 9" descr="learn1_card2.png"/>
-          <p:cNvPicPr>
-            <a:picLocks noChangeAspect="1"/>
-          </p:cNvPicPr>
-          <p:nvPr/>
-        </p:nvPicPr>
-        <p:blipFill>
-          <a:blip r:embed="rId3"/>
-          <a:stretch>
-            <a:fillRect/>
-          </a:stretch>
-        </p:blipFill>
-        <p:spPr>
-          <a:xfrm>
-            <a:off x="457200" y="3184398"/>
-            <a:ext cx="2194560" cy="733806"/>
-          </a:xfrm>
-          <a:prstGeom prst="rect">
-            <a:avLst/>
-          </a:prstGeom>
-        </p:spPr>
-      </p:pic>
-      <p:sp>
-        <p:nvSpPr>
-          <p:cNvPr id="11" name="Rounded Rectangle 10"/>
-          <p:cNvSpPr/>
-          <p:nvPr/>
-        </p:nvSpPr>
-        <p:spPr>
-          <a:xfrm>
-            <a:off x="2880360" y="3184398"/>
-            <a:ext cx="8851392" cy="733806"/>
-          </a:xfrm>
-          <a:prstGeom prst="roundRect">
-            <a:avLst/>
-          </a:prstGeom>
-          <a:solidFill>
-            <a:srgbClr val="FFFFFF"/>
-          </a:solidFill>
-          <a:ln w="12700">
-            <a:solidFill>
-              <a:srgbClr val="0EA5E9"/>
-            </a:solidFill>
-          </a:ln>
-        </p:spPr>
-        <p:style>
-          <a:lnRef idx="1">
-            <a:schemeClr val="accent1"/>
-          </a:lnRef>
-          <a:fillRef idx="3">
-            <a:schemeClr val="accent1"/>
-          </a:fillRef>
-          <a:effectRef idx="2">
-            <a:schemeClr val="accent1"/>
-          </a:effectRef>
-          <a:fontRef idx="minor">
-            <a:schemeClr val="lt1"/>
-          </a:fontRef>
-        </p:style>
-        <p:txBody>
-          <a:bodyPr rtlCol="0" anchor="ctr"/>
-          <a:lstStyle/>
-          <a:p>
-            <a:pPr algn="ctr"/>
-          </a:p>
-        </p:txBody>
-      </p:sp>
-      <p:sp>
-        <p:nvSpPr>
-          <p:cNvPr id="12" name="Rectangle 11"/>
-          <p:cNvSpPr/>
-          <p:nvPr/>
-        </p:nvSpPr>
-        <p:spPr>
-          <a:xfrm>
-            <a:off x="2880360" y="3184398"/>
-            <a:ext cx="91440" cy="733806"/>
-          </a:xfrm>
-          <a:prstGeom prst="rect">
-            <a:avLst/>
-          </a:prstGeom>
-          <a:solidFill>
-            <a:srgbClr val="0EA5E9"/>
-          </a:solidFill>
-          <a:ln>
-            <a:noFill/>
-          </a:ln>
-        </p:spPr>
-        <p:style>
-          <a:lnRef idx="1">
-            <a:schemeClr val="accent1"/>
-          </a:lnRef>
-          <a:fillRef idx="3">
-            <a:schemeClr val="accent1"/>
-          </a:fillRef>
-          <a:effectRef idx="2">
-            <a:schemeClr val="accent1"/>
-          </a:effectRef>
-          <a:fontRef idx="minor">
-            <a:schemeClr val="lt1"/>
-          </a:fontRef>
-        </p:style>
-        <p:txBody>
-          <a:bodyPr rtlCol="0" anchor="ctr"/>
-          <a:lstStyle/>
-          <a:p>
-            <a:pPr algn="ctr"/>
-          </a:p>
-        </p:txBody>
-      </p:sp>
-      <p:sp>
-        <p:nvSpPr>
-          <p:cNvPr id="13" name="TextBox 12"/>
-          <p:cNvSpPr txBox="1"/>
-          <p:nvPr/>
-        </p:nvSpPr>
-        <p:spPr>
-          <a:xfrm>
-            <a:off x="3108960" y="3321558"/>
-            <a:ext cx="8485632" cy="459485"/>
-          </a:xfrm>
-          <a:prstGeom prst="rect">
-            <a:avLst/>
-          </a:prstGeom>
-          <a:noFill/>
-        </p:spPr>
-        <p:txBody>
-          <a:bodyPr wrap="square">
-            <a:spAutoFit/>
-          </a:bodyPr>
-          <a:lstStyle/>
-          <a:p>
-            <a:pPr algn="l"/>
-            <a:r>
-              <a:rPr sz="1800" b="1">
-                <a:solidFill>
-                  <a:srgbClr val="0F172A"/>
-                </a:solidFill>
-                <a:latin typeface="Arial"/>
-              </a:rPr>
-              <a:t>Sao lưu dữ liệu định kỳ (Backup) lên đám mây hoặc ổ cứng ngoài</a:t>
-            </a:r>
-          </a:p>
-        </p:txBody>
-      </p:sp>
-      <p:pic>
-        <p:nvPicPr>
-          <p:cNvPr id="14" name="Picture 13" descr="learn1_card3.png"/>
-          <p:cNvPicPr>
-            <a:picLocks noChangeAspect="1"/>
-          </p:cNvPicPr>
-          <p:nvPr/>
-        </p:nvPicPr>
-        <p:blipFill>
-          <a:blip r:embed="rId4"/>
-          <a:stretch>
-            <a:fillRect/>
-          </a:stretch>
-        </p:blipFill>
-        <p:spPr>
-          <a:xfrm>
-            <a:off x="457200" y="4082796"/>
-            <a:ext cx="2194560" cy="733806"/>
-          </a:xfrm>
-          <a:prstGeom prst="rect">
-            <a:avLst/>
-          </a:prstGeom>
-        </p:spPr>
-      </p:pic>
-      <p:sp>
-        <p:nvSpPr>
-          <p:cNvPr id="15" name="Rounded Rectangle 14"/>
-          <p:cNvSpPr/>
-          <p:nvPr/>
-        </p:nvSpPr>
-        <p:spPr>
-          <a:xfrm>
-            <a:off x="2880360" y="4082796"/>
-            <a:ext cx="8851392" cy="733806"/>
-          </a:xfrm>
-          <a:prstGeom prst="roundRect">
-            <a:avLst/>
-          </a:prstGeom>
-          <a:solidFill>
-            <a:srgbClr val="FFFFFF"/>
-          </a:solidFill>
-          <a:ln w="12700">
-            <a:solidFill>
-              <a:srgbClr val="0EA5E9"/>
-            </a:solidFill>
-          </a:ln>
-        </p:spPr>
-        <p:style>
-          <a:lnRef idx="1">
-            <a:schemeClr val="accent1"/>
-          </a:lnRef>
-          <a:fillRef idx="3">
-            <a:schemeClr val="accent1"/>
-          </a:fillRef>
-          <a:effectRef idx="2">
-            <a:schemeClr val="accent1"/>
-          </a:effectRef>
-          <a:fontRef idx="minor">
-            <a:schemeClr val="lt1"/>
-          </a:fontRef>
-        </p:style>
-        <p:txBody>
-          <a:bodyPr rtlCol="0" anchor="ctr"/>
-          <a:lstStyle/>
-          <a:p>
-            <a:pPr algn="ctr"/>
-          </a:p>
-        </p:txBody>
-      </p:sp>
-      <p:sp>
-        <p:nvSpPr>
-          <p:cNvPr id="16" name="Rectangle 15"/>
-          <p:cNvSpPr/>
-          <p:nvPr/>
-        </p:nvSpPr>
-        <p:spPr>
-          <a:xfrm>
-            <a:off x="2880360" y="4082796"/>
-            <a:ext cx="91440" cy="733806"/>
-          </a:xfrm>
-          <a:prstGeom prst="rect">
-            <a:avLst/>
-          </a:prstGeom>
-          <a:solidFill>
-            <a:srgbClr val="0EA5E9"/>
-          </a:solidFill>
-          <a:ln>
-            <a:noFill/>
-          </a:ln>
-        </p:spPr>
-        <p:style>
-          <a:lnRef idx="1">
-            <a:schemeClr val="accent1"/>
-          </a:lnRef>
-          <a:fillRef idx="3">
-            <a:schemeClr val="accent1"/>
-          </a:fillRef>
-          <a:effectRef idx="2">
-            <a:schemeClr val="accent1"/>
-          </a:effectRef>
-          <a:fontRef idx="minor">
-            <a:schemeClr val="lt1"/>
-          </a:fontRef>
-        </p:style>
-        <p:txBody>
-          <a:bodyPr rtlCol="0" anchor="ctr"/>
-          <a:lstStyle/>
-          <a:p>
-            <a:pPr algn="ctr"/>
-          </a:p>
-        </p:txBody>
-      </p:sp>
-      <p:sp>
-        <p:nvSpPr>
-          <p:cNvPr id="17" name="TextBox 16"/>
-          <p:cNvSpPr txBox="1"/>
-          <p:nvPr/>
-        </p:nvSpPr>
-        <p:spPr>
-          <a:xfrm>
-            <a:off x="3108960" y="4219956"/>
-            <a:ext cx="8485632" cy="459485"/>
-          </a:xfrm>
-          <a:prstGeom prst="rect">
-            <a:avLst/>
-          </a:prstGeom>
-          <a:noFill/>
-        </p:spPr>
-        <p:txBody>
-          <a:bodyPr wrap="square">
-            <a:spAutoFit/>
-          </a:bodyPr>
-          <a:lstStyle/>
-          <a:p>
-            <a:pPr algn="l"/>
-            <a:r>
-              <a:rPr sz="1800" b="1">
-                <a:solidFill>
-                  <a:srgbClr val="0F172A"/>
-                </a:solidFill>
-                <a:latin typeface="Arial"/>
-              </a:rPr>
-              <a:t>Đặt tên tệp và thư mục khoa học, dễ tìm kiếm</a:t>
-            </a:r>
-          </a:p>
-        </p:txBody>
-      </p:sp>
-      <p:pic>
-        <p:nvPicPr>
-          <p:cNvPr id="18" name="Picture 17" descr="learn1_card4.png"/>
-          <p:cNvPicPr>
-            <a:picLocks noChangeAspect="1"/>
-          </p:cNvPicPr>
-          <p:nvPr/>
-        </p:nvPicPr>
-        <p:blipFill>
-          <a:blip r:embed="rId5"/>
-          <a:stretch>
-            <a:fillRect/>
-          </a:stretch>
-        </p:blipFill>
-        <p:spPr>
-          <a:xfrm>
-            <a:off x="457200" y="4981194"/>
-            <a:ext cx="2194560" cy="733806"/>
-          </a:xfrm>
-          <a:prstGeom prst="rect">
-            <a:avLst/>
-          </a:prstGeom>
-        </p:spPr>
-      </p:pic>
-      <p:sp>
-        <p:nvSpPr>
-          <p:cNvPr id="19" name="Rounded Rectangle 18"/>
-          <p:cNvSpPr/>
-          <p:nvPr/>
-        </p:nvSpPr>
-        <p:spPr>
-          <a:xfrm>
-            <a:off x="2880360" y="4981194"/>
-            <a:ext cx="8851392" cy="733806"/>
-          </a:xfrm>
-          <a:prstGeom prst="roundRect">
-            <a:avLst/>
-          </a:prstGeom>
-          <a:solidFill>
-            <a:srgbClr val="FFFFFF"/>
-          </a:solidFill>
-          <a:ln w="12700">
-            <a:solidFill>
-              <a:srgbClr val="0EA5E9"/>
-            </a:solidFill>
-          </a:ln>
-        </p:spPr>
-        <p:style>
-          <a:lnRef idx="1">
-            <a:schemeClr val="accent1"/>
-          </a:lnRef>
-          <a:fillRef idx="3">
-            <a:schemeClr val="accent1"/>
-          </a:fillRef>
-          <a:effectRef idx="2">
-            <a:schemeClr val="accent1"/>
-          </a:effectRef>
-          <a:fontRef idx="minor">
-            <a:schemeClr val="lt1"/>
-          </a:fontRef>
-        </p:style>
-        <p:txBody>
-          <a:bodyPr rtlCol="0" anchor="ctr"/>
-          <a:lstStyle/>
-          <a:p>
-            <a:pPr algn="ctr"/>
-          </a:p>
-        </p:txBody>
-      </p:sp>
-      <p:sp>
-        <p:nvSpPr>
-          <p:cNvPr id="20" name="Rectangle 19"/>
-          <p:cNvSpPr/>
-          <p:nvPr/>
-        </p:nvSpPr>
-        <p:spPr>
-          <a:xfrm>
-            <a:off x="2880360" y="4981194"/>
-            <a:ext cx="91440" cy="733806"/>
-          </a:xfrm>
-          <a:prstGeom prst="rect">
-            <a:avLst/>
-          </a:prstGeom>
-          <a:solidFill>
-            <a:srgbClr val="0EA5E9"/>
-          </a:solidFill>
-          <a:ln>
-            <a:noFill/>
-          </a:ln>
-        </p:spPr>
-        <p:style>
-          <a:lnRef idx="1">
-            <a:schemeClr val="accent1"/>
-          </a:lnRef>
-          <a:fillRef idx="3">
-            <a:schemeClr val="accent1"/>
-          </a:fillRef>
-          <a:effectRef idx="2">
-            <a:schemeClr val="accent1"/>
-          </a:effectRef>
-          <a:fontRef idx="minor">
-            <a:schemeClr val="lt1"/>
-          </a:fontRef>
-        </p:style>
-        <p:txBody>
-          <a:bodyPr rtlCol="0" anchor="ctr"/>
-          <a:lstStyle/>
-          <a:p>
-            <a:pPr algn="ctr"/>
-          </a:p>
-        </p:txBody>
-      </p:sp>
-      <p:sp>
-        <p:nvSpPr>
-          <p:cNvPr id="21" name="TextBox 20"/>
-          <p:cNvSpPr txBox="1"/>
-          <p:nvPr/>
-        </p:nvSpPr>
-        <p:spPr>
-          <a:xfrm>
-            <a:off x="3108960" y="5118354"/>
-            <a:ext cx="8485632" cy="459485"/>
-          </a:xfrm>
-          <a:prstGeom prst="rect">
-            <a:avLst/>
-          </a:prstGeom>
-          <a:noFill/>
-        </p:spPr>
-        <p:txBody>
-          <a:bodyPr wrap="square">
-            <a:spAutoFit/>
-          </a:bodyPr>
-          <a:lstStyle/>
-          <a:p>
-            <a:pPr algn="l"/>
-            <a:r>
-              <a:rPr sz="1800" b="1">
-                <a:solidFill>
-                  <a:srgbClr val="0F172A"/>
-                </a:solidFill>
-                <a:latin typeface="Arial"/>
-              </a:rPr>
-              <a:t>Các biện pháp bảo vệ dữ liệu: đặt mật khẩu, cài phần mềm diệt virus</a:t>
-            </a:r>
-          </a:p>
-        </p:txBody>
-      </p:sp>
     </p:spTree>
   </p:cSld>
   <p:clrMapOvr>
     <a:masterClrMapping/>
   </p:clrMapOvr>
   <p:transition spd="med">
-    <p:wipe/>
+    <p:fade/>
   </p:transition>
 </p:sld>
 </file>
@@ -5156,16 +5382,16 @@
       </p:sp>
       <p:sp>
         <p:nvSpPr>
-          <p:cNvPr id="3" name="Rectangle 2"/>
+          <p:cNvPr id="3" name="Rounded Rectangle 2"/>
           <p:cNvSpPr/>
           <p:nvPr/>
         </p:nvSpPr>
         <p:spPr>
           <a:xfrm>
-            <a:off x="0" y="1097280"/>
-            <a:ext cx="12188952" cy="411479"/>
-          </a:xfrm>
-          <a:prstGeom prst="rect">
+            <a:off x="1371600" y="1645920"/>
+            <a:ext cx="9445752" cy="3474720"/>
+          </a:xfrm>
+          <a:prstGeom prst="roundRect">
             <a:avLst/>
           </a:prstGeom>
           <a:solidFill>
@@ -5199,155 +5425,16 @@
       </p:sp>
       <p:sp>
         <p:nvSpPr>
-          <p:cNvPr id="4" name="TextBox 3"/>
-          <p:cNvSpPr txBox="1"/>
-          <p:nvPr/>
-        </p:nvSpPr>
-        <p:spPr>
-          <a:xfrm>
-            <a:off x="274320" y="1124712"/>
-            <a:ext cx="11640312" cy="365760"/>
-          </a:xfrm>
-          <a:prstGeom prst="rect">
-            <a:avLst/>
-          </a:prstGeom>
-          <a:noFill/>
-        </p:spPr>
-        <p:txBody>
-          <a:bodyPr wrap="square">
-            <a:spAutoFit/>
-          </a:bodyPr>
-          <a:lstStyle/>
-          <a:p>
-            <a:pPr algn="l"/>
-            <a:r>
-              <a:rPr sz="1300" b="1">
-                <a:solidFill>
-                  <a:srgbClr val="FFFFFF"/>
-                </a:solidFill>
-                <a:latin typeface="Arial"/>
-              </a:rPr>
-              <a:t>  LỚP 7 • BÀI 3. QUẢN LÝ DỮ LIỆU &amp; BÀI 4. MẠNG XÃ HỘI</a:t>
-            </a:r>
-          </a:p>
-        </p:txBody>
-      </p:sp>
-      <p:sp>
-        <p:nvSpPr>
-          <p:cNvPr id="5" name="TextBox 4"/>
-          <p:cNvSpPr txBox="1"/>
-          <p:nvPr/>
-        </p:nvSpPr>
-        <p:spPr>
-          <a:xfrm>
-            <a:off x="457200" y="1600200"/>
-            <a:ext cx="11274552" cy="594360"/>
-          </a:xfrm>
-          <a:prstGeom prst="rect">
-            <a:avLst/>
-          </a:prstGeom>
-          <a:noFill/>
-        </p:spPr>
-        <p:txBody>
-          <a:bodyPr wrap="square">
-            <a:spAutoFit/>
-          </a:bodyPr>
-          <a:lstStyle/>
-          <a:p>
-            <a:pPr algn="l"/>
-            <a:r>
-              <a:rPr sz="2600" b="1">
-                <a:solidFill>
-                  <a:srgbClr val="0C4A6E"/>
-                </a:solidFill>
-                <a:latin typeface="Arial"/>
-              </a:rPr>
-              <a:t>Tiết 4: Mạng xã hội &amp; Kênh trao đổi thông tin</a:t>
-            </a:r>
-          </a:p>
-        </p:txBody>
-      </p:sp>
-      <p:pic>
-        <p:nvPicPr>
-          <p:cNvPr id="6" name="Picture 5" descr="learn2_card1.png"/>
-          <p:cNvPicPr>
-            <a:picLocks noChangeAspect="1"/>
-          </p:cNvPicPr>
-          <p:nvPr/>
-        </p:nvPicPr>
-        <p:blipFill>
-          <a:blip r:embed="rId2"/>
-          <a:stretch>
-            <a:fillRect/>
-          </a:stretch>
-        </p:blipFill>
-        <p:spPr>
-          <a:xfrm>
-            <a:off x="457200" y="2286000"/>
-            <a:ext cx="2194560" cy="733805"/>
-          </a:xfrm>
-          <a:prstGeom prst="rect">
-            <a:avLst/>
-          </a:prstGeom>
-        </p:spPr>
-      </p:pic>
-      <p:sp>
-        <p:nvSpPr>
-          <p:cNvPr id="7" name="Rounded Rectangle 6"/>
+          <p:cNvPr id="4" name="Rounded Rectangle 3"/>
           <p:cNvSpPr/>
           <p:nvPr/>
         </p:nvSpPr>
         <p:spPr>
           <a:xfrm>
-            <a:off x="2880360" y="2286000"/>
-            <a:ext cx="8851392" cy="733805"/>
+            <a:off x="1371600" y="1645920"/>
+            <a:ext cx="365760" cy="3474720"/>
           </a:xfrm>
           <a:prstGeom prst="roundRect">
-            <a:avLst/>
-          </a:prstGeom>
-          <a:solidFill>
-            <a:srgbClr val="FFFFFF"/>
-          </a:solidFill>
-          <a:ln w="12700">
-            <a:solidFill>
-              <a:srgbClr val="0EA5E9"/>
-            </a:solidFill>
-          </a:ln>
-        </p:spPr>
-        <p:style>
-          <a:lnRef idx="1">
-            <a:schemeClr val="accent1"/>
-          </a:lnRef>
-          <a:fillRef idx="3">
-            <a:schemeClr val="accent1"/>
-          </a:fillRef>
-          <a:effectRef idx="2">
-            <a:schemeClr val="accent1"/>
-          </a:effectRef>
-          <a:fontRef idx="minor">
-            <a:schemeClr val="lt1"/>
-          </a:fontRef>
-        </p:style>
-        <p:txBody>
-          <a:bodyPr rtlCol="0" anchor="ctr"/>
-          <a:lstStyle/>
-          <a:p>
-            <a:pPr algn="ctr"/>
-          </a:p>
-        </p:txBody>
-      </p:sp>
-      <p:sp>
-        <p:nvSpPr>
-          <p:cNvPr id="8" name="Rectangle 7"/>
-          <p:cNvSpPr/>
-          <p:nvPr/>
-        </p:nvSpPr>
-        <p:spPr>
-          <a:xfrm>
-            <a:off x="2880360" y="2286000"/>
-            <a:ext cx="91440" cy="733805"/>
-          </a:xfrm>
-          <a:prstGeom prst="rect">
             <a:avLst/>
           </a:prstGeom>
           <a:solidFill>
@@ -5381,14 +5468,14 @@
       </p:sp>
       <p:sp>
         <p:nvSpPr>
-          <p:cNvPr id="9" name="TextBox 8"/>
+          <p:cNvPr id="5" name="TextBox 4"/>
           <p:cNvSpPr txBox="1"/>
           <p:nvPr/>
         </p:nvSpPr>
         <p:spPr>
           <a:xfrm>
-            <a:off x="3108960" y="2423160"/>
-            <a:ext cx="8485632" cy="459485"/>
+            <a:off x="2103120" y="2011680"/>
+            <a:ext cx="8046720" cy="548640"/>
           </a:xfrm>
           <a:prstGeom prst="rect">
             <a:avLst/>
@@ -5396,461 +5483,93 @@
           <a:noFill/>
         </p:spPr>
         <p:txBody>
-          <a:bodyPr wrap="square">
+          <a:bodyPr wrap="square" lIns="73152" rIns="73152" tIns="54864" bIns="54864">
             <a:spAutoFit/>
           </a:bodyPr>
           <a:lstStyle/>
           <a:p>
-            <a:pPr algn="l"/>
-            <a:r>
-              <a:rPr sz="1800" b="1">
+            <a:pPr algn="l">
+              <a:defRPr sz="1600" b="1">
                 <a:solidFill>
-                  <a:srgbClr val="0F172A"/>
+                  <a:srgbClr val="FEF08A"/>
                 </a:solidFill>
                 <a:latin typeface="Arial"/>
-              </a:rPr>
-              <a:t>Khái niệm Mạng xã hội: nền tảng kết nối, chia sẻ nội dung trực tuyến</a:t>
-            </a:r>
-          </a:p>
-        </p:txBody>
-      </p:sp>
-      <p:pic>
-        <p:nvPicPr>
-          <p:cNvPr id="10" name="Picture 9" descr="learn2_card2.png"/>
-          <p:cNvPicPr>
-            <a:picLocks noChangeAspect="1"/>
-          </p:cNvPicPr>
-          <p:nvPr/>
-        </p:nvPicPr>
-        <p:blipFill>
-          <a:blip r:embed="rId3"/>
-          <a:stretch>
-            <a:fillRect/>
-          </a:stretch>
-        </p:blipFill>
-        <p:spPr>
-          <a:xfrm>
-            <a:off x="457200" y="3184398"/>
-            <a:ext cx="2194560" cy="733806"/>
+              </a:defRPr>
+            </a:pPr>
+            <a:r>
+              <a:t>KHÁM PHÁ KIẾN THỨC MỚI</a:t>
+            </a:r>
+          </a:p>
+        </p:txBody>
+      </p:sp>
+      <p:sp>
+        <p:nvSpPr>
+          <p:cNvPr id="6" name="TextBox 5"/>
+          <p:cNvSpPr txBox="1"/>
+          <p:nvPr/>
+        </p:nvSpPr>
+        <p:spPr>
+          <a:xfrm>
+            <a:off x="2103120" y="2651760"/>
+            <a:ext cx="8046720" cy="1371600"/>
           </a:xfrm>
           <a:prstGeom prst="rect">
             <a:avLst/>
           </a:prstGeom>
-        </p:spPr>
-      </p:pic>
-      <p:sp>
-        <p:nvSpPr>
-          <p:cNvPr id="11" name="Rounded Rectangle 10"/>
-          <p:cNvSpPr/>
-          <p:nvPr/>
-        </p:nvSpPr>
-        <p:spPr>
-          <a:xfrm>
-            <a:off x="2880360" y="3184398"/>
-            <a:ext cx="8851392" cy="733806"/>
-          </a:xfrm>
-          <a:prstGeom prst="roundRect">
-            <a:avLst/>
-          </a:prstGeom>
-          <a:solidFill>
-            <a:srgbClr val="FFFFFF"/>
-          </a:solidFill>
-          <a:ln w="12700">
-            <a:solidFill>
-              <a:srgbClr val="0EA5E9"/>
-            </a:solidFill>
-          </a:ln>
-        </p:spPr>
-        <p:style>
-          <a:lnRef idx="1">
-            <a:schemeClr val="accent1"/>
-          </a:lnRef>
-          <a:fillRef idx="3">
-            <a:schemeClr val="accent1"/>
-          </a:fillRef>
-          <a:effectRef idx="2">
-            <a:schemeClr val="accent1"/>
-          </a:effectRef>
-          <a:fontRef idx="minor">
-            <a:schemeClr val="lt1"/>
-          </a:fontRef>
-        </p:style>
-        <p:txBody>
-          <a:bodyPr rtlCol="0" anchor="ctr"/>
-          <a:lstStyle/>
-          <a:p>
-            <a:pPr algn="ctr"/>
-          </a:p>
-        </p:txBody>
-      </p:sp>
-      <p:sp>
-        <p:nvSpPr>
-          <p:cNvPr id="12" name="Rectangle 11"/>
-          <p:cNvSpPr/>
-          <p:nvPr/>
-        </p:nvSpPr>
-        <p:spPr>
-          <a:xfrm>
-            <a:off x="2880360" y="3184398"/>
-            <a:ext cx="91440" cy="733806"/>
-          </a:xfrm>
-          <a:prstGeom prst="rect">
-            <a:avLst/>
-          </a:prstGeom>
-          <a:solidFill>
-            <a:srgbClr val="0EA5E9"/>
-          </a:solidFill>
-          <a:ln>
-            <a:noFill/>
-          </a:ln>
-        </p:spPr>
-        <p:style>
-          <a:lnRef idx="1">
-            <a:schemeClr val="accent1"/>
-          </a:lnRef>
-          <a:fillRef idx="3">
-            <a:schemeClr val="accent1"/>
-          </a:fillRef>
-          <a:effectRef idx="2">
-            <a:schemeClr val="accent1"/>
-          </a:effectRef>
-          <a:fontRef idx="minor">
-            <a:schemeClr val="lt1"/>
-          </a:fontRef>
-        </p:style>
-        <p:txBody>
-          <a:bodyPr rtlCol="0" anchor="ctr"/>
-          <a:lstStyle/>
-          <a:p>
-            <a:pPr algn="ctr"/>
-          </a:p>
-        </p:txBody>
-      </p:sp>
-      <p:sp>
-        <p:nvSpPr>
-          <p:cNvPr id="13" name="TextBox 12"/>
-          <p:cNvSpPr txBox="1"/>
-          <p:nvPr/>
-        </p:nvSpPr>
-        <p:spPr>
-          <a:xfrm>
-            <a:off x="3108960" y="3321558"/>
-            <a:ext cx="8485632" cy="459485"/>
-          </a:xfrm>
-          <a:prstGeom prst="rect">
-            <a:avLst/>
-          </a:prstGeom>
           <a:noFill/>
         </p:spPr>
         <p:txBody>
-          <a:bodyPr wrap="square">
+          <a:bodyPr wrap="square" lIns="73152" rIns="73152" tIns="54864" bIns="54864">
             <a:spAutoFit/>
           </a:bodyPr>
           <a:lstStyle/>
           <a:p>
-            <a:pPr algn="l"/>
-            <a:r>
-              <a:rPr sz="1800" b="1">
+            <a:pPr algn="l">
+              <a:defRPr sz="2600" b="1">
                 <a:solidFill>
-                  <a:srgbClr val="0F172A"/>
+                  <a:srgbClr val="FFFFFF"/>
                 </a:solidFill>
                 <a:latin typeface="Arial"/>
-              </a:rPr>
-              <a:t>Các mạng xã hội phổ biến: Facebook, Zalo, YouTube, TikTok</a:t>
-            </a:r>
-          </a:p>
-        </p:txBody>
-      </p:sp>
-      <p:pic>
-        <p:nvPicPr>
-          <p:cNvPr id="14" name="Picture 13" descr="learn2_card3.png"/>
-          <p:cNvPicPr>
-            <a:picLocks noChangeAspect="1"/>
-          </p:cNvPicPr>
-          <p:nvPr/>
-        </p:nvPicPr>
-        <p:blipFill>
-          <a:blip r:embed="rId4"/>
-          <a:stretch>
-            <a:fillRect/>
-          </a:stretch>
-        </p:blipFill>
-        <p:spPr>
-          <a:xfrm>
-            <a:off x="457200" y="4082796"/>
-            <a:ext cx="2194560" cy="733806"/>
+              </a:defRPr>
+            </a:pPr>
+            <a:r>
+              <a:t>TIẾT 4: BÀI 4. MẠNG XÃ HỘI &amp; KÊNH TRAO ĐỔI THÔNG TIN</a:t>
+            </a:r>
+          </a:p>
+        </p:txBody>
+      </p:sp>
+      <p:sp>
+        <p:nvSpPr>
+          <p:cNvPr id="7" name="TextBox 6"/>
+          <p:cNvSpPr txBox="1"/>
+          <p:nvPr/>
+        </p:nvSpPr>
+        <p:spPr>
+          <a:xfrm>
+            <a:off x="2103120" y="4023360"/>
+            <a:ext cx="8046720" cy="731519"/>
           </a:xfrm>
           <a:prstGeom prst="rect">
             <a:avLst/>
           </a:prstGeom>
-        </p:spPr>
-      </p:pic>
-      <p:sp>
-        <p:nvSpPr>
-          <p:cNvPr id="15" name="Rounded Rectangle 14"/>
-          <p:cNvSpPr/>
-          <p:nvPr/>
-        </p:nvSpPr>
-        <p:spPr>
-          <a:xfrm>
-            <a:off x="2880360" y="4082796"/>
-            <a:ext cx="8851392" cy="733806"/>
-          </a:xfrm>
-          <a:prstGeom prst="roundRect">
-            <a:avLst/>
-          </a:prstGeom>
-          <a:solidFill>
-            <a:srgbClr val="FFFFFF"/>
-          </a:solidFill>
-          <a:ln w="12700">
-            <a:solidFill>
-              <a:srgbClr val="0EA5E9"/>
-            </a:solidFill>
-          </a:ln>
-        </p:spPr>
-        <p:style>
-          <a:lnRef idx="1">
-            <a:schemeClr val="accent1"/>
-          </a:lnRef>
-          <a:fillRef idx="3">
-            <a:schemeClr val="accent1"/>
-          </a:fillRef>
-          <a:effectRef idx="2">
-            <a:schemeClr val="accent1"/>
-          </a:effectRef>
-          <a:fontRef idx="minor">
-            <a:schemeClr val="lt1"/>
-          </a:fontRef>
-        </p:style>
-        <p:txBody>
-          <a:bodyPr rtlCol="0" anchor="ctr"/>
-          <a:lstStyle/>
-          <a:p>
-            <a:pPr algn="ctr"/>
-          </a:p>
-        </p:txBody>
-      </p:sp>
-      <p:sp>
-        <p:nvSpPr>
-          <p:cNvPr id="16" name="Rectangle 15"/>
-          <p:cNvSpPr/>
-          <p:nvPr/>
-        </p:nvSpPr>
-        <p:spPr>
-          <a:xfrm>
-            <a:off x="2880360" y="4082796"/>
-            <a:ext cx="91440" cy="733806"/>
-          </a:xfrm>
-          <a:prstGeom prst="rect">
-            <a:avLst/>
-          </a:prstGeom>
-          <a:solidFill>
-            <a:srgbClr val="0EA5E9"/>
-          </a:solidFill>
-          <a:ln>
-            <a:noFill/>
-          </a:ln>
-        </p:spPr>
-        <p:style>
-          <a:lnRef idx="1">
-            <a:schemeClr val="accent1"/>
-          </a:lnRef>
-          <a:fillRef idx="3">
-            <a:schemeClr val="accent1"/>
-          </a:fillRef>
-          <a:effectRef idx="2">
-            <a:schemeClr val="accent1"/>
-          </a:effectRef>
-          <a:fontRef idx="minor">
-            <a:schemeClr val="lt1"/>
-          </a:fontRef>
-        </p:style>
-        <p:txBody>
-          <a:bodyPr rtlCol="0" anchor="ctr"/>
-          <a:lstStyle/>
-          <a:p>
-            <a:pPr algn="ctr"/>
-          </a:p>
-        </p:txBody>
-      </p:sp>
-      <p:sp>
-        <p:nvSpPr>
-          <p:cNvPr id="17" name="TextBox 16"/>
-          <p:cNvSpPr txBox="1"/>
-          <p:nvPr/>
-        </p:nvSpPr>
-        <p:spPr>
-          <a:xfrm>
-            <a:off x="3108960" y="4219956"/>
-            <a:ext cx="8485632" cy="459485"/>
-          </a:xfrm>
-          <a:prstGeom prst="rect">
-            <a:avLst/>
-          </a:prstGeom>
           <a:noFill/>
         </p:spPr>
         <p:txBody>
-          <a:bodyPr wrap="square">
+          <a:bodyPr wrap="square" lIns="73152" rIns="73152" tIns="54864" bIns="54864">
             <a:spAutoFit/>
           </a:bodyPr>
           <a:lstStyle/>
           <a:p>
-            <a:pPr algn="l"/>
-            <a:r>
-              <a:rPr sz="1800" b="1">
+            <a:pPr algn="l">
+              <a:defRPr sz="1600" b="0">
                 <a:solidFill>
-                  <a:srgbClr val="0F172A"/>
+                  <a:srgbClr val="F1F5F9"/>
                 </a:solidFill>
                 <a:latin typeface="Arial"/>
-              </a:rPr>
-              <a:t>Mặt tích cực: giao lưu, học tập, lan tỏa giá trị nhân văn</a:t>
-            </a:r>
-          </a:p>
-        </p:txBody>
-      </p:sp>
-      <p:pic>
-        <p:nvPicPr>
-          <p:cNvPr id="18" name="Picture 17" descr="learn2_card4.png"/>
-          <p:cNvPicPr>
-            <a:picLocks noChangeAspect="1"/>
-          </p:cNvPicPr>
-          <p:nvPr/>
-        </p:nvPicPr>
-        <p:blipFill>
-          <a:blip r:embed="rId5"/>
-          <a:stretch>
-            <a:fillRect/>
-          </a:stretch>
-        </p:blipFill>
-        <p:spPr>
-          <a:xfrm>
-            <a:off x="457200" y="4981194"/>
-            <a:ext cx="2194560" cy="733806"/>
-          </a:xfrm>
-          <a:prstGeom prst="rect">
-            <a:avLst/>
-          </a:prstGeom>
-        </p:spPr>
-      </p:pic>
-      <p:sp>
-        <p:nvSpPr>
-          <p:cNvPr id="19" name="Rounded Rectangle 18"/>
-          <p:cNvSpPr/>
-          <p:nvPr/>
-        </p:nvSpPr>
-        <p:spPr>
-          <a:xfrm>
-            <a:off x="2880360" y="4981194"/>
-            <a:ext cx="8851392" cy="733806"/>
-          </a:xfrm>
-          <a:prstGeom prst="roundRect">
-            <a:avLst/>
-          </a:prstGeom>
-          <a:solidFill>
-            <a:srgbClr val="FFFFFF"/>
-          </a:solidFill>
-          <a:ln w="12700">
-            <a:solidFill>
-              <a:srgbClr val="0EA5E9"/>
-            </a:solidFill>
-          </a:ln>
-        </p:spPr>
-        <p:style>
-          <a:lnRef idx="1">
-            <a:schemeClr val="accent1"/>
-          </a:lnRef>
-          <a:fillRef idx="3">
-            <a:schemeClr val="accent1"/>
-          </a:fillRef>
-          <a:effectRef idx="2">
-            <a:schemeClr val="accent1"/>
-          </a:effectRef>
-          <a:fontRef idx="minor">
-            <a:schemeClr val="lt1"/>
-          </a:fontRef>
-        </p:style>
-        <p:txBody>
-          <a:bodyPr rtlCol="0" anchor="ctr"/>
-          <a:lstStyle/>
-          <a:p>
-            <a:pPr algn="ctr"/>
-          </a:p>
-        </p:txBody>
-      </p:sp>
-      <p:sp>
-        <p:nvSpPr>
-          <p:cNvPr id="20" name="Rectangle 19"/>
-          <p:cNvSpPr/>
-          <p:nvPr/>
-        </p:nvSpPr>
-        <p:spPr>
-          <a:xfrm>
-            <a:off x="2880360" y="4981194"/>
-            <a:ext cx="91440" cy="733806"/>
-          </a:xfrm>
-          <a:prstGeom prst="rect">
-            <a:avLst/>
-          </a:prstGeom>
-          <a:solidFill>
-            <a:srgbClr val="0EA5E9"/>
-          </a:solidFill>
-          <a:ln>
-            <a:noFill/>
-          </a:ln>
-        </p:spPr>
-        <p:style>
-          <a:lnRef idx="1">
-            <a:schemeClr val="accent1"/>
-          </a:lnRef>
-          <a:fillRef idx="3">
-            <a:schemeClr val="accent1"/>
-          </a:fillRef>
-          <a:effectRef idx="2">
-            <a:schemeClr val="accent1"/>
-          </a:effectRef>
-          <a:fontRef idx="minor">
-            <a:schemeClr val="lt1"/>
-          </a:fontRef>
-        </p:style>
-        <p:txBody>
-          <a:bodyPr rtlCol="0" anchor="ctr"/>
-          <a:lstStyle/>
-          <a:p>
-            <a:pPr algn="ctr"/>
-          </a:p>
-        </p:txBody>
-      </p:sp>
-      <p:sp>
-        <p:nvSpPr>
-          <p:cNvPr id="21" name="TextBox 20"/>
-          <p:cNvSpPr txBox="1"/>
-          <p:nvPr/>
-        </p:nvSpPr>
-        <p:spPr>
-          <a:xfrm>
-            <a:off x="3108960" y="5118354"/>
-            <a:ext cx="8485632" cy="459485"/>
-          </a:xfrm>
-          <a:prstGeom prst="rect">
-            <a:avLst/>
-          </a:prstGeom>
-          <a:noFill/>
-        </p:spPr>
-        <p:txBody>
-          <a:bodyPr wrap="square">
-            <a:spAutoFit/>
-          </a:bodyPr>
-          <a:lstStyle/>
-          <a:p>
-            <a:pPr algn="l"/>
-            <a:r>
-              <a:rPr sz="1800" b="1">
-                <a:solidFill>
-                  <a:srgbClr val="0F172A"/>
-                </a:solidFill>
-                <a:latin typeface="Arial"/>
-              </a:rPr>
-              <a:t>Mặt tiêu cực: nguy cơ lộ lọt thông tin, bạo lực mạng, tin giả</a:t>
+              </a:defRPr>
+            </a:pPr>
+            <a:r>
+              <a:t>Hiểu rõ 2 mặt của Mạng xã hội, kỹ năng giao tiếp văn minh và bảo mật thông tin</a:t>
             </a:r>
           </a:p>
         </p:txBody>
@@ -5861,7 +5580,7 @@
     <a:masterClrMapping/>
   </p:clrMapOvr>
   <p:transition spd="med">
-    <p:wipe/>
+    <p:push/>
   </p:transition>
 </p:sld>
 </file>
@@ -5921,16 +5640,16 @@
       </p:sp>
       <p:sp>
         <p:nvSpPr>
-          <p:cNvPr id="3" name="Rectangle 2"/>
+          <p:cNvPr id="3" name="Rounded Rectangle 2"/>
           <p:cNvSpPr/>
           <p:nvPr/>
         </p:nvSpPr>
         <p:spPr>
           <a:xfrm>
-            <a:off x="0" y="1097280"/>
-            <a:ext cx="12188952" cy="411479"/>
-          </a:xfrm>
-          <a:prstGeom prst="rect">
+            <a:off x="365760" y="1143000"/>
+            <a:ext cx="2926080" cy="347471"/>
+          </a:xfrm>
+          <a:prstGeom prst="roundRect">
             <a:avLst/>
           </a:prstGeom>
           <a:solidFill>
@@ -5970,8 +5689,8 @@
         </p:nvSpPr>
         <p:spPr>
           <a:xfrm>
-            <a:off x="274320" y="1124712"/>
-            <a:ext cx="11640312" cy="365760"/>
+            <a:off x="365760" y="1143000"/>
+            <a:ext cx="2926080" cy="347471"/>
           </a:xfrm>
           <a:prstGeom prst="rect">
             <a:avLst/>
@@ -5979,20 +5698,21 @@
           <a:noFill/>
         </p:spPr>
         <p:txBody>
-          <a:bodyPr wrap="square">
+          <a:bodyPr wrap="square" lIns="73152" rIns="73152" tIns="54864" bIns="54864">
             <a:spAutoFit/>
           </a:bodyPr>
           <a:lstStyle/>
           <a:p>
-            <a:pPr algn="l"/>
-            <a:r>
-              <a:rPr sz="1300" b="1">
+            <a:pPr algn="ctr">
+              <a:defRPr sz="1300" b="1">
                 <a:solidFill>
                   <a:srgbClr val="FFFFFF"/>
                 </a:solidFill>
                 <a:latin typeface="Arial"/>
-              </a:rPr>
-              <a:t>  LỚP 7 • LUYỆN TẬP TƯƠNG TÁC</a:t>
+              </a:defRPr>
+            </a:pPr>
+            <a:r>
+              <a:t>QUY TRÌNH &amp; THAO TÁC</a:t>
             </a:r>
           </a:p>
         </p:txBody>
@@ -6005,8 +5725,8 @@
         </p:nvSpPr>
         <p:spPr>
           <a:xfrm>
-            <a:off x="457200" y="1600200"/>
-            <a:ext cx="11274552" cy="594360"/>
+            <a:off x="3474720" y="1115568"/>
+            <a:ext cx="8046720" cy="411479"/>
           </a:xfrm>
           <a:prstGeom prst="rect">
             <a:avLst/>
@@ -6014,84 +5734,44 @@
           <a:noFill/>
         </p:spPr>
         <p:txBody>
-          <a:bodyPr wrap="square">
+          <a:bodyPr wrap="square" lIns="73152" rIns="73152" tIns="54864" bIns="54864">
             <a:spAutoFit/>
           </a:bodyPr>
           <a:lstStyle/>
           <a:p>
-            <a:pPr algn="l"/>
-            <a:r>
-              <a:rPr sz="2600" b="1">
+            <a:pPr algn="l">
+              <a:defRPr sz="2100" b="1">
                 <a:solidFill>
                   <a:srgbClr val="0C4A6E"/>
                 </a:solidFill>
                 <a:latin typeface="Arial"/>
-              </a:rPr>
-              <a:t>Thực hành ứng xử an toàn trên mạng!</a:t>
-            </a:r>
-          </a:p>
-        </p:txBody>
-      </p:sp>
-      <p:sp>
-        <p:nvSpPr>
-          <p:cNvPr id="6" name="TextBox 5"/>
-          <p:cNvSpPr txBox="1"/>
-          <p:nvPr/>
-        </p:nvSpPr>
-        <p:spPr>
-          <a:xfrm>
-            <a:off x="457200" y="2286000"/>
-            <a:ext cx="11274552" cy="640080"/>
-          </a:xfrm>
-          <a:prstGeom prst="rect">
-            <a:avLst/>
-          </a:prstGeom>
-          <a:noFill/>
-        </p:spPr>
-        <p:txBody>
-          <a:bodyPr wrap="square">
-            <a:spAutoFit/>
-          </a:bodyPr>
-          <a:lstStyle/>
-          <a:p>
-            <a:pPr algn="l">
-              <a:spcAft>
-                <a:spcPts val="600"/>
-              </a:spcAft>
+              </a:defRPr>
             </a:pPr>
             <a:r>
-              <a:rPr sz="1800" b="0">
-                <a:solidFill>
-                  <a:srgbClr val="0C4A6E"/>
-                </a:solidFill>
-                <a:latin typeface="Arial"/>
-              </a:rPr>
-              <a:t>Xử lý các tình huống thực tế:</a:t>
-            </a:r>
-          </a:p>
-        </p:txBody>
-      </p:sp>
-      <p:sp>
-        <p:nvSpPr>
-          <p:cNvPr id="7" name="Rounded Rectangle 6"/>
+              <a:t>Các chức năng cơ bản của Mạng xã hội</a:t>
+            </a:r>
+          </a:p>
+        </p:txBody>
+      </p:sp>
+      <p:sp>
+        <p:nvSpPr>
+          <p:cNvPr id="6" name="Chevron 5"/>
           <p:cNvSpPr/>
           <p:nvPr/>
         </p:nvSpPr>
         <p:spPr>
           <a:xfrm>
-            <a:off x="457200" y="3017520"/>
-            <a:ext cx="5522976" cy="1280159"/>
-          </a:xfrm>
-          <a:prstGeom prst="roundRect">
+            <a:off x="365760" y="1645920"/>
+            <a:ext cx="4754880" cy="685799"/>
+          </a:xfrm>
+          <a:prstGeom prst="chevron">
             <a:avLst/>
           </a:prstGeom>
           <a:solidFill>
-            <a:srgbClr val="FFFFFF"/>
+            <a:srgbClr val="0369A1"/>
           </a:solidFill>
-          <a:ln w="12700">
-            <a:solidFill>
-              <a:srgbClr val="0EA5E9"/>
-            </a:solidFill>
+          <a:ln>
+            <a:noFill/>
           </a:ln>
         </p:spPr>
         <p:style>
@@ -6116,9 +5796,406 @@
           </a:p>
         </p:txBody>
       </p:sp>
+      <p:sp>
+        <p:nvSpPr>
+          <p:cNvPr id="7" name="TextBox 6"/>
+          <p:cNvSpPr txBox="1"/>
+          <p:nvPr/>
+        </p:nvSpPr>
+        <p:spPr>
+          <a:xfrm>
+            <a:off x="640080" y="1719072"/>
+            <a:ext cx="4206240" cy="548639"/>
+          </a:xfrm>
+          <a:prstGeom prst="rect">
+            <a:avLst/>
+          </a:prstGeom>
+          <a:noFill/>
+        </p:spPr>
+        <p:txBody>
+          <a:bodyPr wrap="square" lIns="73152" rIns="73152" tIns="54864" bIns="54864">
+            <a:spAutoFit/>
+          </a:bodyPr>
+          <a:lstStyle/>
+          <a:p>
+            <a:pPr algn="l">
+              <a:defRPr sz="1400" b="1">
+                <a:solidFill>
+                  <a:srgbClr val="FFFFFF"/>
+                </a:solidFill>
+                <a:latin typeface="Arial"/>
+              </a:defRPr>
+            </a:pPr>
+            <a:r>
+              <a:t>1. Tạo hồ sơ cá nhân và cập nhật thông tin</a:t>
+            </a:r>
+          </a:p>
+        </p:txBody>
+      </p:sp>
+      <p:sp>
+        <p:nvSpPr>
+          <p:cNvPr id="8" name="Chevron 7"/>
+          <p:cNvSpPr/>
+          <p:nvPr/>
+        </p:nvSpPr>
+        <p:spPr>
+          <a:xfrm>
+            <a:off x="365760" y="2441448"/>
+            <a:ext cx="4754880" cy="685800"/>
+          </a:xfrm>
+          <a:prstGeom prst="chevron">
+            <a:avLst/>
+          </a:prstGeom>
+          <a:solidFill>
+            <a:srgbClr val="0EA5E9"/>
+          </a:solidFill>
+          <a:ln>
+            <a:noFill/>
+          </a:ln>
+        </p:spPr>
+        <p:style>
+          <a:lnRef idx="1">
+            <a:schemeClr val="accent1"/>
+          </a:lnRef>
+          <a:fillRef idx="3">
+            <a:schemeClr val="accent1"/>
+          </a:fillRef>
+          <a:effectRef idx="2">
+            <a:schemeClr val="accent1"/>
+          </a:effectRef>
+          <a:fontRef idx="minor">
+            <a:schemeClr val="lt1"/>
+          </a:fontRef>
+        </p:style>
+        <p:txBody>
+          <a:bodyPr rtlCol="0" anchor="ctr"/>
+          <a:lstStyle/>
+          <a:p>
+            <a:pPr algn="ctr"/>
+          </a:p>
+        </p:txBody>
+      </p:sp>
+      <p:sp>
+        <p:nvSpPr>
+          <p:cNvPr id="9" name="TextBox 8"/>
+          <p:cNvSpPr txBox="1"/>
+          <p:nvPr/>
+        </p:nvSpPr>
+        <p:spPr>
+          <a:xfrm>
+            <a:off x="640080" y="2514600"/>
+            <a:ext cx="4206240" cy="548640"/>
+          </a:xfrm>
+          <a:prstGeom prst="rect">
+            <a:avLst/>
+          </a:prstGeom>
+          <a:noFill/>
+        </p:spPr>
+        <p:txBody>
+          <a:bodyPr wrap="square" lIns="73152" rIns="73152" tIns="54864" bIns="54864">
+            <a:spAutoFit/>
+          </a:bodyPr>
+          <a:lstStyle/>
+          <a:p>
+            <a:pPr algn="l">
+              <a:defRPr sz="1400" b="1">
+                <a:solidFill>
+                  <a:srgbClr val="FFFFFF"/>
+                </a:solidFill>
+                <a:latin typeface="Arial"/>
+              </a:defRPr>
+            </a:pPr>
+            <a:r>
+              <a:t>2. Đăng bài viết (Post): Văn bản, hình ảnh, video</a:t>
+            </a:r>
+          </a:p>
+        </p:txBody>
+      </p:sp>
+      <p:sp>
+        <p:nvSpPr>
+          <p:cNvPr id="10" name="Chevron 9"/>
+          <p:cNvSpPr/>
+          <p:nvPr/>
+        </p:nvSpPr>
+        <p:spPr>
+          <a:xfrm>
+            <a:off x="365760" y="3236976"/>
+            <a:ext cx="4754880" cy="685800"/>
+          </a:xfrm>
+          <a:prstGeom prst="chevron">
+            <a:avLst/>
+          </a:prstGeom>
+          <a:solidFill>
+            <a:srgbClr val="0D9488"/>
+          </a:solidFill>
+          <a:ln>
+            <a:noFill/>
+          </a:ln>
+        </p:spPr>
+        <p:style>
+          <a:lnRef idx="1">
+            <a:schemeClr val="accent1"/>
+          </a:lnRef>
+          <a:fillRef idx="3">
+            <a:schemeClr val="accent1"/>
+          </a:fillRef>
+          <a:effectRef idx="2">
+            <a:schemeClr val="accent1"/>
+          </a:effectRef>
+          <a:fontRef idx="minor">
+            <a:schemeClr val="lt1"/>
+          </a:fontRef>
+        </p:style>
+        <p:txBody>
+          <a:bodyPr rtlCol="0" anchor="ctr"/>
+          <a:lstStyle/>
+          <a:p>
+            <a:pPr algn="ctr"/>
+          </a:p>
+        </p:txBody>
+      </p:sp>
+      <p:sp>
+        <p:nvSpPr>
+          <p:cNvPr id="11" name="TextBox 10"/>
+          <p:cNvSpPr txBox="1"/>
+          <p:nvPr/>
+        </p:nvSpPr>
+        <p:spPr>
+          <a:xfrm>
+            <a:off x="640080" y="3310128"/>
+            <a:ext cx="4206240" cy="548639"/>
+          </a:xfrm>
+          <a:prstGeom prst="rect">
+            <a:avLst/>
+          </a:prstGeom>
+          <a:noFill/>
+        </p:spPr>
+        <p:txBody>
+          <a:bodyPr wrap="square" lIns="73152" rIns="73152" tIns="54864" bIns="54864">
+            <a:spAutoFit/>
+          </a:bodyPr>
+          <a:lstStyle/>
+          <a:p>
+            <a:pPr algn="l">
+              <a:defRPr sz="1400" b="1">
+                <a:solidFill>
+                  <a:srgbClr val="FFFFFF"/>
+                </a:solidFill>
+                <a:latin typeface="Arial"/>
+              </a:defRPr>
+            </a:pPr>
+            <a:r>
+              <a:t>3. Kết nối bạn bè, theo dõi các trang thông tin</a:t>
+            </a:r>
+          </a:p>
+        </p:txBody>
+      </p:sp>
+      <p:sp>
+        <p:nvSpPr>
+          <p:cNvPr id="12" name="Chevron 11"/>
+          <p:cNvSpPr/>
+          <p:nvPr/>
+        </p:nvSpPr>
+        <p:spPr>
+          <a:xfrm>
+            <a:off x="365760" y="4032504"/>
+            <a:ext cx="4754880" cy="685800"/>
+          </a:xfrm>
+          <a:prstGeom prst="chevron">
+            <a:avLst/>
+          </a:prstGeom>
+          <a:solidFill>
+            <a:srgbClr val="D97706"/>
+          </a:solidFill>
+          <a:ln>
+            <a:noFill/>
+          </a:ln>
+        </p:spPr>
+        <p:style>
+          <a:lnRef idx="1">
+            <a:schemeClr val="accent1"/>
+          </a:lnRef>
+          <a:fillRef idx="3">
+            <a:schemeClr val="accent1"/>
+          </a:fillRef>
+          <a:effectRef idx="2">
+            <a:schemeClr val="accent1"/>
+          </a:effectRef>
+          <a:fontRef idx="minor">
+            <a:schemeClr val="lt1"/>
+          </a:fontRef>
+        </p:style>
+        <p:txBody>
+          <a:bodyPr rtlCol="0" anchor="ctr"/>
+          <a:lstStyle/>
+          <a:p>
+            <a:pPr algn="ctr"/>
+          </a:p>
+        </p:txBody>
+      </p:sp>
+      <p:sp>
+        <p:nvSpPr>
+          <p:cNvPr id="13" name="TextBox 12"/>
+          <p:cNvSpPr txBox="1"/>
+          <p:nvPr/>
+        </p:nvSpPr>
+        <p:spPr>
+          <a:xfrm>
+            <a:off x="640080" y="4105656"/>
+            <a:ext cx="4206240" cy="548639"/>
+          </a:xfrm>
+          <a:prstGeom prst="rect">
+            <a:avLst/>
+          </a:prstGeom>
+          <a:noFill/>
+        </p:spPr>
+        <p:txBody>
+          <a:bodyPr wrap="square" lIns="73152" rIns="73152" tIns="54864" bIns="54864">
+            <a:spAutoFit/>
+          </a:bodyPr>
+          <a:lstStyle/>
+          <a:p>
+            <a:pPr algn="l">
+              <a:defRPr sz="1400" b="1">
+                <a:solidFill>
+                  <a:srgbClr val="FFFFFF"/>
+                </a:solidFill>
+                <a:latin typeface="Arial"/>
+              </a:defRPr>
+            </a:pPr>
+            <a:r>
+              <a:t>4. Tương tác: Thích (Like), Bình luận (Comment), Chia sẻ (Share)</a:t>
+            </a:r>
+          </a:p>
+        </p:txBody>
+      </p:sp>
+      <p:sp>
+        <p:nvSpPr>
+          <p:cNvPr id="14" name="Chevron 13"/>
+          <p:cNvSpPr/>
+          <p:nvPr/>
+        </p:nvSpPr>
+        <p:spPr>
+          <a:xfrm>
+            <a:off x="365760" y="4828032"/>
+            <a:ext cx="4754880" cy="685800"/>
+          </a:xfrm>
+          <a:prstGeom prst="chevron">
+            <a:avLst/>
+          </a:prstGeom>
+          <a:solidFill>
+            <a:srgbClr val="7C3AED"/>
+          </a:solidFill>
+          <a:ln>
+            <a:noFill/>
+          </a:ln>
+        </p:spPr>
+        <p:style>
+          <a:lnRef idx="1">
+            <a:schemeClr val="accent1"/>
+          </a:lnRef>
+          <a:fillRef idx="3">
+            <a:schemeClr val="accent1"/>
+          </a:fillRef>
+          <a:effectRef idx="2">
+            <a:schemeClr val="accent1"/>
+          </a:effectRef>
+          <a:fontRef idx="minor">
+            <a:schemeClr val="lt1"/>
+          </a:fontRef>
+        </p:style>
+        <p:txBody>
+          <a:bodyPr rtlCol="0" anchor="ctr"/>
+          <a:lstStyle/>
+          <a:p>
+            <a:pPr algn="ctr"/>
+          </a:p>
+        </p:txBody>
+      </p:sp>
+      <p:sp>
+        <p:nvSpPr>
+          <p:cNvPr id="15" name="TextBox 14"/>
+          <p:cNvSpPr txBox="1"/>
+          <p:nvPr/>
+        </p:nvSpPr>
+        <p:spPr>
+          <a:xfrm>
+            <a:off x="640080" y="4901184"/>
+            <a:ext cx="4206240" cy="548639"/>
+          </a:xfrm>
+          <a:prstGeom prst="rect">
+            <a:avLst/>
+          </a:prstGeom>
+          <a:noFill/>
+        </p:spPr>
+        <p:txBody>
+          <a:bodyPr wrap="square" lIns="73152" rIns="73152" tIns="54864" bIns="54864">
+            <a:spAutoFit/>
+          </a:bodyPr>
+          <a:lstStyle/>
+          <a:p>
+            <a:pPr algn="l">
+              <a:defRPr sz="1400" b="1">
+                <a:solidFill>
+                  <a:srgbClr val="FFFFFF"/>
+                </a:solidFill>
+                <a:latin typeface="Arial"/>
+              </a:defRPr>
+            </a:pPr>
+            <a:r>
+              <a:t>5. Trò chuyện trực tuyến (Chat Messenger, Nhóm thảo luận)</a:t>
+            </a:r>
+          </a:p>
+        </p:txBody>
+      </p:sp>
+      <p:sp>
+        <p:nvSpPr>
+          <p:cNvPr id="16" name="Rounded Rectangle 15"/>
+          <p:cNvSpPr/>
+          <p:nvPr/>
+        </p:nvSpPr>
+        <p:spPr>
+          <a:xfrm>
+            <a:off x="5394960" y="1645920"/>
+            <a:ext cx="6309360" cy="3977639"/>
+          </a:xfrm>
+          <a:prstGeom prst="roundRect">
+            <a:avLst/>
+          </a:prstGeom>
+          <a:solidFill>
+            <a:srgbClr val="FFFFFF"/>
+          </a:solidFill>
+          <a:ln w="19050">
+            <a:solidFill>
+              <a:srgbClr val="CBD5E1"/>
+            </a:solidFill>
+          </a:ln>
+        </p:spPr>
+        <p:style>
+          <a:lnRef idx="1">
+            <a:schemeClr val="accent1"/>
+          </a:lnRef>
+          <a:fillRef idx="3">
+            <a:schemeClr val="accent1"/>
+          </a:fillRef>
+          <a:effectRef idx="2">
+            <a:schemeClr val="accent1"/>
+          </a:effectRef>
+          <a:fontRef idx="minor">
+            <a:schemeClr val="lt1"/>
+          </a:fontRef>
+        </p:style>
+        <p:txBody>
+          <a:bodyPr rtlCol="0" anchor="ctr"/>
+          <a:lstStyle/>
+          <a:p>
+            <a:pPr algn="ctr"/>
+          </a:p>
+        </p:txBody>
+      </p:sp>
       <p:pic>
         <p:nvPicPr>
-          <p:cNvPr id="8" name="Picture 7" descr="learn1_card1.png"/>
+          <p:cNvPr id="17" name="Picture 16" descr="sgk_lop7_bai4_hinh42_43_chuc_nang_mxh.png"/>
           <p:cNvPicPr>
             <a:picLocks noChangeAspect="1"/>
           </p:cNvPicPr>
@@ -6132,758 +6209,21 @@
         </p:blipFill>
         <p:spPr>
           <a:xfrm>
-            <a:off x="640080" y="3154679"/>
-            <a:ext cx="1280160" cy="1005840"/>
+            <a:off x="5486400" y="1737360"/>
+            <a:ext cx="6126480" cy="3794760"/>
           </a:xfrm>
           <a:prstGeom prst="rect">
             <a:avLst/>
           </a:prstGeom>
         </p:spPr>
       </p:pic>
-      <p:sp>
-        <p:nvSpPr>
-          <p:cNvPr id="9" name="TextBox 8"/>
-          <p:cNvSpPr txBox="1"/>
-          <p:nvPr/>
-        </p:nvSpPr>
-        <p:spPr>
-          <a:xfrm>
-            <a:off x="2103120" y="3154679"/>
-            <a:ext cx="3785616" cy="1005839"/>
-          </a:xfrm>
-          <a:prstGeom prst="rect">
-            <a:avLst/>
-          </a:prstGeom>
-          <a:noFill/>
-        </p:spPr>
-        <p:txBody>
-          <a:bodyPr wrap="square">
-            <a:spAutoFit/>
-          </a:bodyPr>
-          <a:lstStyle/>
-          <a:p>
-            <a:pPr algn="l"/>
-            <a:r>
-              <a:rPr sz="1600" b="1">
-                <a:solidFill>
-                  <a:srgbClr val="0C4A6E"/>
-                </a:solidFill>
-                <a:latin typeface="Arial"/>
-              </a:rPr>
-              <a:t>Nhận được tin nhắn trúng thưởng lạ ↔ Không nhấn vào link!</a:t>
-            </a:r>
-          </a:p>
-        </p:txBody>
-      </p:sp>
-      <p:sp>
-        <p:nvSpPr>
-          <p:cNvPr id="10" name="Rounded Rectangle 9"/>
-          <p:cNvSpPr/>
-          <p:nvPr/>
-        </p:nvSpPr>
-        <p:spPr>
-          <a:xfrm>
-            <a:off x="6208776" y="3017520"/>
-            <a:ext cx="5522976" cy="1280159"/>
-          </a:xfrm>
-          <a:prstGeom prst="roundRect">
-            <a:avLst/>
-          </a:prstGeom>
-          <a:solidFill>
-            <a:srgbClr val="FFFFFF"/>
-          </a:solidFill>
-          <a:ln w="12700">
-            <a:solidFill>
-              <a:srgbClr val="0EA5E9"/>
-            </a:solidFill>
-          </a:ln>
-        </p:spPr>
-        <p:style>
-          <a:lnRef idx="1">
-            <a:schemeClr val="accent1"/>
-          </a:lnRef>
-          <a:fillRef idx="3">
-            <a:schemeClr val="accent1"/>
-          </a:fillRef>
-          <a:effectRef idx="2">
-            <a:schemeClr val="accent1"/>
-          </a:effectRef>
-          <a:fontRef idx="minor">
-            <a:schemeClr val="lt1"/>
-          </a:fontRef>
-        </p:style>
-        <p:txBody>
-          <a:bodyPr rtlCol="0" anchor="ctr"/>
-          <a:lstStyle/>
-          <a:p>
-            <a:pPr algn="ctr"/>
-          </a:p>
-        </p:txBody>
-      </p:sp>
-      <p:pic>
-        <p:nvPicPr>
-          <p:cNvPr id="11" name="Picture 10" descr="learn1_card2.png"/>
-          <p:cNvPicPr>
-            <a:picLocks noChangeAspect="1"/>
-          </p:cNvPicPr>
-          <p:nvPr/>
-        </p:nvPicPr>
-        <p:blipFill>
-          <a:blip r:embed="rId3"/>
-          <a:stretch>
-            <a:fillRect/>
-          </a:stretch>
-        </p:blipFill>
-        <p:spPr>
-          <a:xfrm>
-            <a:off x="6391656" y="3154679"/>
-            <a:ext cx="1280160" cy="1005840"/>
-          </a:xfrm>
-          <a:prstGeom prst="rect">
-            <a:avLst/>
-          </a:prstGeom>
-        </p:spPr>
-      </p:pic>
-      <p:sp>
-        <p:nvSpPr>
-          <p:cNvPr id="12" name="TextBox 11"/>
-          <p:cNvSpPr txBox="1"/>
-          <p:nvPr/>
-        </p:nvSpPr>
-        <p:spPr>
-          <a:xfrm>
-            <a:off x="7854696" y="3154679"/>
-            <a:ext cx="3785616" cy="1005839"/>
-          </a:xfrm>
-          <a:prstGeom prst="rect">
-            <a:avLst/>
-          </a:prstGeom>
-          <a:noFill/>
-        </p:spPr>
-        <p:txBody>
-          <a:bodyPr wrap="square">
-            <a:spAutoFit/>
-          </a:bodyPr>
-          <a:lstStyle/>
-          <a:p>
-            <a:pPr algn="l"/>
-            <a:r>
-              <a:rPr sz="1600" b="1">
-                <a:solidFill>
-                  <a:srgbClr val="0C4A6E"/>
-                </a:solidFill>
-                <a:latin typeface="Arial"/>
-              </a:rPr>
-              <a:t>Người lạ hỏi địa chỉ nhà, số điện thoại ↔ Tuyệt đối không cung cấp</a:t>
-            </a:r>
-          </a:p>
-        </p:txBody>
-      </p:sp>
-      <p:sp>
-        <p:nvSpPr>
-          <p:cNvPr id="13" name="Rounded Rectangle 12"/>
-          <p:cNvSpPr/>
-          <p:nvPr/>
-        </p:nvSpPr>
-        <p:spPr>
-          <a:xfrm>
-            <a:off x="457200" y="4526279"/>
-            <a:ext cx="5522976" cy="1280160"/>
-          </a:xfrm>
-          <a:prstGeom prst="roundRect">
-            <a:avLst/>
-          </a:prstGeom>
-          <a:solidFill>
-            <a:srgbClr val="FFFFFF"/>
-          </a:solidFill>
-          <a:ln w="12700">
-            <a:solidFill>
-              <a:srgbClr val="0EA5E9"/>
-            </a:solidFill>
-          </a:ln>
-        </p:spPr>
-        <p:style>
-          <a:lnRef idx="1">
-            <a:schemeClr val="accent1"/>
-          </a:lnRef>
-          <a:fillRef idx="3">
-            <a:schemeClr val="accent1"/>
-          </a:fillRef>
-          <a:effectRef idx="2">
-            <a:schemeClr val="accent1"/>
-          </a:effectRef>
-          <a:fontRef idx="minor">
-            <a:schemeClr val="lt1"/>
-          </a:fontRef>
-        </p:style>
-        <p:txBody>
-          <a:bodyPr rtlCol="0" anchor="ctr"/>
-          <a:lstStyle/>
-          <a:p>
-            <a:pPr algn="ctr"/>
-          </a:p>
-        </p:txBody>
-      </p:sp>
-      <p:pic>
-        <p:nvPicPr>
-          <p:cNvPr id="14" name="Picture 13" descr="learn1_card3.png"/>
-          <p:cNvPicPr>
-            <a:picLocks noChangeAspect="1"/>
-          </p:cNvPicPr>
-          <p:nvPr/>
-        </p:nvPicPr>
-        <p:blipFill>
-          <a:blip r:embed="rId4"/>
-          <a:stretch>
-            <a:fillRect/>
-          </a:stretch>
-        </p:blipFill>
-        <p:spPr>
-          <a:xfrm>
-            <a:off x="640080" y="4663440"/>
-            <a:ext cx="1280160" cy="1005839"/>
-          </a:xfrm>
-          <a:prstGeom prst="rect">
-            <a:avLst/>
-          </a:prstGeom>
-        </p:spPr>
-      </p:pic>
-      <p:sp>
-        <p:nvSpPr>
-          <p:cNvPr id="15" name="TextBox 14"/>
-          <p:cNvSpPr txBox="1"/>
-          <p:nvPr/>
-        </p:nvSpPr>
-        <p:spPr>
-          <a:xfrm>
-            <a:off x="2103120" y="4663440"/>
-            <a:ext cx="3785616" cy="1005839"/>
-          </a:xfrm>
-          <a:prstGeom prst="rect">
-            <a:avLst/>
-          </a:prstGeom>
-          <a:noFill/>
-        </p:spPr>
-        <p:txBody>
-          <a:bodyPr wrap="square">
-            <a:spAutoFit/>
-          </a:bodyPr>
-          <a:lstStyle/>
-          <a:p>
-            <a:pPr algn="l"/>
-            <a:r>
-              <a:rPr sz="1600" b="1">
-                <a:solidFill>
-                  <a:srgbClr val="0C4A6E"/>
-                </a:solidFill>
-                <a:latin typeface="Arial"/>
-              </a:rPr>
-              <a:t>Bắt gặp thông tin xấu độc ↔ Báo cáo (Report) và chặn tài khoản</a:t>
-            </a:r>
-          </a:p>
-        </p:txBody>
-      </p:sp>
-      <p:sp>
-        <p:nvSpPr>
-          <p:cNvPr id="16" name="Rounded Rectangle 15"/>
-          <p:cNvSpPr/>
-          <p:nvPr/>
-        </p:nvSpPr>
-        <p:spPr>
-          <a:xfrm>
-            <a:off x="6208776" y="4526279"/>
-            <a:ext cx="5522976" cy="1280160"/>
-          </a:xfrm>
-          <a:prstGeom prst="roundRect">
-            <a:avLst/>
-          </a:prstGeom>
-          <a:solidFill>
-            <a:srgbClr val="FFFFFF"/>
-          </a:solidFill>
-          <a:ln w="12700">
-            <a:solidFill>
-              <a:srgbClr val="0EA5E9"/>
-            </a:solidFill>
-          </a:ln>
-        </p:spPr>
-        <p:style>
-          <a:lnRef idx="1">
-            <a:schemeClr val="accent1"/>
-          </a:lnRef>
-          <a:fillRef idx="3">
-            <a:schemeClr val="accent1"/>
-          </a:fillRef>
-          <a:effectRef idx="2">
-            <a:schemeClr val="accent1"/>
-          </a:effectRef>
-          <a:fontRef idx="minor">
-            <a:schemeClr val="lt1"/>
-          </a:fontRef>
-        </p:style>
-        <p:txBody>
-          <a:bodyPr rtlCol="0" anchor="ctr"/>
-          <a:lstStyle/>
-          <a:p>
-            <a:pPr algn="ctr"/>
-          </a:p>
-        </p:txBody>
-      </p:sp>
-      <p:pic>
-        <p:nvPicPr>
-          <p:cNvPr id="17" name="Picture 16" descr="learn1_card4.png"/>
-          <p:cNvPicPr>
-            <a:picLocks noChangeAspect="1"/>
-          </p:cNvPicPr>
-          <p:nvPr/>
-        </p:nvPicPr>
-        <p:blipFill>
-          <a:blip r:embed="rId5"/>
-          <a:stretch>
-            <a:fillRect/>
-          </a:stretch>
-        </p:blipFill>
-        <p:spPr>
-          <a:xfrm>
-            <a:off x="6391656" y="4663440"/>
-            <a:ext cx="1280160" cy="1005839"/>
-          </a:xfrm>
-          <a:prstGeom prst="rect">
-            <a:avLst/>
-          </a:prstGeom>
-        </p:spPr>
-      </p:pic>
-      <p:sp>
-        <p:nvSpPr>
-          <p:cNvPr id="18" name="TextBox 17"/>
-          <p:cNvSpPr txBox="1"/>
-          <p:nvPr/>
-        </p:nvSpPr>
-        <p:spPr>
-          <a:xfrm>
-            <a:off x="7854696" y="4663440"/>
-            <a:ext cx="3785616" cy="1005839"/>
-          </a:xfrm>
-          <a:prstGeom prst="rect">
-            <a:avLst/>
-          </a:prstGeom>
-          <a:noFill/>
-        </p:spPr>
-        <p:txBody>
-          <a:bodyPr wrap="square">
-            <a:spAutoFit/>
-          </a:bodyPr>
-          <a:lstStyle/>
-          <a:p>
-            <a:pPr algn="l"/>
-            <a:r>
-              <a:rPr sz="1600" b="1">
-                <a:solidFill>
-                  <a:srgbClr val="0C4A6E"/>
-                </a:solidFill>
-                <a:latin typeface="Arial"/>
-              </a:rPr>
-              <a:t>Sao lưu ảnh học tập ↔ Tải lên Google Drive hoặc OneDrive</a:t>
-            </a:r>
-          </a:p>
-        </p:txBody>
-      </p:sp>
     </p:spTree>
   </p:cSld>
   <p:clrMapOvr>
     <a:masterClrMapping/>
   </p:clrMapOvr>
-  <p:timing>
-    <p:tnLst>
-      <p:par>
-        <p:cTn id="1" dur="indefinite" restart="never" nodeType="tmRoot">
-          <p:childTnLst>
-            <p:seq concurrent="1" nextAc="seek">
-              <p:cTn id="2" dur="indefinite" nodeType="mainSeq">
-                <p:childTnLst>
-                  <p:par>
-                    <p:cTn id="3" fill="hold">
-                      <p:stCondLst>
-                        <p:cond delay="0"/>
-                      </p:stCondLst>
-                      <p:childTnLst>
-                        <p:par>
-                          <p:cTn id="4" presetID="1" presetClass="entr" presetSubtype="0" fill="hold">
-                            <p:stCondLst>
-                              <p:cond delay="0"/>
-                            </p:stCondLst>
-                            <p:childTnLst>
-                              <p:set>
-                                <p:cBhvr>
-                                  <p:cTn id="5" dur="1" fill="hold">
-                                    <p:stCondLst>
-                                      <p:cond delay="0"/>
-                                    </p:stCondLst>
-                                  </p:cTn>
-                                  <p:tgtEl>
-                                    <p:spTgt spid="7"/>
-                                  </p:tgtEl>
-                                  <p:attrNameLst>
-                                    <p:attrName>style.visibility</p:attrName>
-                                  </p:attrNameLst>
-                                </p:cBhvr>
-                                <p:to>
-                                  <p:strVal val="visible"/>
-                                </p:to>
-                              </p:set>
-                            </p:childTnLst>
-                          </p:cTn>
-                        </p:par>
-                        <p:par>
-                          <p:cTn id="6" presetID="1" presetClass="entr" presetSubtype="0" fill="hold">
-                            <p:stCondLst>
-                              <p:cond delay="0"/>
-                            </p:stCondLst>
-                            <p:childTnLst>
-                              <p:set>
-                                <p:cBhvr>
-                                  <p:cTn id="7" dur="1" fill="hold">
-                                    <p:stCondLst>
-                                      <p:cond delay="0"/>
-                                    </p:stCondLst>
-                                  </p:cTn>
-                                  <p:tgtEl>
-                                    <p:spTgt spid="8"/>
-                                  </p:tgtEl>
-                                  <p:attrNameLst>
-                                    <p:attrName>style.visibility</p:attrName>
-                                  </p:attrNameLst>
-                                </p:cBhvr>
-                                <p:to>
-                                  <p:strVal val="visible"/>
-                                </p:to>
-                              </p:set>
-                            </p:childTnLst>
-                          </p:cTn>
-                        </p:par>
-                        <p:par>
-                          <p:cTn id="8" presetID="1" presetClass="entr" presetSubtype="0" fill="hold">
-                            <p:stCondLst>
-                              <p:cond delay="0"/>
-                            </p:stCondLst>
-                            <p:childTnLst>
-                              <p:set>
-                                <p:cBhvr>
-                                  <p:cTn id="9" dur="1" fill="hold">
-                                    <p:stCondLst>
-                                      <p:cond delay="0"/>
-                                    </p:stCondLst>
-                                  </p:cTn>
-                                  <p:tgtEl>
-                                    <p:spTgt spid="9"/>
-                                  </p:tgtEl>
-                                  <p:attrNameLst>
-                                    <p:attrName>style.visibility</p:attrName>
-                                  </p:attrNameLst>
-                                </p:cBhvr>
-                                <p:to>
-                                  <p:strVal val="visible"/>
-                                </p:to>
-                              </p:set>
-                            </p:childTnLst>
-                          </p:cTn>
-                        </p:par>
-                      </p:childTnLst>
-                    </p:cTn>
-                  </p:par>
-                  <p:par>
-                    <p:cTn id="10" fill="hold">
-                      <p:stCondLst>
-                        <p:cond delay="0"/>
-                      </p:stCondLst>
-                      <p:childTnLst>
-                        <p:par>
-                          <p:cTn id="11" presetID="1" presetClass="entr" presetSubtype="0" fill="hold">
-                            <p:stCondLst>
-                              <p:cond delay="0"/>
-                            </p:stCondLst>
-                            <p:childTnLst>
-                              <p:set>
-                                <p:cBhvr>
-                                  <p:cTn id="12" dur="1" fill="hold">
-                                    <p:stCondLst>
-                                      <p:cond delay="0"/>
-                                    </p:stCondLst>
-                                  </p:cTn>
-                                  <p:tgtEl>
-                                    <p:spTgt spid="10"/>
-                                  </p:tgtEl>
-                                  <p:attrNameLst>
-                                    <p:attrName>style.visibility</p:attrName>
-                                  </p:attrNameLst>
-                                </p:cBhvr>
-                                <p:to>
-                                  <p:strVal val="visible"/>
-                                </p:to>
-                              </p:set>
-                            </p:childTnLst>
-                          </p:cTn>
-                        </p:par>
-                        <p:par>
-                          <p:cTn id="13" presetID="1" presetClass="entr" presetSubtype="0" fill="hold">
-                            <p:stCondLst>
-                              <p:cond delay="0"/>
-                            </p:stCondLst>
-                            <p:childTnLst>
-                              <p:set>
-                                <p:cBhvr>
-                                  <p:cTn id="14" dur="1" fill="hold">
-                                    <p:stCondLst>
-                                      <p:cond delay="0"/>
-                                    </p:stCondLst>
-                                  </p:cTn>
-                                  <p:tgtEl>
-                                    <p:spTgt spid="11"/>
-                                  </p:tgtEl>
-                                  <p:attrNameLst>
-                                    <p:attrName>style.visibility</p:attrName>
-                                  </p:attrNameLst>
-                                </p:cBhvr>
-                                <p:to>
-                                  <p:strVal val="visible"/>
-                                </p:to>
-                              </p:set>
-                            </p:childTnLst>
-                          </p:cTn>
-                        </p:par>
-                        <p:par>
-                          <p:cTn id="15" presetID="1" presetClass="entr" presetSubtype="0" fill="hold">
-                            <p:stCondLst>
-                              <p:cond delay="0"/>
-                            </p:stCondLst>
-                            <p:childTnLst>
-                              <p:set>
-                                <p:cBhvr>
-                                  <p:cTn id="16" dur="1" fill="hold">
-                                    <p:stCondLst>
-                                      <p:cond delay="0"/>
-                                    </p:stCondLst>
-                                  </p:cTn>
-                                  <p:tgtEl>
-                                    <p:spTgt spid="12"/>
-                                  </p:tgtEl>
-                                  <p:attrNameLst>
-                                    <p:attrName>style.visibility</p:attrName>
-                                  </p:attrNameLst>
-                                </p:cBhvr>
-                                <p:to>
-                                  <p:strVal val="visible"/>
-                                </p:to>
-                              </p:set>
-                            </p:childTnLst>
-                          </p:cTn>
-                        </p:par>
-                      </p:childTnLst>
-                    </p:cTn>
-                  </p:par>
-                  <p:par>
-                    <p:cTn id="17" fill="hold">
-                      <p:stCondLst>
-                        <p:cond delay="0"/>
-                      </p:stCondLst>
-                      <p:childTnLst>
-                        <p:par>
-                          <p:cTn id="18" presetID="1" presetClass="entr" presetSubtype="0" fill="hold">
-                            <p:stCondLst>
-                              <p:cond delay="0"/>
-                            </p:stCondLst>
-                            <p:childTnLst>
-                              <p:set>
-                                <p:cBhvr>
-                                  <p:cTn id="19" dur="1" fill="hold">
-                                    <p:stCondLst>
-                                      <p:cond delay="0"/>
-                                    </p:stCondLst>
-                                  </p:cTn>
-                                  <p:tgtEl>
-                                    <p:spTgt spid="13"/>
-                                  </p:tgtEl>
-                                  <p:attrNameLst>
-                                    <p:attrName>style.visibility</p:attrName>
-                                  </p:attrNameLst>
-                                </p:cBhvr>
-                                <p:to>
-                                  <p:strVal val="visible"/>
-                                </p:to>
-                              </p:set>
-                            </p:childTnLst>
-                          </p:cTn>
-                        </p:par>
-                        <p:par>
-                          <p:cTn id="20" presetID="1" presetClass="entr" presetSubtype="0" fill="hold">
-                            <p:stCondLst>
-                              <p:cond delay="0"/>
-                            </p:stCondLst>
-                            <p:childTnLst>
-                              <p:set>
-                                <p:cBhvr>
-                                  <p:cTn id="21" dur="1" fill="hold">
-                                    <p:stCondLst>
-                                      <p:cond delay="0"/>
-                                    </p:stCondLst>
-                                  </p:cTn>
-                                  <p:tgtEl>
-                                    <p:spTgt spid="14"/>
-                                  </p:tgtEl>
-                                  <p:attrNameLst>
-                                    <p:attrName>style.visibility</p:attrName>
-                                  </p:attrNameLst>
-                                </p:cBhvr>
-                                <p:to>
-                                  <p:strVal val="visible"/>
-                                </p:to>
-                              </p:set>
-                            </p:childTnLst>
-                          </p:cTn>
-                        </p:par>
-                        <p:par>
-                          <p:cTn id="22" presetID="1" presetClass="entr" presetSubtype="0" fill="hold">
-                            <p:stCondLst>
-                              <p:cond delay="0"/>
-                            </p:stCondLst>
-                            <p:childTnLst>
-                              <p:set>
-                                <p:cBhvr>
-                                  <p:cTn id="23" dur="1" fill="hold">
-                                    <p:stCondLst>
-                                      <p:cond delay="0"/>
-                                    </p:stCondLst>
-                                  </p:cTn>
-                                  <p:tgtEl>
-                                    <p:spTgt spid="15"/>
-                                  </p:tgtEl>
-                                  <p:attrNameLst>
-                                    <p:attrName>style.visibility</p:attrName>
-                                  </p:attrNameLst>
-                                </p:cBhvr>
-                                <p:to>
-                                  <p:strVal val="visible"/>
-                                </p:to>
-                              </p:set>
-                            </p:childTnLst>
-                          </p:cTn>
-                        </p:par>
-                      </p:childTnLst>
-                    </p:cTn>
-                  </p:par>
-                  <p:par>
-                    <p:cTn id="24" fill="hold">
-                      <p:stCondLst>
-                        <p:cond delay="0"/>
-                      </p:stCondLst>
-                      <p:childTnLst>
-                        <p:par>
-                          <p:cTn id="25" presetID="1" presetClass="entr" presetSubtype="0" fill="hold">
-                            <p:stCondLst>
-                              <p:cond delay="0"/>
-                            </p:stCondLst>
-                            <p:childTnLst>
-                              <p:set>
-                                <p:cBhvr>
-                                  <p:cTn id="26" dur="1" fill="hold">
-                                    <p:stCondLst>
-                                      <p:cond delay="0"/>
-                                    </p:stCondLst>
-                                  </p:cTn>
-                                  <p:tgtEl>
-                                    <p:spTgt spid="16"/>
-                                  </p:tgtEl>
-                                  <p:attrNameLst>
-                                    <p:attrName>style.visibility</p:attrName>
-                                  </p:attrNameLst>
-                                </p:cBhvr>
-                                <p:to>
-                                  <p:strVal val="visible"/>
-                                </p:to>
-                              </p:set>
-                            </p:childTnLst>
-                          </p:cTn>
-                        </p:par>
-                        <p:par>
-                          <p:cTn id="27" presetID="1" presetClass="entr" presetSubtype="0" fill="hold">
-                            <p:stCondLst>
-                              <p:cond delay="0"/>
-                            </p:stCondLst>
-                            <p:childTnLst>
-                              <p:set>
-                                <p:cBhvr>
-                                  <p:cTn id="28" dur="1" fill="hold">
-                                    <p:stCondLst>
-                                      <p:cond delay="0"/>
-                                    </p:stCondLst>
-                                  </p:cTn>
-                                  <p:tgtEl>
-                                    <p:spTgt spid="17"/>
-                                  </p:tgtEl>
-                                  <p:attrNameLst>
-                                    <p:attrName>style.visibility</p:attrName>
-                                  </p:attrNameLst>
-                                </p:cBhvr>
-                                <p:to>
-                                  <p:strVal val="visible"/>
-                                </p:to>
-                              </p:set>
-                            </p:childTnLst>
-                          </p:cTn>
-                        </p:par>
-                        <p:par>
-                          <p:cTn id="29" presetID="1" presetClass="entr" presetSubtype="0" fill="hold">
-                            <p:stCondLst>
-                              <p:cond delay="0"/>
-                            </p:stCondLst>
-                            <p:childTnLst>
-                              <p:set>
-                                <p:cBhvr>
-                                  <p:cTn id="30" dur="1" fill="hold">
-                                    <p:stCondLst>
-                                      <p:cond delay="0"/>
-                                    </p:stCondLst>
-                                  </p:cTn>
-                                  <p:tgtEl>
-                                    <p:spTgt spid="18"/>
-                                  </p:tgtEl>
-                                  <p:attrNameLst>
-                                    <p:attrName>style.visibility</p:attrName>
-                                  </p:attrNameLst>
-                                </p:cBhvr>
-                                <p:to>
-                                  <p:strVal val="visible"/>
-                                </p:to>
-                              </p:set>
-                            </p:childTnLst>
-                          </p:cTn>
-                        </p:par>
-                      </p:childTnLst>
-                    </p:cTn>
-                  </p:par>
-                </p:childTnLst>
-              </p:cTn>
-              <p:prevCondLst>
-                <p:cond evt="onPrev" delay="0">
-                  <p:tgtEl>
-                    <p:sldTgt/>
-                  </p:tgtEl>
-                </p:cond>
-              </p:prevCondLst>
-              <p:nextCondLst>
-                <p:cond evt="onNext" delay="0">
-                  <p:tgtEl>
-                    <p:sldTgt/>
-                  </p:tgtEl>
-                </p:cond>
-              </p:nextCondLst>
-            </p:seq>
-          </p:childTnLst>
-        </p:cTn>
-      </p:par>
-    </p:tnLst>
-  </p:timing>
   <p:transition spd="med">
-    <p:wipe/>
+    <p:fade/>
   </p:transition>
 </p:sld>
 </file>
@@ -6943,16 +6283,176 @@
       </p:sp>
       <p:sp>
         <p:nvSpPr>
-          <p:cNvPr id="3" name="Rectangle 2"/>
+          <p:cNvPr id="3" name="Rounded Rectangle 2"/>
           <p:cNvSpPr/>
           <p:nvPr/>
         </p:nvSpPr>
         <p:spPr>
           <a:xfrm>
-            <a:off x="0" y="1097280"/>
-            <a:ext cx="12188952" cy="411479"/>
+            <a:off x="365760" y="1143000"/>
+            <a:ext cx="2926080" cy="347471"/>
+          </a:xfrm>
+          <a:prstGeom prst="roundRect">
+            <a:avLst/>
+          </a:prstGeom>
+          <a:solidFill>
+            <a:srgbClr val="0369A1"/>
+          </a:solidFill>
+          <a:ln>
+            <a:noFill/>
+          </a:ln>
+        </p:spPr>
+        <p:style>
+          <a:lnRef idx="1">
+            <a:schemeClr val="accent1"/>
+          </a:lnRef>
+          <a:fillRef idx="3">
+            <a:schemeClr val="accent1"/>
+          </a:fillRef>
+          <a:effectRef idx="2">
+            <a:schemeClr val="accent1"/>
+          </a:effectRef>
+          <a:fontRef idx="minor">
+            <a:schemeClr val="lt1"/>
+          </a:fontRef>
+        </p:style>
+        <p:txBody>
+          <a:bodyPr rtlCol="0" anchor="ctr"/>
+          <a:lstStyle/>
+          <a:p>
+            <a:pPr algn="ctr"/>
+          </a:p>
+        </p:txBody>
+      </p:sp>
+      <p:sp>
+        <p:nvSpPr>
+          <p:cNvPr id="4" name="TextBox 3"/>
+          <p:cNvSpPr txBox="1"/>
+          <p:nvPr/>
+        </p:nvSpPr>
+        <p:spPr>
+          <a:xfrm>
+            <a:off x="365760" y="1143000"/>
+            <a:ext cx="2926080" cy="347471"/>
           </a:xfrm>
           <a:prstGeom prst="rect">
+            <a:avLst/>
+          </a:prstGeom>
+          <a:noFill/>
+        </p:spPr>
+        <p:txBody>
+          <a:bodyPr wrap="square" lIns="73152" rIns="73152" tIns="54864" bIns="54864">
+            <a:spAutoFit/>
+          </a:bodyPr>
+          <a:lstStyle/>
+          <a:p>
+            <a:pPr algn="ctr">
+              <a:defRPr sz="1300" b="1">
+                <a:solidFill>
+                  <a:srgbClr val="FFFFFF"/>
+                </a:solidFill>
+                <a:latin typeface="Arial"/>
+              </a:defRPr>
+            </a:pPr>
+            <a:r>
+              <a:t>HOẠT ĐỘNG KHÁM PHÁ</a:t>
+            </a:r>
+          </a:p>
+        </p:txBody>
+      </p:sp>
+      <p:sp>
+        <p:nvSpPr>
+          <p:cNvPr id="5" name="TextBox 4"/>
+          <p:cNvSpPr txBox="1"/>
+          <p:nvPr/>
+        </p:nvSpPr>
+        <p:spPr>
+          <a:xfrm>
+            <a:off x="3474720" y="1115568"/>
+            <a:ext cx="8046720" cy="411479"/>
+          </a:xfrm>
+          <a:prstGeom prst="rect">
+            <a:avLst/>
+          </a:prstGeom>
+          <a:noFill/>
+        </p:spPr>
+        <p:txBody>
+          <a:bodyPr wrap="square" lIns="73152" rIns="73152" tIns="54864" bIns="54864">
+            <a:spAutoFit/>
+          </a:bodyPr>
+          <a:lstStyle/>
+          <a:p>
+            <a:pPr algn="l">
+              <a:defRPr sz="2100" b="1">
+                <a:solidFill>
+                  <a:srgbClr val="0C4A6E"/>
+                </a:solidFill>
+                <a:latin typeface="Arial"/>
+              </a:defRPr>
+            </a:pPr>
+            <a:r>
+              <a:t>Mặt trái và Rủi ro khi tham gia Mạng xã hội</a:t>
+            </a:r>
+          </a:p>
+        </p:txBody>
+      </p:sp>
+      <p:sp>
+        <p:nvSpPr>
+          <p:cNvPr id="6" name="Rounded Rectangle 5"/>
+          <p:cNvSpPr/>
+          <p:nvPr/>
+        </p:nvSpPr>
+        <p:spPr>
+          <a:xfrm>
+            <a:off x="365760" y="1645920"/>
+            <a:ext cx="3840480" cy="3977639"/>
+          </a:xfrm>
+          <a:prstGeom prst="roundRect">
+            <a:avLst/>
+          </a:prstGeom>
+          <a:solidFill>
+            <a:srgbClr val="FFFFFF"/>
+          </a:solidFill>
+          <a:ln w="19050">
+            <a:solidFill>
+              <a:srgbClr val="0EA5E9"/>
+            </a:solidFill>
+          </a:ln>
+        </p:spPr>
+        <p:style>
+          <a:lnRef idx="1">
+            <a:schemeClr val="accent1"/>
+          </a:lnRef>
+          <a:fillRef idx="3">
+            <a:schemeClr val="accent1"/>
+          </a:fillRef>
+          <a:effectRef idx="2">
+            <a:schemeClr val="accent1"/>
+          </a:effectRef>
+          <a:fontRef idx="minor">
+            <a:schemeClr val="lt1"/>
+          </a:fontRef>
+        </p:style>
+        <p:txBody>
+          <a:bodyPr rtlCol="0" anchor="ctr"/>
+          <a:lstStyle/>
+          <a:p>
+            <a:pPr algn="ctr"/>
+          </a:p>
+        </p:txBody>
+      </p:sp>
+      <p:sp>
+        <p:nvSpPr>
+          <p:cNvPr id="7" name="Rounded Rectangle 6"/>
+          <p:cNvSpPr/>
+          <p:nvPr/>
+        </p:nvSpPr>
+        <p:spPr>
+          <a:xfrm>
+            <a:off x="365760" y="1645920"/>
+            <a:ext cx="164592" cy="3977639"/>
+          </a:xfrm>
+          <a:prstGeom prst="roundRect">
             <a:avLst/>
           </a:prstGeom>
           <a:solidFill>
@@ -6986,14 +6486,14 @@
       </p:sp>
       <p:sp>
         <p:nvSpPr>
-          <p:cNvPr id="4" name="TextBox 3"/>
+          <p:cNvPr id="8" name="TextBox 7"/>
           <p:cNvSpPr txBox="1"/>
           <p:nvPr/>
         </p:nvSpPr>
         <p:spPr>
           <a:xfrm>
-            <a:off x="274320" y="1124712"/>
-            <a:ext cx="11640312" cy="365760"/>
+            <a:off x="640080" y="1783080"/>
+            <a:ext cx="3429000" cy="640080"/>
           </a:xfrm>
           <a:prstGeom prst="rect">
             <a:avLst/>
@@ -7001,34 +6501,35 @@
           <a:noFill/>
         </p:spPr>
         <p:txBody>
-          <a:bodyPr wrap="square">
+          <a:bodyPr wrap="square" lIns="73152" rIns="73152" tIns="54864" bIns="54864">
             <a:spAutoFit/>
           </a:bodyPr>
           <a:lstStyle/>
           <a:p>
-            <a:pPr algn="l"/>
-            <a:r>
-              <a:rPr sz="1300" b="1">
+            <a:pPr algn="l">
+              <a:defRPr sz="1500" b="1">
                 <a:solidFill>
-                  <a:srgbClr val="FFFFFF"/>
+                  <a:srgbClr val="0F172A"/>
                 </a:solidFill>
                 <a:latin typeface="Arial"/>
-              </a:rPr>
-              <a:t>  LỚP 7 • THỬ THÁCH</a:t>
-            </a:r>
-          </a:p>
-        </p:txBody>
-      </p:sp>
-      <p:sp>
-        <p:nvSpPr>
-          <p:cNvPr id="5" name="TextBox 4"/>
+              </a:defRPr>
+            </a:pPr>
+            <a:r>
+              <a:t>• Nguy cơ lộ lọt thông tin cá nhân, bị kẻ xấu lợi dụng</a:t>
+            </a:r>
+          </a:p>
+        </p:txBody>
+      </p:sp>
+      <p:sp>
+        <p:nvSpPr>
+          <p:cNvPr id="9" name="TextBox 8"/>
           <p:cNvSpPr txBox="1"/>
           <p:nvPr/>
         </p:nvSpPr>
         <p:spPr>
           <a:xfrm>
-            <a:off x="457200" y="1600200"/>
-            <a:ext cx="11274552" cy="594360"/>
+            <a:off x="640080" y="2468880"/>
+            <a:ext cx="3429000" cy="640080"/>
           </a:xfrm>
           <a:prstGeom prst="rect">
             <a:avLst/>
@@ -7036,34 +6537,107 @@
           <a:noFill/>
         </p:spPr>
         <p:txBody>
-          <a:bodyPr wrap="square">
+          <a:bodyPr wrap="square" lIns="73152" rIns="73152" tIns="54864" bIns="54864">
             <a:spAutoFit/>
           </a:bodyPr>
           <a:lstStyle/>
           <a:p>
-            <a:pPr algn="l"/>
-            <a:r>
-              <a:rPr sz="2600" b="1">
+            <a:pPr algn="l">
+              <a:defRPr sz="1500" b="1">
                 <a:solidFill>
-                  <a:srgbClr val="0C4A6E"/>
+                  <a:srgbClr val="0F172A"/>
                 </a:solidFill>
                 <a:latin typeface="Arial"/>
-              </a:rPr>
-              <a:t>Thảo luận: Nguyên tắc 5K trên không gian số</a:t>
-            </a:r>
-          </a:p>
-        </p:txBody>
-      </p:sp>
-      <p:sp>
-        <p:nvSpPr>
-          <p:cNvPr id="6" name="Rounded Rectangle 5"/>
+              </a:defRPr>
+            </a:pPr>
+            <a:r>
+              <a:t>• Tiếp xúc tin giả, thông tin xấu độc, lừa đảo trực tuyến</a:t>
+            </a:r>
+          </a:p>
+        </p:txBody>
+      </p:sp>
+      <p:sp>
+        <p:nvSpPr>
+          <p:cNvPr id="10" name="TextBox 9"/>
+          <p:cNvSpPr txBox="1"/>
+          <p:nvPr/>
+        </p:nvSpPr>
+        <p:spPr>
+          <a:xfrm>
+            <a:off x="640080" y="3154680"/>
+            <a:ext cx="3429000" cy="640080"/>
+          </a:xfrm>
+          <a:prstGeom prst="rect">
+            <a:avLst/>
+          </a:prstGeom>
+          <a:noFill/>
+        </p:spPr>
+        <p:txBody>
+          <a:bodyPr wrap="square" lIns="73152" rIns="73152" tIns="54864" bIns="54864">
+            <a:spAutoFit/>
+          </a:bodyPr>
+          <a:lstStyle/>
+          <a:p>
+            <a:pPr algn="l">
+              <a:defRPr sz="1500" b="1">
+                <a:solidFill>
+                  <a:srgbClr val="0F172A"/>
+                </a:solidFill>
+                <a:latin typeface="Arial"/>
+              </a:defRPr>
+            </a:pPr>
+            <a:r>
+              <a:t>• Nghiện mạng xã hội, giảm tập trung học tập</a:t>
+            </a:r>
+          </a:p>
+        </p:txBody>
+      </p:sp>
+      <p:sp>
+        <p:nvSpPr>
+          <p:cNvPr id="11" name="TextBox 10"/>
+          <p:cNvSpPr txBox="1"/>
+          <p:nvPr/>
+        </p:nvSpPr>
+        <p:spPr>
+          <a:xfrm>
+            <a:off x="640080" y="3840480"/>
+            <a:ext cx="3429000" cy="640080"/>
+          </a:xfrm>
+          <a:prstGeom prst="rect">
+            <a:avLst/>
+          </a:prstGeom>
+          <a:noFill/>
+        </p:spPr>
+        <p:txBody>
+          <a:bodyPr wrap="square" lIns="73152" rIns="73152" tIns="54864" bIns="54864">
+            <a:spAutoFit/>
+          </a:bodyPr>
+          <a:lstStyle/>
+          <a:p>
+            <a:pPr algn="l">
+              <a:defRPr sz="1500" b="1">
+                <a:solidFill>
+                  <a:srgbClr val="0F172A"/>
+                </a:solidFill>
+                <a:latin typeface="Arial"/>
+              </a:defRPr>
+            </a:pPr>
+            <a:r>
+              <a:t>• Vấn nạn bắt nạt qua mạng (Cyberbullying)</a:t>
+            </a:r>
+          </a:p>
+        </p:txBody>
+      </p:sp>
+      <p:sp>
+        <p:nvSpPr>
+          <p:cNvPr id="12" name="Rounded Rectangle 11"/>
           <p:cNvSpPr/>
           <p:nvPr/>
         </p:nvSpPr>
         <p:spPr>
           <a:xfrm>
-            <a:off x="365760" y="2286000"/>
-            <a:ext cx="6400800" cy="3383279"/>
+            <a:off x="4480560" y="1645920"/>
+            <a:ext cx="7223760" cy="3977639"/>
           </a:xfrm>
           <a:prstGeom prst="roundRect">
             <a:avLst/>
@@ -7071,8 +6645,10 @@
           <a:solidFill>
             <a:srgbClr val="FFFFFF"/>
           </a:solidFill>
-          <a:ln>
-            <a:noFill/>
+          <a:ln w="19050">
+            <a:solidFill>
+              <a:srgbClr val="CBD5E1"/>
+            </a:solidFill>
           </a:ln>
         </p:spPr>
         <p:style>
@@ -7097,155 +6673,9 @@
           </a:p>
         </p:txBody>
       </p:sp>
-      <p:sp>
-        <p:nvSpPr>
-          <p:cNvPr id="7" name="Rectangle 6"/>
-          <p:cNvSpPr/>
-          <p:nvPr/>
-        </p:nvSpPr>
-        <p:spPr>
-          <a:xfrm>
-            <a:off x="365760" y="2286000"/>
-            <a:ext cx="109728" cy="3383279"/>
-          </a:xfrm>
-          <a:prstGeom prst="rect">
-            <a:avLst/>
-          </a:prstGeom>
-          <a:solidFill>
-            <a:srgbClr val="0EA5E9"/>
-          </a:solidFill>
-          <a:ln>
-            <a:noFill/>
-          </a:ln>
-        </p:spPr>
-        <p:style>
-          <a:lnRef idx="1">
-            <a:schemeClr val="accent1"/>
-          </a:lnRef>
-          <a:fillRef idx="3">
-            <a:schemeClr val="accent1"/>
-          </a:fillRef>
-          <a:effectRef idx="2">
-            <a:schemeClr val="accent1"/>
-          </a:effectRef>
-          <a:fontRef idx="minor">
-            <a:schemeClr val="lt1"/>
-          </a:fontRef>
-        </p:style>
-        <p:txBody>
-          <a:bodyPr rtlCol="0" anchor="ctr"/>
-          <a:lstStyle/>
-          <a:p>
-            <a:pPr algn="ctr"/>
-          </a:p>
-        </p:txBody>
-      </p:sp>
-      <p:sp>
-        <p:nvSpPr>
-          <p:cNvPr id="8" name="TextBox 7"/>
-          <p:cNvSpPr txBox="1"/>
-          <p:nvPr/>
-        </p:nvSpPr>
-        <p:spPr>
-          <a:xfrm>
-            <a:off x="731520" y="2468880"/>
-            <a:ext cx="5852160" cy="3017520"/>
-          </a:xfrm>
-          <a:prstGeom prst="rect">
-            <a:avLst/>
-          </a:prstGeom>
-          <a:noFill/>
-        </p:spPr>
-        <p:txBody>
-          <a:bodyPr wrap="square">
-            <a:spAutoFit/>
-          </a:bodyPr>
-          <a:lstStyle/>
-          <a:p>
-            <a:pPr algn="l">
-              <a:spcAft>
-                <a:spcPts val="600"/>
-              </a:spcAft>
-            </a:pPr>
-            <a:r>
-              <a:rPr sz="1800" b="0">
-                <a:solidFill>
-                  <a:srgbClr val="0C4A6E"/>
-                </a:solidFill>
-                <a:latin typeface="Arial"/>
-              </a:rPr>
-              <a:t>Thảo luận nhóm 4 học sinh (5 phút):</a:t>
-            </a:r>
-          </a:p>
-          <a:p>
-            <a:pPr algn="l">
-              <a:spcAft>
-                <a:spcPts val="600"/>
-              </a:spcAft>
-            </a:pPr>
-            <a:r>
-              <a:rPr sz="1800" b="0">
-                <a:solidFill>
-                  <a:srgbClr val="0C4A6E"/>
-                </a:solidFill>
-                <a:latin typeface="Arial"/>
-              </a:rPr>
-              <a:t>Không tin ngay các thông tin giật gân chưa kiểm chứng</a:t>
-            </a:r>
-          </a:p>
-          <a:p>
-            <a:pPr algn="l">
-              <a:spcAft>
-                <a:spcPts val="600"/>
-              </a:spcAft>
-            </a:pPr>
-            <a:r>
-              <a:rPr sz="1800" b="0">
-                <a:solidFill>
-                  <a:srgbClr val="0C4A6E"/>
-                </a:solidFill>
-                <a:latin typeface="Arial"/>
-              </a:rPr>
-              <a:t>Không chia sẻ thông tin cá nhân, mật khẩu</a:t>
-            </a:r>
-          </a:p>
-          <a:p>
-            <a:pPr algn="l">
-              <a:spcAft>
-                <a:spcPts val="600"/>
-              </a:spcAft>
-            </a:pPr>
-            <a:r>
-              <a:rPr sz="1800" b="0">
-                <a:solidFill>
-                  <a:srgbClr val="0C4A6E"/>
-                </a:solidFill>
-                <a:latin typeface="Arial"/>
-              </a:rPr>
-              <a:t>Không bình luận, công kích thô bạo</a:t>
-            </a:r>
-          </a:p>
-          <a:p>
-            <a:pPr algn="l">
-              <a:spcAft>
-                <a:spcPts val="600"/>
-              </a:spcAft>
-            </a:pPr>
-            <a:r>
-              <a:rPr sz="1800" b="0">
-                <a:solidFill>
-                  <a:srgbClr val="0C4A6E"/>
-                </a:solidFill>
-                <a:latin typeface="Arial"/>
-              </a:rPr>
-              <a:t>Không tải phần mềm từ các nguồn không rõ ràng</a:t>
-            </a:r>
-          </a:p>
-        </p:txBody>
-      </p:sp>
       <p:pic>
         <p:nvPicPr>
-          <p:cNvPr id="9" name="Picture 8" descr="learn1_card1.png"/>
+          <p:cNvPr id="13" name="Picture 12" descr="sgk_lop7_bai4_rui_ro_va_an_toan.png"/>
           <p:cNvPicPr>
             <a:picLocks noChangeAspect="1"/>
           </p:cNvPicPr>
@@ -7259,8 +6689,8 @@
         </p:blipFill>
         <p:spPr>
           <a:xfrm>
-            <a:off x="7132320" y="2377440"/>
-            <a:ext cx="4572000" cy="3200399"/>
+            <a:off x="4572000" y="1737360"/>
+            <a:ext cx="7040880" cy="3794760"/>
           </a:xfrm>
           <a:prstGeom prst="rect">
             <a:avLst/>
@@ -7273,7 +6703,7 @@
     <a:masterClrMapping/>
   </p:clrMapOvr>
   <p:transition spd="med">
-    <p:cover/>
+    <p:fade/>
   </p:transition>
 </p:sld>
 </file>
@@ -7339,53 +6769,10 @@
         </p:nvSpPr>
         <p:spPr>
           <a:xfrm>
-            <a:off x="548640" y="1188719"/>
-            <a:ext cx="11091672" cy="4480559"/>
+            <a:off x="365760" y="1188720"/>
+            <a:ext cx="11247120" cy="822960"/>
           </a:xfrm>
           <a:prstGeom prst="roundRect">
-            <a:avLst/>
-          </a:prstGeom>
-          <a:solidFill>
-            <a:srgbClr val="FFFFFF"/>
-          </a:solidFill>
-          <a:ln>
-            <a:noFill/>
-          </a:ln>
-        </p:spPr>
-        <p:style>
-          <a:lnRef idx="1">
-            <a:schemeClr val="accent1"/>
-          </a:lnRef>
-          <a:fillRef idx="3">
-            <a:schemeClr val="accent1"/>
-          </a:fillRef>
-          <a:effectRef idx="2">
-            <a:schemeClr val="accent1"/>
-          </a:effectRef>
-          <a:fontRef idx="minor">
-            <a:schemeClr val="lt1"/>
-          </a:fontRef>
-        </p:style>
-        <p:txBody>
-          <a:bodyPr rtlCol="0" anchor="ctr"/>
-          <a:lstStyle/>
-          <a:p>
-            <a:pPr algn="ctr"/>
-          </a:p>
-        </p:txBody>
-      </p:sp>
-      <p:sp>
-        <p:nvSpPr>
-          <p:cNvPr id="4" name="Rectangle 3"/>
-          <p:cNvSpPr/>
-          <p:nvPr/>
-        </p:nvSpPr>
-        <p:spPr>
-          <a:xfrm>
-            <a:off x="548640" y="1188719"/>
-            <a:ext cx="11091672" cy="91440"/>
-          </a:xfrm>
-          <a:prstGeom prst="rect">
             <a:avLst/>
           </a:prstGeom>
           <a:solidFill>
@@ -7419,14 +6806,14 @@
       </p:sp>
       <p:sp>
         <p:nvSpPr>
-          <p:cNvPr id="5" name="TextBox 4"/>
+          <p:cNvPr id="4" name="TextBox 3"/>
           <p:cNvSpPr txBox="1"/>
           <p:nvPr/>
         </p:nvSpPr>
         <p:spPr>
           <a:xfrm>
-            <a:off x="914400" y="1417319"/>
-            <a:ext cx="10360152" cy="548640"/>
+            <a:off x="640080" y="1234440"/>
+            <a:ext cx="10698480" cy="731520"/>
           </a:xfrm>
           <a:prstGeom prst="rect">
             <a:avLst/>
@@ -7434,44 +6821,45 @@
           <a:noFill/>
         </p:spPr>
         <p:txBody>
-          <a:bodyPr wrap="square">
+          <a:bodyPr wrap="square" lIns="73152" rIns="73152" tIns="54864" bIns="54864">
             <a:spAutoFit/>
           </a:bodyPr>
           <a:lstStyle/>
           <a:p>
-            <a:pPr algn="l"/>
-            <a:r>
-              <a:rPr sz="2400" b="1">
+            <a:pPr algn="l">
+              <a:defRPr sz="1800" b="1">
                 <a:solidFill>
-                  <a:srgbClr val="0C4A6E"/>
+                  <a:srgbClr val="FFFFFF"/>
                 </a:solidFill>
                 <a:latin typeface="Arial"/>
-              </a:rPr>
-              <a:t>Tóm tắt bài học</a:t>
-            </a:r>
-          </a:p>
-        </p:txBody>
-      </p:sp>
-      <p:sp>
-        <p:nvSpPr>
-          <p:cNvPr id="6" name="Rounded Rectangle 5"/>
+              </a:defRPr>
+            </a:pPr>
+            <a:r>
+              <a:t>❓ Tổng kết kiến thức trọng tâm Tuần 04 (Lớp 7)</a:t>
+            </a:r>
+          </a:p>
+        </p:txBody>
+      </p:sp>
+      <p:sp>
+        <p:nvSpPr>
+          <p:cNvPr id="5" name="Rounded Rectangle 4"/>
           <p:cNvSpPr/>
           <p:nvPr/>
         </p:nvSpPr>
         <p:spPr>
           <a:xfrm>
-            <a:off x="914400" y="2103120"/>
-            <a:ext cx="3331464" cy="3291839"/>
+            <a:off x="365760" y="2103120"/>
+            <a:ext cx="6400800" cy="2194559"/>
           </a:xfrm>
           <a:prstGeom prst="roundRect">
             <a:avLst/>
           </a:prstGeom>
           <a:solidFill>
-            <a:srgbClr val="F0F9FF"/>
+            <a:srgbClr val="FFFFFF"/>
           </a:solidFill>
-          <a:ln w="12700">
+          <a:ln w="19050">
             <a:solidFill>
-              <a:srgbClr val="CBD5E1"/>
+              <a:srgbClr val="0EA5E9"/>
             </a:solidFill>
           </a:ln>
         </p:spPr>
@@ -7499,20 +6887,20 @@
       </p:sp>
       <p:sp>
         <p:nvSpPr>
-          <p:cNvPr id="7" name="Oval 6"/>
+          <p:cNvPr id="6" name="Rounded Rectangle 5"/>
           <p:cNvSpPr/>
           <p:nvPr/>
         </p:nvSpPr>
         <p:spPr>
           <a:xfrm>
-            <a:off x="1051560" y="2240279"/>
-            <a:ext cx="411480" cy="411480"/>
-          </a:xfrm>
-          <a:prstGeom prst="ellipse">
+            <a:off x="365760" y="2103120"/>
+            <a:ext cx="164592" cy="2194559"/>
+          </a:xfrm>
+          <a:prstGeom prst="roundRect">
             <a:avLst/>
           </a:prstGeom>
           <a:solidFill>
-            <a:srgbClr val="0369A1"/>
+            <a:srgbClr val="0EA5E9"/>
           </a:solidFill>
           <a:ln>
             <a:noFill/>
@@ -7542,14 +6930,50 @@
       </p:sp>
       <p:sp>
         <p:nvSpPr>
+          <p:cNvPr id="7" name="TextBox 6"/>
+          <p:cNvSpPr txBox="1"/>
+          <p:nvPr/>
+        </p:nvSpPr>
+        <p:spPr>
+          <a:xfrm>
+            <a:off x="640080" y="2240280"/>
+            <a:ext cx="5943600" cy="822959"/>
+          </a:xfrm>
+          <a:prstGeom prst="rect">
+            <a:avLst/>
+          </a:prstGeom>
+          <a:noFill/>
+        </p:spPr>
+        <p:txBody>
+          <a:bodyPr wrap="square" lIns="73152" rIns="73152" tIns="54864" bIns="54864">
+            <a:spAutoFit/>
+          </a:bodyPr>
+          <a:lstStyle/>
+          <a:p>
+            <a:pPr algn="l">
+              <a:defRPr sz="1500" b="0">
+                <a:solidFill>
+                  <a:srgbClr val="0F172A"/>
+                </a:solidFill>
+                <a:latin typeface="Arial"/>
+              </a:defRPr>
+            </a:pPr>
+            <a:r>
+              <a:t>👉 Tiết 3: Tổ chức tệp ngăn nắp, sao lưu dữ liệu và diệt virus định kỳ.</a:t>
+            </a:r>
+          </a:p>
+        </p:txBody>
+      </p:sp>
+      <p:sp>
+        <p:nvSpPr>
           <p:cNvPr id="8" name="TextBox 7"/>
           <p:cNvSpPr txBox="1"/>
           <p:nvPr/>
         </p:nvSpPr>
         <p:spPr>
           <a:xfrm>
-            <a:off x="1051560" y="2240279"/>
-            <a:ext cx="411480" cy="411480"/>
+            <a:off x="640080" y="3200400"/>
+            <a:ext cx="5943600" cy="822960"/>
           </a:xfrm>
           <a:prstGeom prst="rect">
             <a:avLst/>
@@ -7557,77 +6981,43 @@
           <a:noFill/>
         </p:spPr>
         <p:txBody>
-          <a:bodyPr wrap="square">
+          <a:bodyPr wrap="square" lIns="73152" rIns="73152" tIns="54864" bIns="54864">
             <a:spAutoFit/>
           </a:bodyPr>
           <a:lstStyle/>
           <a:p>
-            <a:pPr algn="ctr"/>
-            <a:r>
-              <a:rPr sz="1400" b="1">
+            <a:pPr algn="l">
+              <a:defRPr sz="1500" b="0">
                 <a:solidFill>
-                  <a:srgbClr val="FFFFFF"/>
+                  <a:srgbClr val="0F172A"/>
                 </a:solidFill>
                 <a:latin typeface="Arial"/>
-              </a:rPr>
-              <a:t>1</a:t>
-            </a:r>
-          </a:p>
-        </p:txBody>
-      </p:sp>
-      <p:sp>
-        <p:nvSpPr>
-          <p:cNvPr id="9" name="TextBox 8"/>
-          <p:cNvSpPr txBox="1"/>
-          <p:nvPr/>
-        </p:nvSpPr>
-        <p:spPr>
-          <a:xfrm>
-            <a:off x="1051560" y="2743200"/>
-            <a:ext cx="3057144" cy="2514599"/>
-          </a:xfrm>
-          <a:prstGeom prst="rect">
-            <a:avLst/>
-          </a:prstGeom>
-          <a:noFill/>
-        </p:spPr>
-        <p:txBody>
-          <a:bodyPr wrap="square">
-            <a:spAutoFit/>
-          </a:bodyPr>
-          <a:lstStyle/>
-          <a:p>
-            <a:pPr algn="l"/>
-            <a:r>
-              <a:rPr sz="1700" b="0">
-                <a:solidFill>
-                  <a:srgbClr val="0C4A6E"/>
-                </a:solidFill>
-                <a:latin typeface="Arial"/>
-              </a:rPr>
-              <a:t>Quản lý và sao lưu dữ liệu an toàn, khoa học</a:t>
-            </a:r>
-          </a:p>
-        </p:txBody>
-      </p:sp>
-      <p:sp>
-        <p:nvSpPr>
-          <p:cNvPr id="10" name="Rounded Rectangle 9"/>
+              </a:defRPr>
+            </a:pPr>
+            <a:r>
+              <a:t>👉 Tiết 4: Khai thác tiện ích mạng xã hội, ứng xử văn minh và bảo vệ danh tính số.</a:t>
+            </a:r>
+          </a:p>
+        </p:txBody>
+      </p:sp>
+      <p:sp>
+        <p:nvSpPr>
+          <p:cNvPr id="9" name="Rounded Rectangle 8"/>
           <p:cNvSpPr/>
           <p:nvPr/>
         </p:nvSpPr>
         <p:spPr>
           <a:xfrm>
-            <a:off x="4428744" y="2103120"/>
-            <a:ext cx="3331464" cy="3291839"/>
+            <a:off x="6949440" y="2103120"/>
+            <a:ext cx="4663440" cy="2194559"/>
           </a:xfrm>
           <a:prstGeom prst="roundRect">
             <a:avLst/>
           </a:prstGeom>
           <a:solidFill>
-            <a:srgbClr val="F0F9FF"/>
+            <a:srgbClr val="FFFFFF"/>
           </a:solidFill>
-          <a:ln w="12700">
+          <a:ln w="19050">
             <a:solidFill>
               <a:srgbClr val="CBD5E1"/>
             </a:solidFill>
@@ -7655,22 +7045,46 @@
           </a:p>
         </p:txBody>
       </p:sp>
-      <p:sp>
-        <p:nvSpPr>
-          <p:cNvPr id="11" name="Oval 10"/>
+      <p:pic>
+        <p:nvPicPr>
+          <p:cNvPr id="10" name="Picture 9" descr="sgk_lop7_bai4_giao_dien_mxh_dang_bai.png"/>
+          <p:cNvPicPr>
+            <a:picLocks noChangeAspect="1"/>
+          </p:cNvPicPr>
+          <p:nvPr/>
+        </p:nvPicPr>
+        <p:blipFill>
+          <a:blip r:embed="rId2"/>
+          <a:stretch>
+            <a:fillRect/>
+          </a:stretch>
+        </p:blipFill>
+        <p:spPr>
+          <a:xfrm>
+            <a:off x="7040880" y="2148840"/>
+            <a:ext cx="4480560" cy="2103120"/>
+          </a:xfrm>
+          <a:prstGeom prst="rect">
+            <a:avLst/>
+          </a:prstGeom>
+        </p:spPr>
+      </p:pic>
+      <p:sp>
+        <p:nvSpPr>
+          <p:cNvPr id="11" name="Rounded Rectangle 10"/>
           <p:cNvSpPr/>
           <p:nvPr/>
         </p:nvSpPr>
         <p:spPr>
           <a:xfrm>
-            <a:off x="4565904" y="2240279"/>
-            <a:ext cx="411480" cy="411480"/>
-          </a:xfrm>
-          <a:prstGeom prst="ellipse">
+            <a:off x="365760" y="4434840"/>
+            <a:ext cx="11247120" cy="1188719"/>
+          </a:xfrm>
+          <a:prstGeom prst="roundRect">
             <a:avLst/>
           </a:prstGeom>
           <a:solidFill>
-            <a:srgbClr val="0369A1"/>
+            <a:srgbClr val="EA580C"/>
           </a:solidFill>
           <a:ln>
             <a:noFill/>
@@ -7706,8 +7120,8 @@
         </p:nvSpPr>
         <p:spPr>
           <a:xfrm>
-            <a:off x="4565904" y="2240279"/>
-            <a:ext cx="411480" cy="411480"/>
+            <a:off x="640080" y="4480560"/>
+            <a:ext cx="10698480" cy="320039"/>
           </a:xfrm>
           <a:prstGeom prst="rect">
             <a:avLst/>
@@ -7715,213 +7129,57 @@
           <a:noFill/>
         </p:spPr>
         <p:txBody>
-          <a:bodyPr wrap="square">
+          <a:bodyPr wrap="square" lIns="73152" rIns="73152" tIns="54864" bIns="54864">
             <a:spAutoFit/>
           </a:bodyPr>
           <a:lstStyle/>
           <a:p>
-            <a:pPr algn="ctr"/>
-            <a:r>
-              <a:rPr sz="1400" b="1">
+            <a:pPr algn="l">
+              <a:defRPr sz="1400" b="1">
+                <a:solidFill>
+                  <a:srgbClr val="FEF08A"/>
+                </a:solidFill>
+                <a:latin typeface="Arial"/>
+              </a:defRPr>
+            </a:pPr>
+            <a:r>
+              <a:t>📌 GHI NHỚ TRỌNG TÂM (SGK)</a:t>
+            </a:r>
+          </a:p>
+        </p:txBody>
+      </p:sp>
+      <p:sp>
+        <p:nvSpPr>
+          <p:cNvPr id="13" name="TextBox 12"/>
+          <p:cNvSpPr txBox="1"/>
+          <p:nvPr/>
+        </p:nvSpPr>
+        <p:spPr>
+          <a:xfrm>
+            <a:off x="640080" y="4800600"/>
+            <a:ext cx="10698480" cy="777239"/>
+          </a:xfrm>
+          <a:prstGeom prst="rect">
+            <a:avLst/>
+          </a:prstGeom>
+          <a:noFill/>
+        </p:spPr>
+        <p:txBody>
+          <a:bodyPr wrap="square" lIns="73152" rIns="73152" tIns="54864" bIns="54864">
+            <a:spAutoFit/>
+          </a:bodyPr>
+          <a:lstStyle/>
+          <a:p>
+            <a:pPr algn="l">
+              <a:defRPr sz="1600" b="1">
                 <a:solidFill>
                   <a:srgbClr val="FFFFFF"/>
                 </a:solidFill>
                 <a:latin typeface="Arial"/>
-              </a:rPr>
-              <a:t>2</a:t>
-            </a:r>
-          </a:p>
-        </p:txBody>
-      </p:sp>
-      <p:sp>
-        <p:nvSpPr>
-          <p:cNvPr id="13" name="TextBox 12"/>
-          <p:cNvSpPr txBox="1"/>
-          <p:nvPr/>
-        </p:nvSpPr>
-        <p:spPr>
-          <a:xfrm>
-            <a:off x="4565904" y="2743200"/>
-            <a:ext cx="3057144" cy="2514599"/>
-          </a:xfrm>
-          <a:prstGeom prst="rect">
-            <a:avLst/>
-          </a:prstGeom>
-          <a:noFill/>
-        </p:spPr>
-        <p:txBody>
-          <a:bodyPr wrap="square">
-            <a:spAutoFit/>
-          </a:bodyPr>
-          <a:lstStyle/>
-          <a:p>
-            <a:pPr algn="l"/>
-            <a:r>
-              <a:rPr sz="1700" b="0">
-                <a:solidFill>
-                  <a:srgbClr val="0C4A6E"/>
-                </a:solidFill>
-                <a:latin typeface="Arial"/>
-              </a:rPr>
-              <a:t>Hiểu rõ 2 mặt của Mạng xã hội</a:t>
-            </a:r>
-          </a:p>
-        </p:txBody>
-      </p:sp>
-      <p:sp>
-        <p:nvSpPr>
-          <p:cNvPr id="14" name="Rounded Rectangle 13"/>
-          <p:cNvSpPr/>
-          <p:nvPr/>
-        </p:nvSpPr>
-        <p:spPr>
-          <a:xfrm>
-            <a:off x="7943088" y="2103120"/>
-            <a:ext cx="3331464" cy="3291839"/>
-          </a:xfrm>
-          <a:prstGeom prst="roundRect">
-            <a:avLst/>
-          </a:prstGeom>
-          <a:solidFill>
-            <a:srgbClr val="F0F9FF"/>
-          </a:solidFill>
-          <a:ln w="12700">
-            <a:solidFill>
-              <a:srgbClr val="CBD5E1"/>
-            </a:solidFill>
-          </a:ln>
-        </p:spPr>
-        <p:style>
-          <a:lnRef idx="1">
-            <a:schemeClr val="accent1"/>
-          </a:lnRef>
-          <a:fillRef idx="3">
-            <a:schemeClr val="accent1"/>
-          </a:fillRef>
-          <a:effectRef idx="2">
-            <a:schemeClr val="accent1"/>
-          </a:effectRef>
-          <a:fontRef idx="minor">
-            <a:schemeClr val="lt1"/>
-          </a:fontRef>
-        </p:style>
-        <p:txBody>
-          <a:bodyPr rtlCol="0" anchor="ctr"/>
-          <a:lstStyle/>
-          <a:p>
-            <a:pPr algn="ctr"/>
-          </a:p>
-        </p:txBody>
-      </p:sp>
-      <p:sp>
-        <p:nvSpPr>
-          <p:cNvPr id="15" name="Oval 14"/>
-          <p:cNvSpPr/>
-          <p:nvPr/>
-        </p:nvSpPr>
-        <p:spPr>
-          <a:xfrm>
-            <a:off x="8080248" y="2240279"/>
-            <a:ext cx="411480" cy="411480"/>
-          </a:xfrm>
-          <a:prstGeom prst="ellipse">
-            <a:avLst/>
-          </a:prstGeom>
-          <a:solidFill>
-            <a:srgbClr val="0369A1"/>
-          </a:solidFill>
-          <a:ln>
-            <a:noFill/>
-          </a:ln>
-        </p:spPr>
-        <p:style>
-          <a:lnRef idx="1">
-            <a:schemeClr val="accent1"/>
-          </a:lnRef>
-          <a:fillRef idx="3">
-            <a:schemeClr val="accent1"/>
-          </a:fillRef>
-          <a:effectRef idx="2">
-            <a:schemeClr val="accent1"/>
-          </a:effectRef>
-          <a:fontRef idx="minor">
-            <a:schemeClr val="lt1"/>
-          </a:fontRef>
-        </p:style>
-        <p:txBody>
-          <a:bodyPr rtlCol="0" anchor="ctr"/>
-          <a:lstStyle/>
-          <a:p>
-            <a:pPr algn="ctr"/>
-          </a:p>
-        </p:txBody>
-      </p:sp>
-      <p:sp>
-        <p:nvSpPr>
-          <p:cNvPr id="16" name="TextBox 15"/>
-          <p:cNvSpPr txBox="1"/>
-          <p:nvPr/>
-        </p:nvSpPr>
-        <p:spPr>
-          <a:xfrm>
-            <a:off x="8080248" y="2240279"/>
-            <a:ext cx="411480" cy="411480"/>
-          </a:xfrm>
-          <a:prstGeom prst="rect">
-            <a:avLst/>
-          </a:prstGeom>
-          <a:noFill/>
-        </p:spPr>
-        <p:txBody>
-          <a:bodyPr wrap="square">
-            <a:spAutoFit/>
-          </a:bodyPr>
-          <a:lstStyle/>
-          <a:p>
-            <a:pPr algn="ctr"/>
-            <a:r>
-              <a:rPr sz="1400" b="1">
-                <a:solidFill>
-                  <a:srgbClr val="FFFFFF"/>
-                </a:solidFill>
-                <a:latin typeface="Arial"/>
-              </a:rPr>
-              <a:t>3</a:t>
-            </a:r>
-          </a:p>
-        </p:txBody>
-      </p:sp>
-      <p:sp>
-        <p:nvSpPr>
-          <p:cNvPr id="17" name="TextBox 16"/>
-          <p:cNvSpPr txBox="1"/>
-          <p:nvPr/>
-        </p:nvSpPr>
-        <p:spPr>
-          <a:xfrm>
-            <a:off x="8080248" y="2743200"/>
-            <a:ext cx="3057144" cy="2514599"/>
-          </a:xfrm>
-          <a:prstGeom prst="rect">
-            <a:avLst/>
-          </a:prstGeom>
-          <a:noFill/>
-        </p:spPr>
-        <p:txBody>
-          <a:bodyPr wrap="square">
-            <a:spAutoFit/>
-          </a:bodyPr>
-          <a:lstStyle/>
-          <a:p>
-            <a:pPr algn="l"/>
-            <a:r>
-              <a:rPr sz="1700" b="0">
-                <a:solidFill>
-                  <a:srgbClr val="0C4A6E"/>
-                </a:solidFill>
-                <a:latin typeface="Arial"/>
-              </a:rPr>
-              <a:t>Thực hiện ứng xử văn minh và bảo vệ danh tính số</a:t>
+              </a:defRPr>
+            </a:pPr>
+            <a:r>
+              <a:t>Quản lý dữ liệu máy tính khoa học kết hợp với văn hóa ứng xử số văn minh là nền tảng của công dân số thời đại 4.0!</a:t>
             </a:r>
           </a:p>
         </p:txBody>
@@ -7932,7 +7190,7 @@
     <a:masterClrMapping/>
   </p:clrMapOvr>
   <p:transition spd="med">
-    <p:push dir="l"/>
+    <p:fade/>
   </p:transition>
 </p:sld>
 </file>
@@ -7962,6 +7220,173 @@
             <a:avLst/>
           </a:prstGeom>
           <a:solidFill>
+            <a:srgbClr val="F0F9FF"/>
+          </a:solidFill>
+          <a:ln>
+            <a:noFill/>
+          </a:ln>
+        </p:spPr>
+        <p:style>
+          <a:lnRef idx="1">
+            <a:schemeClr val="accent1"/>
+          </a:lnRef>
+          <a:fillRef idx="3">
+            <a:schemeClr val="accent1"/>
+          </a:fillRef>
+          <a:effectRef idx="2">
+            <a:schemeClr val="accent1"/>
+          </a:effectRef>
+          <a:fontRef idx="minor">
+            <a:schemeClr val="lt1"/>
+          </a:fontRef>
+        </p:style>
+        <p:txBody>
+          <a:bodyPr rtlCol="0" anchor="ctr"/>
+          <a:lstStyle/>
+          <a:p>
+            <a:pPr algn="ctr"/>
+          </a:p>
+        </p:txBody>
+      </p:sp>
+      <p:sp>
+        <p:nvSpPr>
+          <p:cNvPr id="3" name="Rounded Rectangle 2"/>
+          <p:cNvSpPr/>
+          <p:nvPr/>
+        </p:nvSpPr>
+        <p:spPr>
+          <a:xfrm>
+            <a:off x="365760" y="1143000"/>
+            <a:ext cx="2926080" cy="347471"/>
+          </a:xfrm>
+          <a:prstGeom prst="roundRect">
+            <a:avLst/>
+          </a:prstGeom>
+          <a:solidFill>
+            <a:srgbClr val="EA580C"/>
+          </a:solidFill>
+          <a:ln>
+            <a:noFill/>
+          </a:ln>
+        </p:spPr>
+        <p:style>
+          <a:lnRef idx="1">
+            <a:schemeClr val="accent1"/>
+          </a:lnRef>
+          <a:fillRef idx="3">
+            <a:schemeClr val="accent1"/>
+          </a:fillRef>
+          <a:effectRef idx="2">
+            <a:schemeClr val="accent1"/>
+          </a:effectRef>
+          <a:fontRef idx="minor">
+            <a:schemeClr val="lt1"/>
+          </a:fontRef>
+        </p:style>
+        <p:txBody>
+          <a:bodyPr rtlCol="0" anchor="ctr"/>
+          <a:lstStyle/>
+          <a:p>
+            <a:pPr algn="ctr"/>
+          </a:p>
+        </p:txBody>
+      </p:sp>
+      <p:sp>
+        <p:nvSpPr>
+          <p:cNvPr id="4" name="TextBox 3"/>
+          <p:cNvSpPr txBox="1"/>
+          <p:nvPr/>
+        </p:nvSpPr>
+        <p:spPr>
+          <a:xfrm>
+            <a:off x="365760" y="1143000"/>
+            <a:ext cx="2926080" cy="347471"/>
+          </a:xfrm>
+          <a:prstGeom prst="rect">
+            <a:avLst/>
+          </a:prstGeom>
+          <a:noFill/>
+        </p:spPr>
+        <p:txBody>
+          <a:bodyPr wrap="square" lIns="73152" rIns="73152" tIns="54864" bIns="54864">
+            <a:spAutoFit/>
+          </a:bodyPr>
+          <a:lstStyle/>
+          <a:p>
+            <a:pPr algn="ctr">
+              <a:defRPr sz="1300" b="1">
+                <a:solidFill>
+                  <a:srgbClr val="FFFFFF"/>
+                </a:solidFill>
+                <a:latin typeface="Arial"/>
+              </a:defRPr>
+            </a:pPr>
+            <a:r>
+              <a:t>LUYỆN TẬP NHANH</a:t>
+            </a:r>
+          </a:p>
+        </p:txBody>
+      </p:sp>
+      <p:sp>
+        <p:nvSpPr>
+          <p:cNvPr id="5" name="Rounded Rectangle 4"/>
+          <p:cNvSpPr/>
+          <p:nvPr/>
+        </p:nvSpPr>
+        <p:spPr>
+          <a:xfrm>
+            <a:off x="365760" y="1600200"/>
+            <a:ext cx="11247120" cy="914400"/>
+          </a:xfrm>
+          <a:prstGeom prst="roundRect">
+            <a:avLst/>
+          </a:prstGeom>
+          <a:solidFill>
+            <a:srgbClr val="FFFFFF"/>
+          </a:solidFill>
+          <a:ln w="19050">
+            <a:solidFill>
+              <a:srgbClr val="0369A1"/>
+            </a:solidFill>
+          </a:ln>
+        </p:spPr>
+        <p:style>
+          <a:lnRef idx="1">
+            <a:schemeClr val="accent1"/>
+          </a:lnRef>
+          <a:fillRef idx="3">
+            <a:schemeClr val="accent1"/>
+          </a:fillRef>
+          <a:effectRef idx="2">
+            <a:schemeClr val="accent1"/>
+          </a:effectRef>
+          <a:fontRef idx="minor">
+            <a:schemeClr val="lt1"/>
+          </a:fontRef>
+        </p:style>
+        <p:txBody>
+          <a:bodyPr rtlCol="0" anchor="ctr"/>
+          <a:lstStyle/>
+          <a:p>
+            <a:pPr algn="ctr"/>
+          </a:p>
+        </p:txBody>
+      </p:sp>
+      <p:sp>
+        <p:nvSpPr>
+          <p:cNvPr id="6" name="Rounded Rectangle 5"/>
+          <p:cNvSpPr/>
+          <p:nvPr/>
+        </p:nvSpPr>
+        <p:spPr>
+          <a:xfrm>
+            <a:off x="365760" y="1600200"/>
+            <a:ext cx="182880" cy="914400"/>
+          </a:xfrm>
+          <a:prstGeom prst="roundRect">
+            <a:avLst/>
+          </a:prstGeom>
+          <a:solidFill>
             <a:srgbClr val="0369A1"/>
           </a:solidFill>
           <a:ln>
@@ -7992,14 +7417,14 @@
       </p:sp>
       <p:sp>
         <p:nvSpPr>
-          <p:cNvPr id="3" name="TextBox 2"/>
+          <p:cNvPr id="7" name="TextBox 6"/>
           <p:cNvSpPr txBox="1"/>
           <p:nvPr/>
         </p:nvSpPr>
         <p:spPr>
           <a:xfrm>
-            <a:off x="914400" y="1828800"/>
-            <a:ext cx="10360152" cy="1097280"/>
+            <a:off x="640080" y="1691640"/>
+            <a:ext cx="10698480" cy="731520"/>
           </a:xfrm>
           <a:prstGeom prst="rect">
             <a:avLst/>
@@ -8007,34 +7432,159 @@
           <a:noFill/>
         </p:spPr>
         <p:txBody>
-          <a:bodyPr wrap="square">
+          <a:bodyPr wrap="square" lIns="73152" rIns="73152" tIns="54864" bIns="54864">
             <a:spAutoFit/>
           </a:bodyPr>
           <a:lstStyle/>
           <a:p>
+            <a:pPr algn="l">
+              <a:defRPr sz="1700" b="1">
+                <a:solidFill>
+                  <a:srgbClr val="0F172A"/>
+                </a:solidFill>
+                <a:latin typeface="Arial"/>
+              </a:defRPr>
+            </a:pPr>
+            <a:r>
+              <a:t>❓ Hành vi nào sau đây là KHÔNG NÊN LÀM trên mạng xã hội?</a:t>
+            </a:r>
+          </a:p>
+        </p:txBody>
+      </p:sp>
+      <p:sp>
+        <p:nvSpPr>
+          <p:cNvPr id="8" name="Rounded Rectangle 7"/>
+          <p:cNvSpPr/>
+          <p:nvPr/>
+        </p:nvSpPr>
+        <p:spPr>
+          <a:xfrm>
+            <a:off x="365760" y="2651760"/>
+            <a:ext cx="5440680" cy="1325879"/>
+          </a:xfrm>
+          <a:prstGeom prst="roundRect">
+            <a:avLst/>
+          </a:prstGeom>
+          <a:solidFill>
+            <a:srgbClr val="FFFFFF"/>
+          </a:solidFill>
+          <a:ln w="19050">
+            <a:solidFill>
+              <a:srgbClr val="CBD5E1"/>
+            </a:solidFill>
+          </a:ln>
+        </p:spPr>
+        <p:style>
+          <a:lnRef idx="1">
+            <a:schemeClr val="accent1"/>
+          </a:lnRef>
+          <a:fillRef idx="3">
+            <a:schemeClr val="accent1"/>
+          </a:fillRef>
+          <a:effectRef idx="2">
+            <a:schemeClr val="accent1"/>
+          </a:effectRef>
+          <a:fontRef idx="minor">
+            <a:schemeClr val="lt1"/>
+          </a:fontRef>
+        </p:style>
+        <p:txBody>
+          <a:bodyPr rtlCol="0" anchor="ctr"/>
+          <a:lstStyle/>
+          <a:p>
             <a:pPr algn="ctr"/>
-            <a:r>
-              <a:rPr sz="3400" b="1">
+          </a:p>
+        </p:txBody>
+      </p:sp>
+      <p:sp>
+        <p:nvSpPr>
+          <p:cNvPr id="9" name="Oval 8"/>
+          <p:cNvSpPr/>
+          <p:nvPr/>
+        </p:nvSpPr>
+        <p:spPr>
+          <a:xfrm>
+            <a:off x="548640" y="2880360"/>
+            <a:ext cx="822960" cy="822959"/>
+          </a:xfrm>
+          <a:prstGeom prst="ellipse">
+            <a:avLst/>
+          </a:prstGeom>
+          <a:solidFill>
+            <a:srgbClr val="0369A1"/>
+          </a:solidFill>
+          <a:ln>
+            <a:noFill/>
+          </a:ln>
+        </p:spPr>
+        <p:style>
+          <a:lnRef idx="1">
+            <a:schemeClr val="accent1"/>
+          </a:lnRef>
+          <a:fillRef idx="3">
+            <a:schemeClr val="accent1"/>
+          </a:fillRef>
+          <a:effectRef idx="2">
+            <a:schemeClr val="accent1"/>
+          </a:effectRef>
+          <a:fontRef idx="minor">
+            <a:schemeClr val="lt1"/>
+          </a:fontRef>
+        </p:style>
+        <p:txBody>
+          <a:bodyPr rtlCol="0" anchor="ctr"/>
+          <a:lstStyle/>
+          <a:p>
+            <a:pPr algn="ctr"/>
+          </a:p>
+        </p:txBody>
+      </p:sp>
+      <p:sp>
+        <p:nvSpPr>
+          <p:cNvPr id="10" name="TextBox 9"/>
+          <p:cNvSpPr txBox="1"/>
+          <p:nvPr/>
+        </p:nvSpPr>
+        <p:spPr>
+          <a:xfrm>
+            <a:off x="548640" y="3063240"/>
+            <a:ext cx="822960" cy="457200"/>
+          </a:xfrm>
+          <a:prstGeom prst="rect">
+            <a:avLst/>
+          </a:prstGeom>
+          <a:noFill/>
+        </p:spPr>
+        <p:txBody>
+          <a:bodyPr wrap="square" lIns="73152" rIns="73152" tIns="54864" bIns="54864">
+            <a:spAutoFit/>
+          </a:bodyPr>
+          <a:lstStyle/>
+          <a:p>
+            <a:pPr algn="ctr">
+              <a:defRPr sz="1800" b="1">
                 <a:solidFill>
                   <a:srgbClr val="FFFFFF"/>
                 </a:solidFill>
                 <a:latin typeface="Arial"/>
-              </a:rPr>
-              <a:t>Bài học kết thúc! 🌟</a:t>
-            </a:r>
-          </a:p>
-        </p:txBody>
-      </p:sp>
-      <p:sp>
-        <p:nvSpPr>
-          <p:cNvPr id="4" name="TextBox 3"/>
+              </a:defRPr>
+            </a:pPr>
+            <a:r>
+              <a:t>A.</a:t>
+            </a:r>
+          </a:p>
+        </p:txBody>
+      </p:sp>
+      <p:sp>
+        <p:nvSpPr>
+          <p:cNvPr id="11" name="TextBox 10"/>
           <p:cNvSpPr txBox="1"/>
           <p:nvPr/>
         </p:nvSpPr>
         <p:spPr>
           <a:xfrm>
-            <a:off x="914400" y="3108960"/>
-            <a:ext cx="10360152" cy="1371600"/>
+            <a:off x="1508760" y="2880360"/>
+            <a:ext cx="4160520" cy="960119"/>
           </a:xfrm>
           <a:prstGeom prst="rect">
             <a:avLst/>
@@ -8042,24 +7592,501 @@
           <a:noFill/>
         </p:spPr>
         <p:txBody>
-          <a:bodyPr wrap="square">
+          <a:bodyPr wrap="square" lIns="73152" rIns="73152" tIns="54864" bIns="54864">
             <a:spAutoFit/>
           </a:bodyPr>
           <a:lstStyle/>
           <a:p>
+            <a:pPr algn="l">
+              <a:defRPr sz="1500" b="0">
+                <a:solidFill>
+                  <a:srgbClr val="0F172A"/>
+                </a:solidFill>
+                <a:latin typeface="Arial"/>
+              </a:defRPr>
+            </a:pPr>
+            <a:r>
+              <a:t>Chia sẻ bài học hay cho bạn bè</a:t>
+            </a:r>
+          </a:p>
+        </p:txBody>
+      </p:sp>
+      <p:sp>
+        <p:nvSpPr>
+          <p:cNvPr id="12" name="Rounded Rectangle 11"/>
+          <p:cNvSpPr/>
+          <p:nvPr/>
+        </p:nvSpPr>
+        <p:spPr>
+          <a:xfrm>
+            <a:off x="6172200" y="2651760"/>
+            <a:ext cx="5440680" cy="1325879"/>
+          </a:xfrm>
+          <a:prstGeom prst="roundRect">
+            <a:avLst/>
+          </a:prstGeom>
+          <a:solidFill>
+            <a:srgbClr val="FFFFFF"/>
+          </a:solidFill>
+          <a:ln w="19050">
+            <a:solidFill>
+              <a:srgbClr val="CBD5E1"/>
+            </a:solidFill>
+          </a:ln>
+        </p:spPr>
+        <p:style>
+          <a:lnRef idx="1">
+            <a:schemeClr val="accent1"/>
+          </a:lnRef>
+          <a:fillRef idx="3">
+            <a:schemeClr val="accent1"/>
+          </a:fillRef>
+          <a:effectRef idx="2">
+            <a:schemeClr val="accent1"/>
+          </a:effectRef>
+          <a:fontRef idx="minor">
+            <a:schemeClr val="lt1"/>
+          </a:fontRef>
+        </p:style>
+        <p:txBody>
+          <a:bodyPr rtlCol="0" anchor="ctr"/>
+          <a:lstStyle/>
+          <a:p>
+            <a:pPr algn="ctr"/>
+          </a:p>
+        </p:txBody>
+      </p:sp>
+      <p:sp>
+        <p:nvSpPr>
+          <p:cNvPr id="13" name="Oval 12"/>
+          <p:cNvSpPr/>
+          <p:nvPr/>
+        </p:nvSpPr>
+        <p:spPr>
+          <a:xfrm>
+            <a:off x="6355080" y="2880360"/>
+            <a:ext cx="822960" cy="822959"/>
+          </a:xfrm>
+          <a:prstGeom prst="ellipse">
+            <a:avLst/>
+          </a:prstGeom>
+          <a:solidFill>
+            <a:srgbClr val="0D9488"/>
+          </a:solidFill>
+          <a:ln>
+            <a:noFill/>
+          </a:ln>
+        </p:spPr>
+        <p:style>
+          <a:lnRef idx="1">
+            <a:schemeClr val="accent1"/>
+          </a:lnRef>
+          <a:fillRef idx="3">
+            <a:schemeClr val="accent1"/>
+          </a:fillRef>
+          <a:effectRef idx="2">
+            <a:schemeClr val="accent1"/>
+          </a:effectRef>
+          <a:fontRef idx="minor">
+            <a:schemeClr val="lt1"/>
+          </a:fontRef>
+        </p:style>
+        <p:txBody>
+          <a:bodyPr rtlCol="0" anchor="ctr"/>
+          <a:lstStyle/>
+          <a:p>
+            <a:pPr algn="ctr"/>
+          </a:p>
+        </p:txBody>
+      </p:sp>
+      <p:sp>
+        <p:nvSpPr>
+          <p:cNvPr id="14" name="TextBox 13"/>
+          <p:cNvSpPr txBox="1"/>
+          <p:nvPr/>
+        </p:nvSpPr>
+        <p:spPr>
+          <a:xfrm>
+            <a:off x="6355080" y="3063240"/>
+            <a:ext cx="822960" cy="457200"/>
+          </a:xfrm>
+          <a:prstGeom prst="rect">
+            <a:avLst/>
+          </a:prstGeom>
+          <a:noFill/>
+        </p:spPr>
+        <p:txBody>
+          <a:bodyPr wrap="square" lIns="73152" rIns="73152" tIns="54864" bIns="54864">
+            <a:spAutoFit/>
+          </a:bodyPr>
+          <a:lstStyle/>
+          <a:p>
             <a:pPr algn="ctr">
-              <a:spcAft>
-                <a:spcPts val="600"/>
-              </a:spcAft>
-            </a:pPr>
-            <a:r>
-              <a:rPr sz="2000" b="0">
+              <a:defRPr sz="1800" b="1">
                 <a:solidFill>
                   <a:srgbClr val="FFFFFF"/>
                 </a:solidFill>
                 <a:latin typeface="Arial"/>
-              </a:rPr>
-              <a:t>BTVN: Kiểm tra và thiết lập bảo mật 2 lớp cho tài khoản mạng xã hội của em!</a:t>
+              </a:defRPr>
+            </a:pPr>
+            <a:r>
+              <a:t>B.</a:t>
+            </a:r>
+          </a:p>
+        </p:txBody>
+      </p:sp>
+      <p:sp>
+        <p:nvSpPr>
+          <p:cNvPr id="15" name="TextBox 14"/>
+          <p:cNvSpPr txBox="1"/>
+          <p:nvPr/>
+        </p:nvSpPr>
+        <p:spPr>
+          <a:xfrm>
+            <a:off x="7315200" y="2880360"/>
+            <a:ext cx="4160520" cy="960119"/>
+          </a:xfrm>
+          <a:prstGeom prst="rect">
+            <a:avLst/>
+          </a:prstGeom>
+          <a:noFill/>
+        </p:spPr>
+        <p:txBody>
+          <a:bodyPr wrap="square" lIns="73152" rIns="73152" tIns="54864" bIns="54864">
+            <a:spAutoFit/>
+          </a:bodyPr>
+          <a:lstStyle/>
+          <a:p>
+            <a:pPr algn="l">
+              <a:defRPr sz="1500" b="0">
+                <a:solidFill>
+                  <a:srgbClr val="0F172A"/>
+                </a:solidFill>
+                <a:latin typeface="Arial"/>
+              </a:defRPr>
+            </a:pPr>
+            <a:r>
+              <a:t>Đăng số CCCD và mật khẩu lên trang cá nhân</a:t>
+            </a:r>
+          </a:p>
+        </p:txBody>
+      </p:sp>
+      <p:sp>
+        <p:nvSpPr>
+          <p:cNvPr id="16" name="Rounded Rectangle 15"/>
+          <p:cNvSpPr/>
+          <p:nvPr/>
+        </p:nvSpPr>
+        <p:spPr>
+          <a:xfrm>
+            <a:off x="365760" y="4114800"/>
+            <a:ext cx="5440680" cy="1325880"/>
+          </a:xfrm>
+          <a:prstGeom prst="roundRect">
+            <a:avLst/>
+          </a:prstGeom>
+          <a:solidFill>
+            <a:srgbClr val="FFFFFF"/>
+          </a:solidFill>
+          <a:ln w="19050">
+            <a:solidFill>
+              <a:srgbClr val="CBD5E1"/>
+            </a:solidFill>
+          </a:ln>
+        </p:spPr>
+        <p:style>
+          <a:lnRef idx="1">
+            <a:schemeClr val="accent1"/>
+          </a:lnRef>
+          <a:fillRef idx="3">
+            <a:schemeClr val="accent1"/>
+          </a:fillRef>
+          <a:effectRef idx="2">
+            <a:schemeClr val="accent1"/>
+          </a:effectRef>
+          <a:fontRef idx="minor">
+            <a:schemeClr val="lt1"/>
+          </a:fontRef>
+        </p:style>
+        <p:txBody>
+          <a:bodyPr rtlCol="0" anchor="ctr"/>
+          <a:lstStyle/>
+          <a:p>
+            <a:pPr algn="ctr"/>
+          </a:p>
+        </p:txBody>
+      </p:sp>
+      <p:sp>
+        <p:nvSpPr>
+          <p:cNvPr id="17" name="Oval 16"/>
+          <p:cNvSpPr/>
+          <p:nvPr/>
+        </p:nvSpPr>
+        <p:spPr>
+          <a:xfrm>
+            <a:off x="548640" y="4343400"/>
+            <a:ext cx="822960" cy="822960"/>
+          </a:xfrm>
+          <a:prstGeom prst="ellipse">
+            <a:avLst/>
+          </a:prstGeom>
+          <a:solidFill>
+            <a:srgbClr val="D97706"/>
+          </a:solidFill>
+          <a:ln>
+            <a:noFill/>
+          </a:ln>
+        </p:spPr>
+        <p:style>
+          <a:lnRef idx="1">
+            <a:schemeClr val="accent1"/>
+          </a:lnRef>
+          <a:fillRef idx="3">
+            <a:schemeClr val="accent1"/>
+          </a:fillRef>
+          <a:effectRef idx="2">
+            <a:schemeClr val="accent1"/>
+          </a:effectRef>
+          <a:fontRef idx="minor">
+            <a:schemeClr val="lt1"/>
+          </a:fontRef>
+        </p:style>
+        <p:txBody>
+          <a:bodyPr rtlCol="0" anchor="ctr"/>
+          <a:lstStyle/>
+          <a:p>
+            <a:pPr algn="ctr"/>
+          </a:p>
+        </p:txBody>
+      </p:sp>
+      <p:sp>
+        <p:nvSpPr>
+          <p:cNvPr id="18" name="TextBox 17"/>
+          <p:cNvSpPr txBox="1"/>
+          <p:nvPr/>
+        </p:nvSpPr>
+        <p:spPr>
+          <a:xfrm>
+            <a:off x="548640" y="4526280"/>
+            <a:ext cx="822960" cy="457200"/>
+          </a:xfrm>
+          <a:prstGeom prst="rect">
+            <a:avLst/>
+          </a:prstGeom>
+          <a:noFill/>
+        </p:spPr>
+        <p:txBody>
+          <a:bodyPr wrap="square" lIns="73152" rIns="73152" tIns="54864" bIns="54864">
+            <a:spAutoFit/>
+          </a:bodyPr>
+          <a:lstStyle/>
+          <a:p>
+            <a:pPr algn="ctr">
+              <a:defRPr sz="1800" b="1">
+                <a:solidFill>
+                  <a:srgbClr val="FFFFFF"/>
+                </a:solidFill>
+                <a:latin typeface="Arial"/>
+              </a:defRPr>
+            </a:pPr>
+            <a:r>
+              <a:t>C.</a:t>
+            </a:r>
+          </a:p>
+        </p:txBody>
+      </p:sp>
+      <p:sp>
+        <p:nvSpPr>
+          <p:cNvPr id="19" name="TextBox 18"/>
+          <p:cNvSpPr txBox="1"/>
+          <p:nvPr/>
+        </p:nvSpPr>
+        <p:spPr>
+          <a:xfrm>
+            <a:off x="1508760" y="4343400"/>
+            <a:ext cx="4160520" cy="960119"/>
+          </a:xfrm>
+          <a:prstGeom prst="rect">
+            <a:avLst/>
+          </a:prstGeom>
+          <a:noFill/>
+        </p:spPr>
+        <p:txBody>
+          <a:bodyPr wrap="square" lIns="73152" rIns="73152" tIns="54864" bIns="54864">
+            <a:spAutoFit/>
+          </a:bodyPr>
+          <a:lstStyle/>
+          <a:p>
+            <a:pPr algn="l">
+              <a:defRPr sz="1500" b="0">
+                <a:solidFill>
+                  <a:srgbClr val="0F172A"/>
+                </a:solidFill>
+                <a:latin typeface="Arial"/>
+              </a:defRPr>
+            </a:pPr>
+            <a:r>
+              <a:t>Báo cáo bài viết lừa đảo cho quản trị viên</a:t>
+            </a:r>
+          </a:p>
+        </p:txBody>
+      </p:sp>
+      <p:sp>
+        <p:nvSpPr>
+          <p:cNvPr id="20" name="Rounded Rectangle 19"/>
+          <p:cNvSpPr/>
+          <p:nvPr/>
+        </p:nvSpPr>
+        <p:spPr>
+          <a:xfrm>
+            <a:off x="6172200" y="4114800"/>
+            <a:ext cx="5440680" cy="1325880"/>
+          </a:xfrm>
+          <a:prstGeom prst="roundRect">
+            <a:avLst/>
+          </a:prstGeom>
+          <a:solidFill>
+            <a:srgbClr val="FFFFFF"/>
+          </a:solidFill>
+          <a:ln w="19050">
+            <a:solidFill>
+              <a:srgbClr val="CBD5E1"/>
+            </a:solidFill>
+          </a:ln>
+        </p:spPr>
+        <p:style>
+          <a:lnRef idx="1">
+            <a:schemeClr val="accent1"/>
+          </a:lnRef>
+          <a:fillRef idx="3">
+            <a:schemeClr val="accent1"/>
+          </a:fillRef>
+          <a:effectRef idx="2">
+            <a:schemeClr val="accent1"/>
+          </a:effectRef>
+          <a:fontRef idx="minor">
+            <a:schemeClr val="lt1"/>
+          </a:fontRef>
+        </p:style>
+        <p:txBody>
+          <a:bodyPr rtlCol="0" anchor="ctr"/>
+          <a:lstStyle/>
+          <a:p>
+            <a:pPr algn="ctr"/>
+          </a:p>
+        </p:txBody>
+      </p:sp>
+      <p:sp>
+        <p:nvSpPr>
+          <p:cNvPr id="21" name="Oval 20"/>
+          <p:cNvSpPr/>
+          <p:nvPr/>
+        </p:nvSpPr>
+        <p:spPr>
+          <a:xfrm>
+            <a:off x="6355080" y="4343400"/>
+            <a:ext cx="822960" cy="822960"/>
+          </a:xfrm>
+          <a:prstGeom prst="ellipse">
+            <a:avLst/>
+          </a:prstGeom>
+          <a:solidFill>
+            <a:srgbClr val="7C3AED"/>
+          </a:solidFill>
+          <a:ln>
+            <a:noFill/>
+          </a:ln>
+        </p:spPr>
+        <p:style>
+          <a:lnRef idx="1">
+            <a:schemeClr val="accent1"/>
+          </a:lnRef>
+          <a:fillRef idx="3">
+            <a:schemeClr val="accent1"/>
+          </a:fillRef>
+          <a:effectRef idx="2">
+            <a:schemeClr val="accent1"/>
+          </a:effectRef>
+          <a:fontRef idx="minor">
+            <a:schemeClr val="lt1"/>
+          </a:fontRef>
+        </p:style>
+        <p:txBody>
+          <a:bodyPr rtlCol="0" anchor="ctr"/>
+          <a:lstStyle/>
+          <a:p>
+            <a:pPr algn="ctr"/>
+          </a:p>
+        </p:txBody>
+      </p:sp>
+      <p:sp>
+        <p:nvSpPr>
+          <p:cNvPr id="22" name="TextBox 21"/>
+          <p:cNvSpPr txBox="1"/>
+          <p:nvPr/>
+        </p:nvSpPr>
+        <p:spPr>
+          <a:xfrm>
+            <a:off x="6355080" y="4526280"/>
+            <a:ext cx="822960" cy="457200"/>
+          </a:xfrm>
+          <a:prstGeom prst="rect">
+            <a:avLst/>
+          </a:prstGeom>
+          <a:noFill/>
+        </p:spPr>
+        <p:txBody>
+          <a:bodyPr wrap="square" lIns="73152" rIns="73152" tIns="54864" bIns="54864">
+            <a:spAutoFit/>
+          </a:bodyPr>
+          <a:lstStyle/>
+          <a:p>
+            <a:pPr algn="ctr">
+              <a:defRPr sz="1800" b="1">
+                <a:solidFill>
+                  <a:srgbClr val="FFFFFF"/>
+                </a:solidFill>
+                <a:latin typeface="Arial"/>
+              </a:defRPr>
+            </a:pPr>
+            <a:r>
+              <a:t>D.</a:t>
+            </a:r>
+          </a:p>
+        </p:txBody>
+      </p:sp>
+      <p:sp>
+        <p:nvSpPr>
+          <p:cNvPr id="23" name="TextBox 22"/>
+          <p:cNvSpPr txBox="1"/>
+          <p:nvPr/>
+        </p:nvSpPr>
+        <p:spPr>
+          <a:xfrm>
+            <a:off x="7315200" y="4343400"/>
+            <a:ext cx="4160520" cy="960119"/>
+          </a:xfrm>
+          <a:prstGeom prst="rect">
+            <a:avLst/>
+          </a:prstGeom>
+          <a:noFill/>
+        </p:spPr>
+        <p:txBody>
+          <a:bodyPr wrap="square" lIns="73152" rIns="73152" tIns="54864" bIns="54864">
+            <a:spAutoFit/>
+          </a:bodyPr>
+          <a:lstStyle/>
+          <a:p>
+            <a:pPr algn="l">
+              <a:defRPr sz="1500" b="0">
+                <a:solidFill>
+                  <a:srgbClr val="0F172A"/>
+                </a:solidFill>
+                <a:latin typeface="Arial"/>
+              </a:defRPr>
+            </a:pPr>
+            <a:r>
+              <a:t>Chúc mừng sinh nhật bạn bè lịch sự</a:t>
             </a:r>
           </a:p>
         </p:txBody>

--- a/KHBD_Tin_học/Lớp_7/Tuần_04/Slide_Tin_hoc_Lop_7_Bai03_04.pptx
+++ b/KHBD_Tin_học/Lớp_7/Tuần_04/Slide_Tin_hoc_Lop_7_Bai03_04.pptx
@@ -3493,7 +3493,7 @@
         <p:spPr>
           <a:xfrm>
             <a:off x="1097280" y="1463040"/>
-            <a:ext cx="9994392" cy="182879"/>
+            <a:ext cx="9994392" cy="228600"/>
           </a:xfrm>
           <a:prstGeom prst="roundRect">
             <a:avLst/>
@@ -4331,7 +4331,7 @@
               </a:defRPr>
             </a:pPr>
             <a:r>
-              <a:t>QUY TRÌNH &amp; THAO TÁC</a:t>
+              <a:t>KHỞI ĐỘNG &amp; TÌNH HUỐNG</a:t>
             </a:r>
           </a:p>
         </p:txBody>
@@ -4367,30 +4367,32 @@
               </a:defRPr>
             </a:pPr>
             <a:r>
-              <a:t>Các phần mở rộng tệp (File Extensions) thông dụng</a:t>
-            </a:r>
-          </a:p>
-        </p:txBody>
-      </p:sp>
-      <p:sp>
-        <p:nvSpPr>
-          <p:cNvPr id="6" name="Chevron 5"/>
+              <a:t>Không gian Dữ liệu số &amp; Bảo mật công nghệ</a:t>
+            </a:r>
+          </a:p>
+        </p:txBody>
+      </p:sp>
+      <p:sp>
+        <p:nvSpPr>
+          <p:cNvPr id="6" name="Rounded Rectangle 5"/>
           <p:cNvSpPr/>
           <p:nvPr/>
         </p:nvSpPr>
         <p:spPr>
           <a:xfrm>
             <a:off x="365760" y="1645920"/>
-            <a:ext cx="4754880" cy="685799"/>
-          </a:xfrm>
-          <a:prstGeom prst="chevron">
+            <a:ext cx="11247120" cy="2971800"/>
+          </a:xfrm>
+          <a:prstGeom prst="roundRect">
             <a:avLst/>
           </a:prstGeom>
           <a:solidFill>
-            <a:srgbClr val="0369A1"/>
+            <a:srgbClr val="FFFFFF"/>
           </a:solidFill>
-          <a:ln>
-            <a:noFill/>
+          <a:ln w="19050">
+            <a:solidFill>
+              <a:srgbClr val="0EA5E9"/>
+            </a:solidFill>
           </a:ln>
         </p:spPr>
         <p:style>
@@ -4415,406 +4417,9 @@
           </a:p>
         </p:txBody>
       </p:sp>
-      <p:sp>
-        <p:nvSpPr>
-          <p:cNvPr id="7" name="TextBox 6"/>
-          <p:cNvSpPr txBox="1"/>
-          <p:nvPr/>
-        </p:nvSpPr>
-        <p:spPr>
-          <a:xfrm>
-            <a:off x="640080" y="1719072"/>
-            <a:ext cx="4206240" cy="548639"/>
-          </a:xfrm>
-          <a:prstGeom prst="rect">
-            <a:avLst/>
-          </a:prstGeom>
-          <a:noFill/>
-        </p:spPr>
-        <p:txBody>
-          <a:bodyPr wrap="square" lIns="73152" rIns="73152" tIns="54864" bIns="54864">
-            <a:spAutoFit/>
-          </a:bodyPr>
-          <a:lstStyle/>
-          <a:p>
-            <a:pPr algn="l">
-              <a:defRPr sz="1400" b="1">
-                <a:solidFill>
-                  <a:srgbClr val="FFFFFF"/>
-                </a:solidFill>
-                <a:latin typeface="Arial"/>
-              </a:defRPr>
-            </a:pPr>
-            <a:r>
-              <a:t>.docx / .pdf: Tệp văn bản và tài liệu</a:t>
-            </a:r>
-          </a:p>
-        </p:txBody>
-      </p:sp>
-      <p:sp>
-        <p:nvSpPr>
-          <p:cNvPr id="8" name="Chevron 7"/>
-          <p:cNvSpPr/>
-          <p:nvPr/>
-        </p:nvSpPr>
-        <p:spPr>
-          <a:xfrm>
-            <a:off x="365760" y="2441448"/>
-            <a:ext cx="4754880" cy="685800"/>
-          </a:xfrm>
-          <a:prstGeom prst="chevron">
-            <a:avLst/>
-          </a:prstGeom>
-          <a:solidFill>
-            <a:srgbClr val="0EA5E9"/>
-          </a:solidFill>
-          <a:ln>
-            <a:noFill/>
-          </a:ln>
-        </p:spPr>
-        <p:style>
-          <a:lnRef idx="1">
-            <a:schemeClr val="accent1"/>
-          </a:lnRef>
-          <a:fillRef idx="3">
-            <a:schemeClr val="accent1"/>
-          </a:fillRef>
-          <a:effectRef idx="2">
-            <a:schemeClr val="accent1"/>
-          </a:effectRef>
-          <a:fontRef idx="minor">
-            <a:schemeClr val="lt1"/>
-          </a:fontRef>
-        </p:style>
-        <p:txBody>
-          <a:bodyPr rtlCol="0" anchor="ctr"/>
-          <a:lstStyle/>
-          <a:p>
-            <a:pPr algn="ctr"/>
-          </a:p>
-        </p:txBody>
-      </p:sp>
-      <p:sp>
-        <p:nvSpPr>
-          <p:cNvPr id="9" name="TextBox 8"/>
-          <p:cNvSpPr txBox="1"/>
-          <p:nvPr/>
-        </p:nvSpPr>
-        <p:spPr>
-          <a:xfrm>
-            <a:off x="640080" y="2514600"/>
-            <a:ext cx="4206240" cy="548640"/>
-          </a:xfrm>
-          <a:prstGeom prst="rect">
-            <a:avLst/>
-          </a:prstGeom>
-          <a:noFill/>
-        </p:spPr>
-        <p:txBody>
-          <a:bodyPr wrap="square" lIns="73152" rIns="73152" tIns="54864" bIns="54864">
-            <a:spAutoFit/>
-          </a:bodyPr>
-          <a:lstStyle/>
-          <a:p>
-            <a:pPr algn="l">
-              <a:defRPr sz="1400" b="1">
-                <a:solidFill>
-                  <a:srgbClr val="FFFFFF"/>
-                </a:solidFill>
-                <a:latin typeface="Arial"/>
-              </a:defRPr>
-            </a:pPr>
-            <a:r>
-              <a:t>.xlsx: Tệp bảng tính điện tử Excel</a:t>
-            </a:r>
-          </a:p>
-        </p:txBody>
-      </p:sp>
-      <p:sp>
-        <p:nvSpPr>
-          <p:cNvPr id="10" name="Chevron 9"/>
-          <p:cNvSpPr/>
-          <p:nvPr/>
-        </p:nvSpPr>
-        <p:spPr>
-          <a:xfrm>
-            <a:off x="365760" y="3236976"/>
-            <a:ext cx="4754880" cy="685800"/>
-          </a:xfrm>
-          <a:prstGeom prst="chevron">
-            <a:avLst/>
-          </a:prstGeom>
-          <a:solidFill>
-            <a:srgbClr val="0D9488"/>
-          </a:solidFill>
-          <a:ln>
-            <a:noFill/>
-          </a:ln>
-        </p:spPr>
-        <p:style>
-          <a:lnRef idx="1">
-            <a:schemeClr val="accent1"/>
-          </a:lnRef>
-          <a:fillRef idx="3">
-            <a:schemeClr val="accent1"/>
-          </a:fillRef>
-          <a:effectRef idx="2">
-            <a:schemeClr val="accent1"/>
-          </a:effectRef>
-          <a:fontRef idx="minor">
-            <a:schemeClr val="lt1"/>
-          </a:fontRef>
-        </p:style>
-        <p:txBody>
-          <a:bodyPr rtlCol="0" anchor="ctr"/>
-          <a:lstStyle/>
-          <a:p>
-            <a:pPr algn="ctr"/>
-          </a:p>
-        </p:txBody>
-      </p:sp>
-      <p:sp>
-        <p:nvSpPr>
-          <p:cNvPr id="11" name="TextBox 10"/>
-          <p:cNvSpPr txBox="1"/>
-          <p:nvPr/>
-        </p:nvSpPr>
-        <p:spPr>
-          <a:xfrm>
-            <a:off x="640080" y="3310128"/>
-            <a:ext cx="4206240" cy="548639"/>
-          </a:xfrm>
-          <a:prstGeom prst="rect">
-            <a:avLst/>
-          </a:prstGeom>
-          <a:noFill/>
-        </p:spPr>
-        <p:txBody>
-          <a:bodyPr wrap="square" lIns="73152" rIns="73152" tIns="54864" bIns="54864">
-            <a:spAutoFit/>
-          </a:bodyPr>
-          <a:lstStyle/>
-          <a:p>
-            <a:pPr algn="l">
-              <a:defRPr sz="1400" b="1">
-                <a:solidFill>
-                  <a:srgbClr val="FFFFFF"/>
-                </a:solidFill>
-                <a:latin typeface="Arial"/>
-              </a:defRPr>
-            </a:pPr>
-            <a:r>
-              <a:t>.pptx: Tệp bài trình chiếu PowerPoint</a:t>
-            </a:r>
-          </a:p>
-        </p:txBody>
-      </p:sp>
-      <p:sp>
-        <p:nvSpPr>
-          <p:cNvPr id="12" name="Chevron 11"/>
-          <p:cNvSpPr/>
-          <p:nvPr/>
-        </p:nvSpPr>
-        <p:spPr>
-          <a:xfrm>
-            <a:off x="365760" y="4032504"/>
-            <a:ext cx="4754880" cy="685800"/>
-          </a:xfrm>
-          <a:prstGeom prst="chevron">
-            <a:avLst/>
-          </a:prstGeom>
-          <a:solidFill>
-            <a:srgbClr val="D97706"/>
-          </a:solidFill>
-          <a:ln>
-            <a:noFill/>
-          </a:ln>
-        </p:spPr>
-        <p:style>
-          <a:lnRef idx="1">
-            <a:schemeClr val="accent1"/>
-          </a:lnRef>
-          <a:fillRef idx="3">
-            <a:schemeClr val="accent1"/>
-          </a:fillRef>
-          <a:effectRef idx="2">
-            <a:schemeClr val="accent1"/>
-          </a:effectRef>
-          <a:fontRef idx="minor">
-            <a:schemeClr val="lt1"/>
-          </a:fontRef>
-        </p:style>
-        <p:txBody>
-          <a:bodyPr rtlCol="0" anchor="ctr"/>
-          <a:lstStyle/>
-          <a:p>
-            <a:pPr algn="ctr"/>
-          </a:p>
-        </p:txBody>
-      </p:sp>
-      <p:sp>
-        <p:nvSpPr>
-          <p:cNvPr id="13" name="TextBox 12"/>
-          <p:cNvSpPr txBox="1"/>
-          <p:nvPr/>
-        </p:nvSpPr>
-        <p:spPr>
-          <a:xfrm>
-            <a:off x="640080" y="4105656"/>
-            <a:ext cx="4206240" cy="548639"/>
-          </a:xfrm>
-          <a:prstGeom prst="rect">
-            <a:avLst/>
-          </a:prstGeom>
-          <a:noFill/>
-        </p:spPr>
-        <p:txBody>
-          <a:bodyPr wrap="square" lIns="73152" rIns="73152" tIns="54864" bIns="54864">
-            <a:spAutoFit/>
-          </a:bodyPr>
-          <a:lstStyle/>
-          <a:p>
-            <a:pPr algn="l">
-              <a:defRPr sz="1400" b="1">
-                <a:solidFill>
-                  <a:srgbClr val="FFFFFF"/>
-                </a:solidFill>
-                <a:latin typeface="Arial"/>
-              </a:defRPr>
-            </a:pPr>
-            <a:r>
-              <a:t>.jpg / .png: Tệp hình ảnh đồ họa</a:t>
-            </a:r>
-          </a:p>
-        </p:txBody>
-      </p:sp>
-      <p:sp>
-        <p:nvSpPr>
-          <p:cNvPr id="14" name="Chevron 13"/>
-          <p:cNvSpPr/>
-          <p:nvPr/>
-        </p:nvSpPr>
-        <p:spPr>
-          <a:xfrm>
-            <a:off x="365760" y="4828032"/>
-            <a:ext cx="4754880" cy="685800"/>
-          </a:xfrm>
-          <a:prstGeom prst="chevron">
-            <a:avLst/>
-          </a:prstGeom>
-          <a:solidFill>
-            <a:srgbClr val="7C3AED"/>
-          </a:solidFill>
-          <a:ln>
-            <a:noFill/>
-          </a:ln>
-        </p:spPr>
-        <p:style>
-          <a:lnRef idx="1">
-            <a:schemeClr val="accent1"/>
-          </a:lnRef>
-          <a:fillRef idx="3">
-            <a:schemeClr val="accent1"/>
-          </a:fillRef>
-          <a:effectRef idx="2">
-            <a:schemeClr val="accent1"/>
-          </a:effectRef>
-          <a:fontRef idx="minor">
-            <a:schemeClr val="lt1"/>
-          </a:fontRef>
-        </p:style>
-        <p:txBody>
-          <a:bodyPr rtlCol="0" anchor="ctr"/>
-          <a:lstStyle/>
-          <a:p>
-            <a:pPr algn="ctr"/>
-          </a:p>
-        </p:txBody>
-      </p:sp>
-      <p:sp>
-        <p:nvSpPr>
-          <p:cNvPr id="15" name="TextBox 14"/>
-          <p:cNvSpPr txBox="1"/>
-          <p:nvPr/>
-        </p:nvSpPr>
-        <p:spPr>
-          <a:xfrm>
-            <a:off x="640080" y="4901184"/>
-            <a:ext cx="4206240" cy="548639"/>
-          </a:xfrm>
-          <a:prstGeom prst="rect">
-            <a:avLst/>
-          </a:prstGeom>
-          <a:noFill/>
-        </p:spPr>
-        <p:txBody>
-          <a:bodyPr wrap="square" lIns="73152" rIns="73152" tIns="54864" bIns="54864">
-            <a:spAutoFit/>
-          </a:bodyPr>
-          <a:lstStyle/>
-          <a:p>
-            <a:pPr algn="l">
-              <a:defRPr sz="1400" b="1">
-                <a:solidFill>
-                  <a:srgbClr val="FFFFFF"/>
-                </a:solidFill>
-                <a:latin typeface="Arial"/>
-              </a:defRPr>
-            </a:pPr>
-            <a:r>
-              <a:t>.mp3 / .mp4: Tệp âm thanh và video đa phương tiện</a:t>
-            </a:r>
-          </a:p>
-        </p:txBody>
-      </p:sp>
-      <p:sp>
-        <p:nvSpPr>
-          <p:cNvPr id="16" name="Rounded Rectangle 15"/>
-          <p:cNvSpPr/>
-          <p:nvPr/>
-        </p:nvSpPr>
-        <p:spPr>
-          <a:xfrm>
-            <a:off x="5394960" y="1645920"/>
-            <a:ext cx="6309360" cy="3977639"/>
-          </a:xfrm>
-          <a:prstGeom prst="roundRect">
-            <a:avLst/>
-          </a:prstGeom>
-          <a:solidFill>
-            <a:srgbClr val="FFFFFF"/>
-          </a:solidFill>
-          <a:ln w="19050">
-            <a:solidFill>
-              <a:srgbClr val="CBD5E1"/>
-            </a:solidFill>
-          </a:ln>
-        </p:spPr>
-        <p:style>
-          <a:lnRef idx="1">
-            <a:schemeClr val="accent1"/>
-          </a:lnRef>
-          <a:fillRef idx="3">
-            <a:schemeClr val="accent1"/>
-          </a:fillRef>
-          <a:effectRef idx="2">
-            <a:schemeClr val="accent1"/>
-          </a:effectRef>
-          <a:fontRef idx="minor">
-            <a:schemeClr val="lt1"/>
-          </a:fontRef>
-        </p:style>
-        <p:txBody>
-          <a:bodyPr rtlCol="0" anchor="ctr"/>
-          <a:lstStyle/>
-          <a:p>
-            <a:pPr algn="ctr"/>
-          </a:p>
-        </p:txBody>
-      </p:sp>
       <p:pic>
         <p:nvPicPr>
-          <p:cNvPr id="17" name="Picture 16" descr="sgk_lop7_bai3_hinh32_duoi_mo_rong_tep.png"/>
+          <p:cNvPr id="7" name="Picture 6" descr="ai_lop7_bai3_data_hub.jpg"/>
           <p:cNvPicPr>
             <a:picLocks noChangeAspect="1"/>
           </p:cNvPicPr>
@@ -4828,14 +4433,138 @@
         </p:blipFill>
         <p:spPr>
           <a:xfrm>
-            <a:off x="5486400" y="1737360"/>
-            <a:ext cx="6126480" cy="3794760"/>
+            <a:off x="457200" y="1691640"/>
+            <a:ext cx="11064240" cy="2880360"/>
           </a:xfrm>
           <a:prstGeom prst="rect">
             <a:avLst/>
           </a:prstGeom>
         </p:spPr>
       </p:pic>
+      <p:sp>
+        <p:nvSpPr>
+          <p:cNvPr id="8" name="Rounded Rectangle 7"/>
+          <p:cNvSpPr/>
+          <p:nvPr/>
+        </p:nvSpPr>
+        <p:spPr>
+          <a:xfrm>
+            <a:off x="365760" y="4709160"/>
+            <a:ext cx="11247120" cy="960119"/>
+          </a:xfrm>
+          <a:prstGeom prst="roundRect">
+            <a:avLst/>
+          </a:prstGeom>
+          <a:solidFill>
+            <a:srgbClr val="FFFFFF"/>
+          </a:solidFill>
+          <a:ln w="19050">
+            <a:solidFill>
+              <a:srgbClr val="0369A1"/>
+            </a:solidFill>
+          </a:ln>
+        </p:spPr>
+        <p:style>
+          <a:lnRef idx="1">
+            <a:schemeClr val="accent1"/>
+          </a:lnRef>
+          <a:fillRef idx="3">
+            <a:schemeClr val="accent1"/>
+          </a:fillRef>
+          <a:effectRef idx="2">
+            <a:schemeClr val="accent1"/>
+          </a:effectRef>
+          <a:fontRef idx="minor">
+            <a:schemeClr val="lt1"/>
+          </a:fontRef>
+        </p:style>
+        <p:txBody>
+          <a:bodyPr rtlCol="0" anchor="ctr"/>
+          <a:lstStyle/>
+          <a:p>
+            <a:pPr algn="ctr"/>
+          </a:p>
+        </p:txBody>
+      </p:sp>
+      <p:sp>
+        <p:nvSpPr>
+          <p:cNvPr id="9" name="Rounded Rectangle 8"/>
+          <p:cNvSpPr/>
+          <p:nvPr/>
+        </p:nvSpPr>
+        <p:spPr>
+          <a:xfrm>
+            <a:off x="365760" y="4709160"/>
+            <a:ext cx="182880" cy="960119"/>
+          </a:xfrm>
+          <a:prstGeom prst="roundRect">
+            <a:avLst/>
+          </a:prstGeom>
+          <a:solidFill>
+            <a:srgbClr val="0369A1"/>
+          </a:solidFill>
+          <a:ln>
+            <a:noFill/>
+          </a:ln>
+        </p:spPr>
+        <p:style>
+          <a:lnRef idx="1">
+            <a:schemeClr val="accent1"/>
+          </a:lnRef>
+          <a:fillRef idx="3">
+            <a:schemeClr val="accent1"/>
+          </a:fillRef>
+          <a:effectRef idx="2">
+            <a:schemeClr val="accent1"/>
+          </a:effectRef>
+          <a:fontRef idx="minor">
+            <a:schemeClr val="lt1"/>
+          </a:fontRef>
+        </p:style>
+        <p:txBody>
+          <a:bodyPr rtlCol="0" anchor="ctr"/>
+          <a:lstStyle/>
+          <a:p>
+            <a:pPr algn="ctr"/>
+          </a:p>
+        </p:txBody>
+      </p:sp>
+      <p:sp>
+        <p:nvSpPr>
+          <p:cNvPr id="10" name="TextBox 9"/>
+          <p:cNvSpPr txBox="1"/>
+          <p:nvPr/>
+        </p:nvSpPr>
+        <p:spPr>
+          <a:xfrm>
+            <a:off x="685800" y="4800600"/>
+            <a:ext cx="10607040" cy="777239"/>
+          </a:xfrm>
+          <a:prstGeom prst="rect">
+            <a:avLst/>
+          </a:prstGeom>
+          <a:noFill/>
+        </p:spPr>
+        <p:txBody>
+          <a:bodyPr wrap="square" lIns="73152" rIns="73152" tIns="54864" bIns="54864">
+            <a:spAutoFit/>
+          </a:bodyPr>
+          <a:lstStyle/>
+          <a:p>
+            <a:pPr algn="l">
+              <a:defRPr sz="1500" b="1">
+                <a:solidFill>
+                  <a:srgbClr val="0F172A"/>
+                </a:solidFill>
+                <a:latin typeface="Arial"/>
+              </a:defRPr>
+            </a:pPr>
+            <a:r>
+              <a:t>👉 Nhận diện phần mở rộng (.docx, .xlsx, .pptx, .jpg, .mp4) &amp; Sao lưu dự phòng an toàn!</a:t>
+            </a:r>
+          </a:p>
+        </p:txBody>
+      </p:sp>
     </p:spTree>
   </p:cSld>
   <p:clrMapOvr>
@@ -4974,7 +4703,7 @@
               </a:defRPr>
             </a:pPr>
             <a:r>
-              <a:t>HOẠT ĐỘNG KHÁM PHÁ</a:t>
+              <a:t>QUY TRÌNH &amp; THAO TÁC</a:t>
             </a:r>
           </a:p>
         </p:txBody>
@@ -5010,32 +4739,30 @@
               </a:defRPr>
             </a:pPr>
             <a:r>
-              <a:t>Sao lưu dữ liệu &amp; Phòng chống Virus máy tính</a:t>
-            </a:r>
-          </a:p>
-        </p:txBody>
-      </p:sp>
-      <p:sp>
-        <p:nvSpPr>
-          <p:cNvPr id="6" name="Rounded Rectangle 5"/>
+              <a:t>Chiến lược Sao lưu dữ liệu &amp; Phòng chống Virus</a:t>
+            </a:r>
+          </a:p>
+        </p:txBody>
+      </p:sp>
+      <p:sp>
+        <p:nvSpPr>
+          <p:cNvPr id="6" name="Chevron 5"/>
           <p:cNvSpPr/>
           <p:nvPr/>
         </p:nvSpPr>
         <p:spPr>
           <a:xfrm>
             <a:off x="365760" y="1645920"/>
-            <a:ext cx="3840480" cy="3977639"/>
-          </a:xfrm>
-          <a:prstGeom prst="roundRect">
+            <a:ext cx="4754880" cy="868680"/>
+          </a:xfrm>
+          <a:prstGeom prst="chevron">
             <a:avLst/>
           </a:prstGeom>
           <a:solidFill>
-            <a:srgbClr val="FFFFFF"/>
+            <a:srgbClr val="0369A1"/>
           </a:solidFill>
-          <a:ln w="19050">
-            <a:solidFill>
-              <a:srgbClr val="0EA5E9"/>
-            </a:solidFill>
+          <a:ln>
+            <a:noFill/>
           </a:ln>
         </p:spPr>
         <p:style>
@@ -5062,16 +4789,52 @@
       </p:sp>
       <p:sp>
         <p:nvSpPr>
-          <p:cNvPr id="7" name="Rounded Rectangle 6"/>
+          <p:cNvPr id="7" name="TextBox 6"/>
+          <p:cNvSpPr txBox="1"/>
+          <p:nvPr/>
+        </p:nvSpPr>
+        <p:spPr>
+          <a:xfrm>
+            <a:off x="640080" y="1719072"/>
+            <a:ext cx="4206240" cy="731520"/>
+          </a:xfrm>
+          <a:prstGeom prst="rect">
+            <a:avLst/>
+          </a:prstGeom>
+          <a:noFill/>
+        </p:spPr>
+        <p:txBody>
+          <a:bodyPr wrap="square" lIns="73152" rIns="73152" tIns="54864" bIns="54864">
+            <a:spAutoFit/>
+          </a:bodyPr>
+          <a:lstStyle/>
+          <a:p>
+            <a:pPr algn="l">
+              <a:defRPr sz="1400" b="1">
+                <a:solidFill>
+                  <a:srgbClr val="FFFFFF"/>
+                </a:solidFill>
+                <a:latin typeface="Arial"/>
+              </a:defRPr>
+            </a:pPr>
+            <a:r>
+              <a:t>1. Sao lưu định kỳ (Backup) lên Cloud / Ổ cứng ngoài</a:t>
+            </a:r>
+          </a:p>
+        </p:txBody>
+      </p:sp>
+      <p:sp>
+        <p:nvSpPr>
+          <p:cNvPr id="8" name="Chevron 7"/>
           <p:cNvSpPr/>
           <p:nvPr/>
         </p:nvSpPr>
         <p:spPr>
           <a:xfrm>
-            <a:off x="365760" y="1645920"/>
-            <a:ext cx="164592" cy="3977639"/>
-          </a:xfrm>
-          <a:prstGeom prst="roundRect">
+            <a:off x="365760" y="2624328"/>
+            <a:ext cx="4754880" cy="868680"/>
+          </a:xfrm>
+          <a:prstGeom prst="chevron">
             <a:avLst/>
           </a:prstGeom>
           <a:solidFill>
@@ -5105,14 +4868,14 @@
       </p:sp>
       <p:sp>
         <p:nvSpPr>
-          <p:cNvPr id="8" name="TextBox 7"/>
+          <p:cNvPr id="9" name="TextBox 8"/>
           <p:cNvSpPr txBox="1"/>
           <p:nvPr/>
         </p:nvSpPr>
         <p:spPr>
           <a:xfrm>
-            <a:off x="640080" y="1783080"/>
-            <a:ext cx="3429000" cy="640080"/>
+            <a:off x="640080" y="2697480"/>
+            <a:ext cx="4206240" cy="731519"/>
           </a:xfrm>
           <a:prstGeom prst="rect">
             <a:avLst/>
@@ -5126,29 +4889,72 @@
           <a:lstStyle/>
           <a:p>
             <a:pPr algn="l">
-              <a:defRPr sz="1500" b="1">
+              <a:defRPr sz="1400" b="1">
                 <a:solidFill>
-                  <a:srgbClr val="0F172A"/>
+                  <a:srgbClr val="FFFFFF"/>
                 </a:solidFill>
                 <a:latin typeface="Arial"/>
               </a:defRPr>
             </a:pPr>
             <a:r>
-              <a:t>• Sao lưu định kỳ (Backup) ra USB, ổ cứng ngoài, Cloud</a:t>
-            </a:r>
-          </a:p>
-        </p:txBody>
-      </p:sp>
-      <p:sp>
-        <p:nvSpPr>
-          <p:cNvPr id="9" name="TextBox 8"/>
+              <a:t>2. Đặt mật khẩu mạnh và không chia sẻ cho người khác</a:t>
+            </a:r>
+          </a:p>
+        </p:txBody>
+      </p:sp>
+      <p:sp>
+        <p:nvSpPr>
+          <p:cNvPr id="10" name="Chevron 9"/>
+          <p:cNvSpPr/>
+          <p:nvPr/>
+        </p:nvSpPr>
+        <p:spPr>
+          <a:xfrm>
+            <a:off x="365760" y="3602736"/>
+            <a:ext cx="4754880" cy="868679"/>
+          </a:xfrm>
+          <a:prstGeom prst="chevron">
+            <a:avLst/>
+          </a:prstGeom>
+          <a:solidFill>
+            <a:srgbClr val="0D9488"/>
+          </a:solidFill>
+          <a:ln>
+            <a:noFill/>
+          </a:ln>
+        </p:spPr>
+        <p:style>
+          <a:lnRef idx="1">
+            <a:schemeClr val="accent1"/>
+          </a:lnRef>
+          <a:fillRef idx="3">
+            <a:schemeClr val="accent1"/>
+          </a:fillRef>
+          <a:effectRef idx="2">
+            <a:schemeClr val="accent1"/>
+          </a:effectRef>
+          <a:fontRef idx="minor">
+            <a:schemeClr val="lt1"/>
+          </a:fontRef>
+        </p:style>
+        <p:txBody>
+          <a:bodyPr rtlCol="0" anchor="ctr"/>
+          <a:lstStyle/>
+          <a:p>
+            <a:pPr algn="ctr"/>
+          </a:p>
+        </p:txBody>
+      </p:sp>
+      <p:sp>
+        <p:nvSpPr>
+          <p:cNvPr id="11" name="TextBox 10"/>
           <p:cNvSpPr txBox="1"/>
           <p:nvPr/>
         </p:nvSpPr>
         <p:spPr>
           <a:xfrm>
-            <a:off x="640080" y="2468880"/>
-            <a:ext cx="3429000" cy="640080"/>
+            <a:off x="640080" y="3675887"/>
+            <a:ext cx="4206240" cy="731519"/>
           </a:xfrm>
           <a:prstGeom prst="rect">
             <a:avLst/>
@@ -5162,29 +4968,72 @@
           <a:lstStyle/>
           <a:p>
             <a:pPr algn="l">
-              <a:defRPr sz="1500" b="1">
+              <a:defRPr sz="1400" b="1">
                 <a:solidFill>
-                  <a:srgbClr val="0F172A"/>
+                  <a:srgbClr val="FFFFFF"/>
                 </a:solidFill>
                 <a:latin typeface="Arial"/>
               </a:defRPr>
             </a:pPr>
             <a:r>
-              <a:t>• Tránh mất dữ liệu khi máy tính bị hỏng hóc</a:t>
-            </a:r>
-          </a:p>
-        </p:txBody>
-      </p:sp>
-      <p:sp>
-        <p:nvSpPr>
-          <p:cNvPr id="10" name="TextBox 9"/>
+              <a:t>3. Bật phần mềm diệt virus (Windows Defender)</a:t>
+            </a:r>
+          </a:p>
+        </p:txBody>
+      </p:sp>
+      <p:sp>
+        <p:nvSpPr>
+          <p:cNvPr id="12" name="Chevron 11"/>
+          <p:cNvSpPr/>
+          <p:nvPr/>
+        </p:nvSpPr>
+        <p:spPr>
+          <a:xfrm>
+            <a:off x="365760" y="4581144"/>
+            <a:ext cx="4754880" cy="868680"/>
+          </a:xfrm>
+          <a:prstGeom prst="chevron">
+            <a:avLst/>
+          </a:prstGeom>
+          <a:solidFill>
+            <a:srgbClr val="D97706"/>
+          </a:solidFill>
+          <a:ln>
+            <a:noFill/>
+          </a:ln>
+        </p:spPr>
+        <p:style>
+          <a:lnRef idx="1">
+            <a:schemeClr val="accent1"/>
+          </a:lnRef>
+          <a:fillRef idx="3">
+            <a:schemeClr val="accent1"/>
+          </a:fillRef>
+          <a:effectRef idx="2">
+            <a:schemeClr val="accent1"/>
+          </a:effectRef>
+          <a:fontRef idx="minor">
+            <a:schemeClr val="lt1"/>
+          </a:fontRef>
+        </p:style>
+        <p:txBody>
+          <a:bodyPr rtlCol="0" anchor="ctr"/>
+          <a:lstStyle/>
+          <a:p>
+            <a:pPr algn="ctr"/>
+          </a:p>
+        </p:txBody>
+      </p:sp>
+      <p:sp>
+        <p:nvSpPr>
+          <p:cNvPr id="13" name="TextBox 12"/>
           <p:cNvSpPr txBox="1"/>
           <p:nvPr/>
         </p:nvSpPr>
         <p:spPr>
           <a:xfrm>
-            <a:off x="640080" y="3154680"/>
-            <a:ext cx="3429000" cy="640080"/>
+            <a:off x="640080" y="4654296"/>
+            <a:ext cx="4206240" cy="731519"/>
           </a:xfrm>
           <a:prstGeom prst="rect">
             <a:avLst/>
@@ -5198,65 +5047,29 @@
           <a:lstStyle/>
           <a:p>
             <a:pPr algn="l">
-              <a:defRPr sz="1500" b="1">
+              <a:defRPr sz="1400" b="1">
                 <a:solidFill>
-                  <a:srgbClr val="0F172A"/>
+                  <a:srgbClr val="FFFFFF"/>
                 </a:solidFill>
                 <a:latin typeface="Arial"/>
               </a:defRPr>
             </a:pPr>
             <a:r>
-              <a:t>• Bật tường lửa và phần mềm diệt virus (Windows Defender)</a:t>
-            </a:r>
-          </a:p>
-        </p:txBody>
-      </p:sp>
-      <p:sp>
-        <p:nvSpPr>
-          <p:cNvPr id="11" name="TextBox 10"/>
-          <p:cNvSpPr txBox="1"/>
-          <p:nvPr/>
-        </p:nvSpPr>
-        <p:spPr>
-          <a:xfrm>
-            <a:off x="640080" y="3840480"/>
-            <a:ext cx="3429000" cy="640080"/>
-          </a:xfrm>
-          <a:prstGeom prst="rect">
-            <a:avLst/>
-          </a:prstGeom>
-          <a:noFill/>
-        </p:spPr>
-        <p:txBody>
-          <a:bodyPr wrap="square" lIns="73152" rIns="73152" tIns="54864" bIns="54864">
-            <a:spAutoFit/>
-          </a:bodyPr>
-          <a:lstStyle/>
-          <a:p>
-            <a:pPr algn="l">
-              <a:defRPr sz="1500" b="1">
-                <a:solidFill>
-                  <a:srgbClr val="0F172A"/>
-                </a:solidFill>
-                <a:latin typeface="Arial"/>
-              </a:defRPr>
-            </a:pPr>
-            <a:r>
-              <a:t>• Tuyệt đối không mở các tệp đính kèm lạ có đuôi .exe, .bat</a:t>
-            </a:r>
-          </a:p>
-        </p:txBody>
-      </p:sp>
-      <p:sp>
-        <p:nvSpPr>
-          <p:cNvPr id="12" name="Rounded Rectangle 11"/>
+              <a:t>4. Tuyệt đối không mở liên kết lạ, tệp đính kèm đáng ngờ</a:t>
+            </a:r>
+          </a:p>
+        </p:txBody>
+      </p:sp>
+      <p:sp>
+        <p:nvSpPr>
+          <p:cNvPr id="14" name="Rounded Rectangle 13"/>
           <p:cNvSpPr/>
           <p:nvPr/>
         </p:nvSpPr>
         <p:spPr>
           <a:xfrm>
-            <a:off x="4480560" y="1645920"/>
-            <a:ext cx="7223760" cy="3977639"/>
+            <a:off x="5394960" y="1645920"/>
+            <a:ext cx="6309360" cy="3977639"/>
           </a:xfrm>
           <a:prstGeom prst="roundRect">
             <a:avLst/>
@@ -5294,7 +5107,7 @@
       </p:sp>
       <p:pic>
         <p:nvPicPr>
-          <p:cNvPr id="13" name="Picture 12" descr="sgk_lop7_bai3_hinh33_sao_luu_du_lieu.png"/>
+          <p:cNvPr id="15" name="Picture 14" descr="ai_lop7_bai3_data_hub.jpg"/>
           <p:cNvPicPr>
             <a:picLocks noChangeAspect="1"/>
           </p:cNvPicPr>
@@ -5308,8 +5121,8 @@
         </p:blipFill>
         <p:spPr>
           <a:xfrm>
-            <a:off x="4572000" y="1737360"/>
-            <a:ext cx="7040880" cy="3794760"/>
+            <a:off x="5486400" y="1737360"/>
+            <a:ext cx="6126480" cy="3794760"/>
           </a:xfrm>
           <a:prstGeom prst="rect">
             <a:avLst/>
@@ -5712,7 +5525,7 @@
               </a:defRPr>
             </a:pPr>
             <a:r>
-              <a:t>QUY TRÌNH &amp; THAO TÁC</a:t>
+              <a:t>KHỞI ĐỘNG &amp; TÌNH HUỐNG</a:t>
             </a:r>
           </a:p>
         </p:txBody>
@@ -5748,30 +5561,32 @@
               </a:defRPr>
             </a:pPr>
             <a:r>
-              <a:t>Các chức năng cơ bản của Mạng xã hội</a:t>
-            </a:r>
-          </a:p>
-        </p:txBody>
-      </p:sp>
-      <p:sp>
-        <p:nvSpPr>
-          <p:cNvPr id="6" name="Chevron 5"/>
+              <a:t>Thế giới Mạng xã hội &amp; Tấm khiên bảo vệ số</a:t>
+            </a:r>
+          </a:p>
+        </p:txBody>
+      </p:sp>
+      <p:sp>
+        <p:nvSpPr>
+          <p:cNvPr id="6" name="Rounded Rectangle 5"/>
           <p:cNvSpPr/>
           <p:nvPr/>
         </p:nvSpPr>
         <p:spPr>
           <a:xfrm>
             <a:off x="365760" y="1645920"/>
-            <a:ext cx="4754880" cy="685799"/>
-          </a:xfrm>
-          <a:prstGeom prst="chevron">
+            <a:ext cx="11247120" cy="2971800"/>
+          </a:xfrm>
+          <a:prstGeom prst="roundRect">
             <a:avLst/>
           </a:prstGeom>
           <a:solidFill>
-            <a:srgbClr val="0369A1"/>
+            <a:srgbClr val="FFFFFF"/>
           </a:solidFill>
-          <a:ln>
-            <a:noFill/>
+          <a:ln w="19050">
+            <a:solidFill>
+              <a:srgbClr val="0EA5E9"/>
+            </a:solidFill>
           </a:ln>
         </p:spPr>
         <p:style>
@@ -5796,406 +5611,9 @@
           </a:p>
         </p:txBody>
       </p:sp>
-      <p:sp>
-        <p:nvSpPr>
-          <p:cNvPr id="7" name="TextBox 6"/>
-          <p:cNvSpPr txBox="1"/>
-          <p:nvPr/>
-        </p:nvSpPr>
-        <p:spPr>
-          <a:xfrm>
-            <a:off x="640080" y="1719072"/>
-            <a:ext cx="4206240" cy="548639"/>
-          </a:xfrm>
-          <a:prstGeom prst="rect">
-            <a:avLst/>
-          </a:prstGeom>
-          <a:noFill/>
-        </p:spPr>
-        <p:txBody>
-          <a:bodyPr wrap="square" lIns="73152" rIns="73152" tIns="54864" bIns="54864">
-            <a:spAutoFit/>
-          </a:bodyPr>
-          <a:lstStyle/>
-          <a:p>
-            <a:pPr algn="l">
-              <a:defRPr sz="1400" b="1">
-                <a:solidFill>
-                  <a:srgbClr val="FFFFFF"/>
-                </a:solidFill>
-                <a:latin typeface="Arial"/>
-              </a:defRPr>
-            </a:pPr>
-            <a:r>
-              <a:t>1. Tạo hồ sơ cá nhân và cập nhật thông tin</a:t>
-            </a:r>
-          </a:p>
-        </p:txBody>
-      </p:sp>
-      <p:sp>
-        <p:nvSpPr>
-          <p:cNvPr id="8" name="Chevron 7"/>
-          <p:cNvSpPr/>
-          <p:nvPr/>
-        </p:nvSpPr>
-        <p:spPr>
-          <a:xfrm>
-            <a:off x="365760" y="2441448"/>
-            <a:ext cx="4754880" cy="685800"/>
-          </a:xfrm>
-          <a:prstGeom prst="chevron">
-            <a:avLst/>
-          </a:prstGeom>
-          <a:solidFill>
-            <a:srgbClr val="0EA5E9"/>
-          </a:solidFill>
-          <a:ln>
-            <a:noFill/>
-          </a:ln>
-        </p:spPr>
-        <p:style>
-          <a:lnRef idx="1">
-            <a:schemeClr val="accent1"/>
-          </a:lnRef>
-          <a:fillRef idx="3">
-            <a:schemeClr val="accent1"/>
-          </a:fillRef>
-          <a:effectRef idx="2">
-            <a:schemeClr val="accent1"/>
-          </a:effectRef>
-          <a:fontRef idx="minor">
-            <a:schemeClr val="lt1"/>
-          </a:fontRef>
-        </p:style>
-        <p:txBody>
-          <a:bodyPr rtlCol="0" anchor="ctr"/>
-          <a:lstStyle/>
-          <a:p>
-            <a:pPr algn="ctr"/>
-          </a:p>
-        </p:txBody>
-      </p:sp>
-      <p:sp>
-        <p:nvSpPr>
-          <p:cNvPr id="9" name="TextBox 8"/>
-          <p:cNvSpPr txBox="1"/>
-          <p:nvPr/>
-        </p:nvSpPr>
-        <p:spPr>
-          <a:xfrm>
-            <a:off x="640080" y="2514600"/>
-            <a:ext cx="4206240" cy="548640"/>
-          </a:xfrm>
-          <a:prstGeom prst="rect">
-            <a:avLst/>
-          </a:prstGeom>
-          <a:noFill/>
-        </p:spPr>
-        <p:txBody>
-          <a:bodyPr wrap="square" lIns="73152" rIns="73152" tIns="54864" bIns="54864">
-            <a:spAutoFit/>
-          </a:bodyPr>
-          <a:lstStyle/>
-          <a:p>
-            <a:pPr algn="l">
-              <a:defRPr sz="1400" b="1">
-                <a:solidFill>
-                  <a:srgbClr val="FFFFFF"/>
-                </a:solidFill>
-                <a:latin typeface="Arial"/>
-              </a:defRPr>
-            </a:pPr>
-            <a:r>
-              <a:t>2. Đăng bài viết (Post): Văn bản, hình ảnh, video</a:t>
-            </a:r>
-          </a:p>
-        </p:txBody>
-      </p:sp>
-      <p:sp>
-        <p:nvSpPr>
-          <p:cNvPr id="10" name="Chevron 9"/>
-          <p:cNvSpPr/>
-          <p:nvPr/>
-        </p:nvSpPr>
-        <p:spPr>
-          <a:xfrm>
-            <a:off x="365760" y="3236976"/>
-            <a:ext cx="4754880" cy="685800"/>
-          </a:xfrm>
-          <a:prstGeom prst="chevron">
-            <a:avLst/>
-          </a:prstGeom>
-          <a:solidFill>
-            <a:srgbClr val="0D9488"/>
-          </a:solidFill>
-          <a:ln>
-            <a:noFill/>
-          </a:ln>
-        </p:spPr>
-        <p:style>
-          <a:lnRef idx="1">
-            <a:schemeClr val="accent1"/>
-          </a:lnRef>
-          <a:fillRef idx="3">
-            <a:schemeClr val="accent1"/>
-          </a:fillRef>
-          <a:effectRef idx="2">
-            <a:schemeClr val="accent1"/>
-          </a:effectRef>
-          <a:fontRef idx="minor">
-            <a:schemeClr val="lt1"/>
-          </a:fontRef>
-        </p:style>
-        <p:txBody>
-          <a:bodyPr rtlCol="0" anchor="ctr"/>
-          <a:lstStyle/>
-          <a:p>
-            <a:pPr algn="ctr"/>
-          </a:p>
-        </p:txBody>
-      </p:sp>
-      <p:sp>
-        <p:nvSpPr>
-          <p:cNvPr id="11" name="TextBox 10"/>
-          <p:cNvSpPr txBox="1"/>
-          <p:nvPr/>
-        </p:nvSpPr>
-        <p:spPr>
-          <a:xfrm>
-            <a:off x="640080" y="3310128"/>
-            <a:ext cx="4206240" cy="548639"/>
-          </a:xfrm>
-          <a:prstGeom prst="rect">
-            <a:avLst/>
-          </a:prstGeom>
-          <a:noFill/>
-        </p:spPr>
-        <p:txBody>
-          <a:bodyPr wrap="square" lIns="73152" rIns="73152" tIns="54864" bIns="54864">
-            <a:spAutoFit/>
-          </a:bodyPr>
-          <a:lstStyle/>
-          <a:p>
-            <a:pPr algn="l">
-              <a:defRPr sz="1400" b="1">
-                <a:solidFill>
-                  <a:srgbClr val="FFFFFF"/>
-                </a:solidFill>
-                <a:latin typeface="Arial"/>
-              </a:defRPr>
-            </a:pPr>
-            <a:r>
-              <a:t>3. Kết nối bạn bè, theo dõi các trang thông tin</a:t>
-            </a:r>
-          </a:p>
-        </p:txBody>
-      </p:sp>
-      <p:sp>
-        <p:nvSpPr>
-          <p:cNvPr id="12" name="Chevron 11"/>
-          <p:cNvSpPr/>
-          <p:nvPr/>
-        </p:nvSpPr>
-        <p:spPr>
-          <a:xfrm>
-            <a:off x="365760" y="4032504"/>
-            <a:ext cx="4754880" cy="685800"/>
-          </a:xfrm>
-          <a:prstGeom prst="chevron">
-            <a:avLst/>
-          </a:prstGeom>
-          <a:solidFill>
-            <a:srgbClr val="D97706"/>
-          </a:solidFill>
-          <a:ln>
-            <a:noFill/>
-          </a:ln>
-        </p:spPr>
-        <p:style>
-          <a:lnRef idx="1">
-            <a:schemeClr val="accent1"/>
-          </a:lnRef>
-          <a:fillRef idx="3">
-            <a:schemeClr val="accent1"/>
-          </a:fillRef>
-          <a:effectRef idx="2">
-            <a:schemeClr val="accent1"/>
-          </a:effectRef>
-          <a:fontRef idx="minor">
-            <a:schemeClr val="lt1"/>
-          </a:fontRef>
-        </p:style>
-        <p:txBody>
-          <a:bodyPr rtlCol="0" anchor="ctr"/>
-          <a:lstStyle/>
-          <a:p>
-            <a:pPr algn="ctr"/>
-          </a:p>
-        </p:txBody>
-      </p:sp>
-      <p:sp>
-        <p:nvSpPr>
-          <p:cNvPr id="13" name="TextBox 12"/>
-          <p:cNvSpPr txBox="1"/>
-          <p:nvPr/>
-        </p:nvSpPr>
-        <p:spPr>
-          <a:xfrm>
-            <a:off x="640080" y="4105656"/>
-            <a:ext cx="4206240" cy="548639"/>
-          </a:xfrm>
-          <a:prstGeom prst="rect">
-            <a:avLst/>
-          </a:prstGeom>
-          <a:noFill/>
-        </p:spPr>
-        <p:txBody>
-          <a:bodyPr wrap="square" lIns="73152" rIns="73152" tIns="54864" bIns="54864">
-            <a:spAutoFit/>
-          </a:bodyPr>
-          <a:lstStyle/>
-          <a:p>
-            <a:pPr algn="l">
-              <a:defRPr sz="1400" b="1">
-                <a:solidFill>
-                  <a:srgbClr val="FFFFFF"/>
-                </a:solidFill>
-                <a:latin typeface="Arial"/>
-              </a:defRPr>
-            </a:pPr>
-            <a:r>
-              <a:t>4. Tương tác: Thích (Like), Bình luận (Comment), Chia sẻ (Share)</a:t>
-            </a:r>
-          </a:p>
-        </p:txBody>
-      </p:sp>
-      <p:sp>
-        <p:nvSpPr>
-          <p:cNvPr id="14" name="Chevron 13"/>
-          <p:cNvSpPr/>
-          <p:nvPr/>
-        </p:nvSpPr>
-        <p:spPr>
-          <a:xfrm>
-            <a:off x="365760" y="4828032"/>
-            <a:ext cx="4754880" cy="685800"/>
-          </a:xfrm>
-          <a:prstGeom prst="chevron">
-            <a:avLst/>
-          </a:prstGeom>
-          <a:solidFill>
-            <a:srgbClr val="7C3AED"/>
-          </a:solidFill>
-          <a:ln>
-            <a:noFill/>
-          </a:ln>
-        </p:spPr>
-        <p:style>
-          <a:lnRef idx="1">
-            <a:schemeClr val="accent1"/>
-          </a:lnRef>
-          <a:fillRef idx="3">
-            <a:schemeClr val="accent1"/>
-          </a:fillRef>
-          <a:effectRef idx="2">
-            <a:schemeClr val="accent1"/>
-          </a:effectRef>
-          <a:fontRef idx="minor">
-            <a:schemeClr val="lt1"/>
-          </a:fontRef>
-        </p:style>
-        <p:txBody>
-          <a:bodyPr rtlCol="0" anchor="ctr"/>
-          <a:lstStyle/>
-          <a:p>
-            <a:pPr algn="ctr"/>
-          </a:p>
-        </p:txBody>
-      </p:sp>
-      <p:sp>
-        <p:nvSpPr>
-          <p:cNvPr id="15" name="TextBox 14"/>
-          <p:cNvSpPr txBox="1"/>
-          <p:nvPr/>
-        </p:nvSpPr>
-        <p:spPr>
-          <a:xfrm>
-            <a:off x="640080" y="4901184"/>
-            <a:ext cx="4206240" cy="548639"/>
-          </a:xfrm>
-          <a:prstGeom prst="rect">
-            <a:avLst/>
-          </a:prstGeom>
-          <a:noFill/>
-        </p:spPr>
-        <p:txBody>
-          <a:bodyPr wrap="square" lIns="73152" rIns="73152" tIns="54864" bIns="54864">
-            <a:spAutoFit/>
-          </a:bodyPr>
-          <a:lstStyle/>
-          <a:p>
-            <a:pPr algn="l">
-              <a:defRPr sz="1400" b="1">
-                <a:solidFill>
-                  <a:srgbClr val="FFFFFF"/>
-                </a:solidFill>
-                <a:latin typeface="Arial"/>
-              </a:defRPr>
-            </a:pPr>
-            <a:r>
-              <a:t>5. Trò chuyện trực tuyến (Chat Messenger, Nhóm thảo luận)</a:t>
-            </a:r>
-          </a:p>
-        </p:txBody>
-      </p:sp>
-      <p:sp>
-        <p:nvSpPr>
-          <p:cNvPr id="16" name="Rounded Rectangle 15"/>
-          <p:cNvSpPr/>
-          <p:nvPr/>
-        </p:nvSpPr>
-        <p:spPr>
-          <a:xfrm>
-            <a:off x="5394960" y="1645920"/>
-            <a:ext cx="6309360" cy="3977639"/>
-          </a:xfrm>
-          <a:prstGeom prst="roundRect">
-            <a:avLst/>
-          </a:prstGeom>
-          <a:solidFill>
-            <a:srgbClr val="FFFFFF"/>
-          </a:solidFill>
-          <a:ln w="19050">
-            <a:solidFill>
-              <a:srgbClr val="CBD5E1"/>
-            </a:solidFill>
-          </a:ln>
-        </p:spPr>
-        <p:style>
-          <a:lnRef idx="1">
-            <a:schemeClr val="accent1"/>
-          </a:lnRef>
-          <a:fillRef idx="3">
-            <a:schemeClr val="accent1"/>
-          </a:fillRef>
-          <a:effectRef idx="2">
-            <a:schemeClr val="accent1"/>
-          </a:effectRef>
-          <a:fontRef idx="minor">
-            <a:schemeClr val="lt1"/>
-          </a:fontRef>
-        </p:style>
-        <p:txBody>
-          <a:bodyPr rtlCol="0" anchor="ctr"/>
-          <a:lstStyle/>
-          <a:p>
-            <a:pPr algn="ctr"/>
-          </a:p>
-        </p:txBody>
-      </p:sp>
       <p:pic>
         <p:nvPicPr>
-          <p:cNvPr id="17" name="Picture 16" descr="sgk_lop7_bai4_hinh42_43_chuc_nang_mxh.png"/>
+          <p:cNvPr id="7" name="Picture 6" descr="ai_lop7_bai4_social_networks.jpg"/>
           <p:cNvPicPr>
             <a:picLocks noChangeAspect="1"/>
           </p:cNvPicPr>
@@ -6209,14 +5627,138 @@
         </p:blipFill>
         <p:spPr>
           <a:xfrm>
-            <a:off x="5486400" y="1737360"/>
-            <a:ext cx="6126480" cy="3794760"/>
+            <a:off x="457200" y="1691640"/>
+            <a:ext cx="11064240" cy="2880360"/>
           </a:xfrm>
           <a:prstGeom prst="rect">
             <a:avLst/>
           </a:prstGeom>
         </p:spPr>
       </p:pic>
+      <p:sp>
+        <p:nvSpPr>
+          <p:cNvPr id="8" name="Rounded Rectangle 7"/>
+          <p:cNvSpPr/>
+          <p:nvPr/>
+        </p:nvSpPr>
+        <p:spPr>
+          <a:xfrm>
+            <a:off x="365760" y="4709160"/>
+            <a:ext cx="11247120" cy="960119"/>
+          </a:xfrm>
+          <a:prstGeom prst="roundRect">
+            <a:avLst/>
+          </a:prstGeom>
+          <a:solidFill>
+            <a:srgbClr val="FFFFFF"/>
+          </a:solidFill>
+          <a:ln w="19050">
+            <a:solidFill>
+              <a:srgbClr val="0369A1"/>
+            </a:solidFill>
+          </a:ln>
+        </p:spPr>
+        <p:style>
+          <a:lnRef idx="1">
+            <a:schemeClr val="accent1"/>
+          </a:lnRef>
+          <a:fillRef idx="3">
+            <a:schemeClr val="accent1"/>
+          </a:fillRef>
+          <a:effectRef idx="2">
+            <a:schemeClr val="accent1"/>
+          </a:effectRef>
+          <a:fontRef idx="minor">
+            <a:schemeClr val="lt1"/>
+          </a:fontRef>
+        </p:style>
+        <p:txBody>
+          <a:bodyPr rtlCol="0" anchor="ctr"/>
+          <a:lstStyle/>
+          <a:p>
+            <a:pPr algn="ctr"/>
+          </a:p>
+        </p:txBody>
+      </p:sp>
+      <p:sp>
+        <p:nvSpPr>
+          <p:cNvPr id="9" name="Rounded Rectangle 8"/>
+          <p:cNvSpPr/>
+          <p:nvPr/>
+        </p:nvSpPr>
+        <p:spPr>
+          <a:xfrm>
+            <a:off x="365760" y="4709160"/>
+            <a:ext cx="182880" cy="960119"/>
+          </a:xfrm>
+          <a:prstGeom prst="roundRect">
+            <a:avLst/>
+          </a:prstGeom>
+          <a:solidFill>
+            <a:srgbClr val="0369A1"/>
+          </a:solidFill>
+          <a:ln>
+            <a:noFill/>
+          </a:ln>
+        </p:spPr>
+        <p:style>
+          <a:lnRef idx="1">
+            <a:schemeClr val="accent1"/>
+          </a:lnRef>
+          <a:fillRef idx="3">
+            <a:schemeClr val="accent1"/>
+          </a:fillRef>
+          <a:effectRef idx="2">
+            <a:schemeClr val="accent1"/>
+          </a:effectRef>
+          <a:fontRef idx="minor">
+            <a:schemeClr val="lt1"/>
+          </a:fontRef>
+        </p:style>
+        <p:txBody>
+          <a:bodyPr rtlCol="0" anchor="ctr"/>
+          <a:lstStyle/>
+          <a:p>
+            <a:pPr algn="ctr"/>
+          </a:p>
+        </p:txBody>
+      </p:sp>
+      <p:sp>
+        <p:nvSpPr>
+          <p:cNvPr id="10" name="TextBox 9"/>
+          <p:cNvSpPr txBox="1"/>
+          <p:nvPr/>
+        </p:nvSpPr>
+        <p:spPr>
+          <a:xfrm>
+            <a:off x="685800" y="4800600"/>
+            <a:ext cx="10607040" cy="777239"/>
+          </a:xfrm>
+          <a:prstGeom prst="rect">
+            <a:avLst/>
+          </a:prstGeom>
+          <a:noFill/>
+        </p:spPr>
+        <p:txBody>
+          <a:bodyPr wrap="square" lIns="73152" rIns="73152" tIns="54864" bIns="54864">
+            <a:spAutoFit/>
+          </a:bodyPr>
+          <a:lstStyle/>
+          <a:p>
+            <a:pPr algn="l">
+              <a:defRPr sz="1500" b="1">
+                <a:solidFill>
+                  <a:srgbClr val="0F172A"/>
+                </a:solidFill>
+                <a:latin typeface="Arial"/>
+              </a:defRPr>
+            </a:pPr>
+            <a:r>
+              <a:t>👉 Kết nối bạn bè năm châu &amp; Luôn giữ vững tấm khiên bảo vệ an toàn thông tin cá nhân!</a:t>
+            </a:r>
+          </a:p>
+        </p:txBody>
+      </p:sp>
     </p:spTree>
   </p:cSld>
   <p:clrMapOvr>
@@ -6355,7 +5897,7 @@
               </a:defRPr>
             </a:pPr>
             <a:r>
-              <a:t>HOẠT ĐỘNG KHÁM PHÁ</a:t>
+              <a:t>KIẾN THỨC CỐT LÕI</a:t>
             </a:r>
           </a:p>
         </p:txBody>
@@ -6391,7 +5933,7 @@
               </a:defRPr>
             </a:pPr>
             <a:r>
-              <a:t>Mặt trái và Rủi ro khi tham gia Mạng xã hội</a:t>
+              <a:t>Nhận diện 2 mặt của Mạng xã hội</a:t>
             </a:r>
           </a:p>
         </p:txBody>
@@ -6405,7 +5947,7 @@
         <p:spPr>
           <a:xfrm>
             <a:off x="365760" y="1645920"/>
-            <a:ext cx="3840480" cy="3977639"/>
+            <a:ext cx="3566160" cy="3977639"/>
           </a:xfrm>
           <a:prstGeom prst="roundRect">
             <a:avLst/>
@@ -6415,7 +5957,7 @@
           </a:solidFill>
           <a:ln w="19050">
             <a:solidFill>
-              <a:srgbClr val="0EA5E9"/>
+              <a:srgbClr val="0369A1"/>
             </a:solidFill>
           </a:ln>
         </p:spPr>
@@ -6450,13 +5992,13 @@
         <p:spPr>
           <a:xfrm>
             <a:off x="365760" y="1645920"/>
-            <a:ext cx="164592" cy="3977639"/>
+            <a:ext cx="3566160" cy="457199"/>
           </a:xfrm>
           <a:prstGeom prst="roundRect">
             <a:avLst/>
           </a:prstGeom>
           <a:solidFill>
-            <a:srgbClr val="0EA5E9"/>
+            <a:srgbClr val="0369A1"/>
           </a:solidFill>
           <a:ln>
             <a:noFill/>
@@ -6492,8 +6034,8 @@
         </p:nvSpPr>
         <p:spPr>
           <a:xfrm>
-            <a:off x="640080" y="1783080"/>
-            <a:ext cx="3429000" cy="640080"/>
+            <a:off x="365760" y="1691640"/>
+            <a:ext cx="3566160" cy="411480"/>
           </a:xfrm>
           <a:prstGeom prst="rect">
             <a:avLst/>
@@ -6506,8 +6048,44 @@
           </a:bodyPr>
           <a:lstStyle/>
           <a:p>
+            <a:pPr algn="ctr">
+              <a:defRPr sz="1500" b="1">
+                <a:solidFill>
+                  <a:srgbClr val="FFFFFF"/>
+                </a:solidFill>
+                <a:latin typeface="Arial"/>
+              </a:defRPr>
+            </a:pPr>
+            <a:r>
+              <a:t>🌟 Mặt tích cực</a:t>
+            </a:r>
+          </a:p>
+        </p:txBody>
+      </p:sp>
+      <p:sp>
+        <p:nvSpPr>
+          <p:cNvPr id="9" name="TextBox 8"/>
+          <p:cNvSpPr txBox="1"/>
+          <p:nvPr/>
+        </p:nvSpPr>
+        <p:spPr>
+          <a:xfrm>
+            <a:off x="502920" y="2240280"/>
+            <a:ext cx="3291840" cy="594359"/>
+          </a:xfrm>
+          <a:prstGeom prst="rect">
+            <a:avLst/>
+          </a:prstGeom>
+          <a:noFill/>
+        </p:spPr>
+        <p:txBody>
+          <a:bodyPr wrap="square" lIns="73152" rIns="73152" tIns="54864" bIns="54864">
+            <a:spAutoFit/>
+          </a:bodyPr>
+          <a:lstStyle/>
+          <a:p>
             <a:pPr algn="l">
-              <a:defRPr sz="1500" b="1">
+              <a:defRPr sz="1400" b="0">
                 <a:solidFill>
                   <a:srgbClr val="0F172A"/>
                 </a:solidFill>
@@ -6515,21 +6093,21 @@
               </a:defRPr>
             </a:pPr>
             <a:r>
-              <a:t>• Nguy cơ lộ lọt thông tin cá nhân, bị kẻ xấu lợi dụng</a:t>
-            </a:r>
-          </a:p>
-        </p:txBody>
-      </p:sp>
-      <p:sp>
-        <p:nvSpPr>
-          <p:cNvPr id="9" name="TextBox 8"/>
+              <a:t>• Giao lưu bạn bè bốn phương</a:t>
+            </a:r>
+          </a:p>
+        </p:txBody>
+      </p:sp>
+      <p:sp>
+        <p:nvSpPr>
+          <p:cNvPr id="10" name="TextBox 9"/>
           <p:cNvSpPr txBox="1"/>
           <p:nvPr/>
         </p:nvSpPr>
         <p:spPr>
           <a:xfrm>
-            <a:off x="640080" y="2468880"/>
-            <a:ext cx="3429000" cy="640080"/>
+            <a:off x="502920" y="2880360"/>
+            <a:ext cx="3291840" cy="594359"/>
           </a:xfrm>
           <a:prstGeom prst="rect">
             <a:avLst/>
@@ -6543,7 +6121,7 @@
           <a:lstStyle/>
           <a:p>
             <a:pPr algn="l">
-              <a:defRPr sz="1500" b="1">
+              <a:defRPr sz="1400" b="0">
                 <a:solidFill>
                   <a:srgbClr val="0F172A"/>
                 </a:solidFill>
@@ -6551,21 +6129,21 @@
               </a:defRPr>
             </a:pPr>
             <a:r>
-              <a:t>• Tiếp xúc tin giả, thông tin xấu độc, lừa đảo trực tuyến</a:t>
-            </a:r>
-          </a:p>
-        </p:txBody>
-      </p:sp>
-      <p:sp>
-        <p:nvSpPr>
-          <p:cNvPr id="10" name="TextBox 9"/>
+              <a:t>• Học tập trực tuyến bổ ích</a:t>
+            </a:r>
+          </a:p>
+        </p:txBody>
+      </p:sp>
+      <p:sp>
+        <p:nvSpPr>
+          <p:cNvPr id="11" name="TextBox 10"/>
           <p:cNvSpPr txBox="1"/>
           <p:nvPr/>
         </p:nvSpPr>
         <p:spPr>
           <a:xfrm>
-            <a:off x="640080" y="3154680"/>
-            <a:ext cx="3429000" cy="640080"/>
+            <a:off x="502920" y="3520440"/>
+            <a:ext cx="3291840" cy="594360"/>
           </a:xfrm>
           <a:prstGeom prst="rect">
             <a:avLst/>
@@ -6579,7 +6157,7 @@
           <a:lstStyle/>
           <a:p>
             <a:pPr algn="l">
-              <a:defRPr sz="1500" b="1">
+              <a:defRPr sz="1400" b="0">
                 <a:solidFill>
                   <a:srgbClr val="0F172A"/>
                 </a:solidFill>
@@ -6587,21 +6165,109 @@
               </a:defRPr>
             </a:pPr>
             <a:r>
-              <a:t>• Nghiện mạng xã hội, giảm tập trung học tập</a:t>
-            </a:r>
-          </a:p>
-        </p:txBody>
-      </p:sp>
-      <p:sp>
-        <p:nvSpPr>
-          <p:cNvPr id="11" name="TextBox 10"/>
+              <a:t>• Cập nhật tri thức nhanh chóng</a:t>
+            </a:r>
+          </a:p>
+        </p:txBody>
+      </p:sp>
+      <p:sp>
+        <p:nvSpPr>
+          <p:cNvPr id="12" name="Rounded Rectangle 11"/>
+          <p:cNvSpPr/>
+          <p:nvPr/>
+        </p:nvSpPr>
+        <p:spPr>
+          <a:xfrm>
+            <a:off x="4206240" y="1645920"/>
+            <a:ext cx="3566160" cy="3977639"/>
+          </a:xfrm>
+          <a:prstGeom prst="roundRect">
+            <a:avLst/>
+          </a:prstGeom>
+          <a:solidFill>
+            <a:srgbClr val="FFFFFF"/>
+          </a:solidFill>
+          <a:ln w="19050">
+            <a:solidFill>
+              <a:srgbClr val="0D9488"/>
+            </a:solidFill>
+          </a:ln>
+        </p:spPr>
+        <p:style>
+          <a:lnRef idx="1">
+            <a:schemeClr val="accent1"/>
+          </a:lnRef>
+          <a:fillRef idx="3">
+            <a:schemeClr val="accent1"/>
+          </a:fillRef>
+          <a:effectRef idx="2">
+            <a:schemeClr val="accent1"/>
+          </a:effectRef>
+          <a:fontRef idx="minor">
+            <a:schemeClr val="lt1"/>
+          </a:fontRef>
+        </p:style>
+        <p:txBody>
+          <a:bodyPr rtlCol="0" anchor="ctr"/>
+          <a:lstStyle/>
+          <a:p>
+            <a:pPr algn="ctr"/>
+          </a:p>
+        </p:txBody>
+      </p:sp>
+      <p:sp>
+        <p:nvSpPr>
+          <p:cNvPr id="13" name="Rounded Rectangle 12"/>
+          <p:cNvSpPr/>
+          <p:nvPr/>
+        </p:nvSpPr>
+        <p:spPr>
+          <a:xfrm>
+            <a:off x="4206240" y="1645920"/>
+            <a:ext cx="3566160" cy="457199"/>
+          </a:xfrm>
+          <a:prstGeom prst="roundRect">
+            <a:avLst/>
+          </a:prstGeom>
+          <a:solidFill>
+            <a:srgbClr val="0D9488"/>
+          </a:solidFill>
+          <a:ln>
+            <a:noFill/>
+          </a:ln>
+        </p:spPr>
+        <p:style>
+          <a:lnRef idx="1">
+            <a:schemeClr val="accent1"/>
+          </a:lnRef>
+          <a:fillRef idx="3">
+            <a:schemeClr val="accent1"/>
+          </a:fillRef>
+          <a:effectRef idx="2">
+            <a:schemeClr val="accent1"/>
+          </a:effectRef>
+          <a:fontRef idx="minor">
+            <a:schemeClr val="lt1"/>
+          </a:fontRef>
+        </p:style>
+        <p:txBody>
+          <a:bodyPr rtlCol="0" anchor="ctr"/>
+          <a:lstStyle/>
+          <a:p>
+            <a:pPr algn="ctr"/>
+          </a:p>
+        </p:txBody>
+      </p:sp>
+      <p:sp>
+        <p:nvSpPr>
+          <p:cNvPr id="14" name="TextBox 13"/>
           <p:cNvSpPr txBox="1"/>
           <p:nvPr/>
         </p:nvSpPr>
         <p:spPr>
           <a:xfrm>
-            <a:off x="640080" y="3840480"/>
-            <a:ext cx="3429000" cy="640080"/>
+            <a:off x="4206240" y="1691640"/>
+            <a:ext cx="3566160" cy="411480"/>
           </a:xfrm>
           <a:prstGeom prst="rect">
             <a:avLst/>
@@ -6614,8 +6280,44 @@
           </a:bodyPr>
           <a:lstStyle/>
           <a:p>
+            <a:pPr algn="ctr">
+              <a:defRPr sz="1500" b="1">
+                <a:solidFill>
+                  <a:srgbClr val="FFFFFF"/>
+                </a:solidFill>
+                <a:latin typeface="Arial"/>
+              </a:defRPr>
+            </a:pPr>
+            <a:r>
+              <a:t>⚠️ Cạm bẫy &amp; Rủi ro</a:t>
+            </a:r>
+          </a:p>
+        </p:txBody>
+      </p:sp>
+      <p:sp>
+        <p:nvSpPr>
+          <p:cNvPr id="15" name="TextBox 14"/>
+          <p:cNvSpPr txBox="1"/>
+          <p:nvPr/>
+        </p:nvSpPr>
+        <p:spPr>
+          <a:xfrm>
+            <a:off x="4343400" y="2240280"/>
+            <a:ext cx="3291840" cy="594359"/>
+          </a:xfrm>
+          <a:prstGeom prst="rect">
+            <a:avLst/>
+          </a:prstGeom>
+          <a:noFill/>
+        </p:spPr>
+        <p:txBody>
+          <a:bodyPr wrap="square" lIns="73152" rIns="73152" tIns="54864" bIns="54864">
+            <a:spAutoFit/>
+          </a:bodyPr>
+          <a:lstStyle/>
+          <a:p>
             <a:pPr algn="l">
-              <a:defRPr sz="1500" b="1">
+              <a:defRPr sz="1400" b="0">
                 <a:solidFill>
                   <a:srgbClr val="0F172A"/>
                 </a:solidFill>
@@ -6623,21 +6325,93 @@
               </a:defRPr>
             </a:pPr>
             <a:r>
-              <a:t>• Vấn nạn bắt nạt qua mạng (Cyberbullying)</a:t>
-            </a:r>
-          </a:p>
-        </p:txBody>
-      </p:sp>
-      <p:sp>
-        <p:nvSpPr>
-          <p:cNvPr id="12" name="Rounded Rectangle 11"/>
+              <a:t>• Nguy cơ lộ thông tin cá nhân</a:t>
+            </a:r>
+          </a:p>
+        </p:txBody>
+      </p:sp>
+      <p:sp>
+        <p:nvSpPr>
+          <p:cNvPr id="16" name="TextBox 15"/>
+          <p:cNvSpPr txBox="1"/>
+          <p:nvPr/>
+        </p:nvSpPr>
+        <p:spPr>
+          <a:xfrm>
+            <a:off x="4343400" y="2880360"/>
+            <a:ext cx="3291840" cy="594359"/>
+          </a:xfrm>
+          <a:prstGeom prst="rect">
+            <a:avLst/>
+          </a:prstGeom>
+          <a:noFill/>
+        </p:spPr>
+        <p:txBody>
+          <a:bodyPr wrap="square" lIns="73152" rIns="73152" tIns="54864" bIns="54864">
+            <a:spAutoFit/>
+          </a:bodyPr>
+          <a:lstStyle/>
+          <a:p>
+            <a:pPr algn="l">
+              <a:defRPr sz="1400" b="0">
+                <a:solidFill>
+                  <a:srgbClr val="0F172A"/>
+                </a:solidFill>
+                <a:latin typeface="Arial"/>
+              </a:defRPr>
+            </a:pPr>
+            <a:r>
+              <a:t>• Tiếp xúc tin giả (Fake News)</a:t>
+            </a:r>
+          </a:p>
+        </p:txBody>
+      </p:sp>
+      <p:sp>
+        <p:nvSpPr>
+          <p:cNvPr id="17" name="TextBox 16"/>
+          <p:cNvSpPr txBox="1"/>
+          <p:nvPr/>
+        </p:nvSpPr>
+        <p:spPr>
+          <a:xfrm>
+            <a:off x="4343400" y="3520440"/>
+            <a:ext cx="3291840" cy="594360"/>
+          </a:xfrm>
+          <a:prstGeom prst="rect">
+            <a:avLst/>
+          </a:prstGeom>
+          <a:noFill/>
+        </p:spPr>
+        <p:txBody>
+          <a:bodyPr wrap="square" lIns="73152" rIns="73152" tIns="54864" bIns="54864">
+            <a:spAutoFit/>
+          </a:bodyPr>
+          <a:lstStyle/>
+          <a:p>
+            <a:pPr algn="l">
+              <a:defRPr sz="1400" b="0">
+                <a:solidFill>
+                  <a:srgbClr val="0F172A"/>
+                </a:solidFill>
+                <a:latin typeface="Arial"/>
+              </a:defRPr>
+            </a:pPr>
+            <a:r>
+              <a:t>• Bắt nạt qua mạng (Cyberbullying)</a:t>
+            </a:r>
+          </a:p>
+        </p:txBody>
+      </p:sp>
+      <p:sp>
+        <p:nvSpPr>
+          <p:cNvPr id="18" name="Rounded Rectangle 17"/>
           <p:cNvSpPr/>
           <p:nvPr/>
         </p:nvSpPr>
         <p:spPr>
           <a:xfrm>
-            <a:off x="4480560" y="1645920"/>
-            <a:ext cx="7223760" cy="3977639"/>
+            <a:off x="8046720" y="1645920"/>
+            <a:ext cx="3566160" cy="3977639"/>
           </a:xfrm>
           <a:prstGeom prst="roundRect">
             <a:avLst/>
@@ -6647,7 +6421,7 @@
           </a:solidFill>
           <a:ln w="19050">
             <a:solidFill>
-              <a:srgbClr val="CBD5E1"/>
+              <a:srgbClr val="D97706"/>
             </a:solidFill>
           </a:ln>
         </p:spPr>
@@ -6673,30 +6447,193 @@
           </a:p>
         </p:txBody>
       </p:sp>
-      <p:pic>
-        <p:nvPicPr>
-          <p:cNvPr id="13" name="Picture 12" descr="sgk_lop7_bai4_rui_ro_va_an_toan.png"/>
-          <p:cNvPicPr>
-            <a:picLocks noChangeAspect="1"/>
-          </p:cNvPicPr>
-          <p:nvPr/>
-        </p:nvPicPr>
-        <p:blipFill>
-          <a:blip r:embed="rId2"/>
-          <a:stretch>
-            <a:fillRect/>
-          </a:stretch>
-        </p:blipFill>
-        <p:spPr>
-          <a:xfrm>
-            <a:off x="4572000" y="1737360"/>
-            <a:ext cx="7040880" cy="3794760"/>
+      <p:sp>
+        <p:nvSpPr>
+          <p:cNvPr id="19" name="Rounded Rectangle 18"/>
+          <p:cNvSpPr/>
+          <p:nvPr/>
+        </p:nvSpPr>
+        <p:spPr>
+          <a:xfrm>
+            <a:off x="8046720" y="1645920"/>
+            <a:ext cx="3566160" cy="457199"/>
+          </a:xfrm>
+          <a:prstGeom prst="roundRect">
+            <a:avLst/>
+          </a:prstGeom>
+          <a:solidFill>
+            <a:srgbClr val="D97706"/>
+          </a:solidFill>
+          <a:ln>
+            <a:noFill/>
+          </a:ln>
+        </p:spPr>
+        <p:style>
+          <a:lnRef idx="1">
+            <a:schemeClr val="accent1"/>
+          </a:lnRef>
+          <a:fillRef idx="3">
+            <a:schemeClr val="accent1"/>
+          </a:fillRef>
+          <a:effectRef idx="2">
+            <a:schemeClr val="accent1"/>
+          </a:effectRef>
+          <a:fontRef idx="minor">
+            <a:schemeClr val="lt1"/>
+          </a:fontRef>
+        </p:style>
+        <p:txBody>
+          <a:bodyPr rtlCol="0" anchor="ctr"/>
+          <a:lstStyle/>
+          <a:p>
+            <a:pPr algn="ctr"/>
+          </a:p>
+        </p:txBody>
+      </p:sp>
+      <p:sp>
+        <p:nvSpPr>
+          <p:cNvPr id="20" name="TextBox 19"/>
+          <p:cNvSpPr txBox="1"/>
+          <p:nvPr/>
+        </p:nvSpPr>
+        <p:spPr>
+          <a:xfrm>
+            <a:off x="8046720" y="1691640"/>
+            <a:ext cx="3566160" cy="411480"/>
           </a:xfrm>
           <a:prstGeom prst="rect">
             <a:avLst/>
           </a:prstGeom>
-        </p:spPr>
-      </p:pic>
+          <a:noFill/>
+        </p:spPr>
+        <p:txBody>
+          <a:bodyPr wrap="square" lIns="73152" rIns="73152" tIns="54864" bIns="54864">
+            <a:spAutoFit/>
+          </a:bodyPr>
+          <a:lstStyle/>
+          <a:p>
+            <a:pPr algn="ctr">
+              <a:defRPr sz="1500" b="1">
+                <a:solidFill>
+                  <a:srgbClr val="FFFFFF"/>
+                </a:solidFill>
+                <a:latin typeface="Arial"/>
+              </a:defRPr>
+            </a:pPr>
+            <a:r>
+              <a:t>🛡️ Phòng ngừa văn minh</a:t>
+            </a:r>
+          </a:p>
+        </p:txBody>
+      </p:sp>
+      <p:sp>
+        <p:nvSpPr>
+          <p:cNvPr id="21" name="TextBox 20"/>
+          <p:cNvSpPr txBox="1"/>
+          <p:nvPr/>
+        </p:nvSpPr>
+        <p:spPr>
+          <a:xfrm>
+            <a:off x="8183880" y="2240280"/>
+            <a:ext cx="3291840" cy="594359"/>
+          </a:xfrm>
+          <a:prstGeom prst="rect">
+            <a:avLst/>
+          </a:prstGeom>
+          <a:noFill/>
+        </p:spPr>
+        <p:txBody>
+          <a:bodyPr wrap="square" lIns="73152" rIns="73152" tIns="54864" bIns="54864">
+            <a:spAutoFit/>
+          </a:bodyPr>
+          <a:lstStyle/>
+          <a:p>
+            <a:pPr algn="l">
+              <a:defRPr sz="1400" b="0">
+                <a:solidFill>
+                  <a:srgbClr val="0F172A"/>
+                </a:solidFill>
+                <a:latin typeface="Arial"/>
+              </a:defRPr>
+            </a:pPr>
+            <a:r>
+              <a:t>• Kiểm chứng thông tin trước khi chia sẻ</a:t>
+            </a:r>
+          </a:p>
+        </p:txBody>
+      </p:sp>
+      <p:sp>
+        <p:nvSpPr>
+          <p:cNvPr id="22" name="TextBox 21"/>
+          <p:cNvSpPr txBox="1"/>
+          <p:nvPr/>
+        </p:nvSpPr>
+        <p:spPr>
+          <a:xfrm>
+            <a:off x="8183880" y="2880360"/>
+            <a:ext cx="3291840" cy="594359"/>
+          </a:xfrm>
+          <a:prstGeom prst="rect">
+            <a:avLst/>
+          </a:prstGeom>
+          <a:noFill/>
+        </p:spPr>
+        <p:txBody>
+          <a:bodyPr wrap="square" lIns="73152" rIns="73152" tIns="54864" bIns="54864">
+            <a:spAutoFit/>
+          </a:bodyPr>
+          <a:lstStyle/>
+          <a:p>
+            <a:pPr algn="l">
+              <a:defRPr sz="1400" b="0">
+                <a:solidFill>
+                  <a:srgbClr val="0F172A"/>
+                </a:solidFill>
+                <a:latin typeface="Arial"/>
+              </a:defRPr>
+            </a:pPr>
+            <a:r>
+              <a:t>• Tôn trọng, không công kích thô bạo</a:t>
+            </a:r>
+          </a:p>
+        </p:txBody>
+      </p:sp>
+      <p:sp>
+        <p:nvSpPr>
+          <p:cNvPr id="23" name="TextBox 22"/>
+          <p:cNvSpPr txBox="1"/>
+          <p:nvPr/>
+        </p:nvSpPr>
+        <p:spPr>
+          <a:xfrm>
+            <a:off x="8183880" y="3520440"/>
+            <a:ext cx="3291840" cy="594360"/>
+          </a:xfrm>
+          <a:prstGeom prst="rect">
+            <a:avLst/>
+          </a:prstGeom>
+          <a:noFill/>
+        </p:spPr>
+        <p:txBody>
+          <a:bodyPr wrap="square" lIns="73152" rIns="73152" tIns="54864" bIns="54864">
+            <a:spAutoFit/>
+          </a:bodyPr>
+          <a:lstStyle/>
+          <a:p>
+            <a:pPr algn="l">
+              <a:defRPr sz="1400" b="0">
+                <a:solidFill>
+                  <a:srgbClr val="0F172A"/>
+                </a:solidFill>
+                <a:latin typeface="Arial"/>
+              </a:defRPr>
+            </a:pPr>
+            <a:r>
+              <a:t>• Kịp thời báo cho người lớn khi gặp nguy hiểm</a:t>
+            </a:r>
+          </a:p>
+        </p:txBody>
+      </p:sp>
     </p:spTree>
   </p:cSld>
   <p:clrMapOvr>
@@ -7047,7 +6984,7 @@
       </p:sp>
       <p:pic>
         <p:nvPicPr>
-          <p:cNvPr id="10" name="Picture 9" descr="sgk_lop7_bai4_giao_dien_mxh_dang_bai.png"/>
+          <p:cNvPr id="10" name="Picture 9" descr="ai_lop7_bai4_social_networks.jpg"/>
           <p:cNvPicPr>
             <a:picLocks noChangeAspect="1"/>
           </p:cNvPicPr>

--- a/KHBD_Tin_học/Lớp_7/Tuần_04/Slide_Tin_hoc_Lop_7_Bai03_04.pptx
+++ b/KHBD_Tin_học/Lớp_7/Tuần_04/Slide_Tin_hoc_Lop_7_Bai03_04.pptx
@@ -4739,7 +4739,7 @@
               </a:defRPr>
             </a:pPr>
             <a:r>
-              <a:t>Chiến lược Sao lưu dữ liệu &amp; Phòng chống Virus</a:t>
+              <a:t>Bảng phím tắt thao tác nhanh trên tệp &amp; thư mục</a:t>
             </a:r>
           </a:p>
         </p:txBody>
@@ -4753,7 +4753,7 @@
         <p:spPr>
           <a:xfrm>
             <a:off x="365760" y="1645920"/>
-            <a:ext cx="4754880" cy="868680"/>
+            <a:ext cx="4389120" cy="685799"/>
           </a:xfrm>
           <a:prstGeom prst="chevron">
             <a:avLst/>
@@ -4795,8 +4795,8 @@
         </p:nvSpPr>
         <p:spPr>
           <a:xfrm>
-            <a:off x="640080" y="1719072"/>
-            <a:ext cx="4206240" cy="731520"/>
+            <a:off x="594360" y="1719072"/>
+            <a:ext cx="3840480" cy="548639"/>
           </a:xfrm>
           <a:prstGeom prst="rect">
             <a:avLst/>
@@ -4818,7 +4818,7 @@
               </a:defRPr>
             </a:pPr>
             <a:r>
-              <a:t>1. Sao lưu định kỳ (Backup) lên Cloud / Ổ cứng ngoài</a:t>
+              <a:t>F2: Đổi tên (Rename)</a:t>
             </a:r>
           </a:p>
         </p:txBody>
@@ -4831,8 +4831,8 @@
         </p:nvSpPr>
         <p:spPr>
           <a:xfrm>
-            <a:off x="365760" y="2624328"/>
-            <a:ext cx="4754880" cy="868680"/>
+            <a:off x="365760" y="2441448"/>
+            <a:ext cx="4389120" cy="685800"/>
           </a:xfrm>
           <a:prstGeom prst="chevron">
             <a:avLst/>
@@ -4874,8 +4874,8 @@
         </p:nvSpPr>
         <p:spPr>
           <a:xfrm>
-            <a:off x="640080" y="2697480"/>
-            <a:ext cx="4206240" cy="731519"/>
+            <a:off x="594360" y="2514600"/>
+            <a:ext cx="3840480" cy="548640"/>
           </a:xfrm>
           <a:prstGeom prst="rect">
             <a:avLst/>
@@ -4897,7 +4897,7 @@
               </a:defRPr>
             </a:pPr>
             <a:r>
-              <a:t>2. Đặt mật khẩu mạnh và không chia sẻ cho người khác</a:t>
+              <a:t>Ctrl+Shift+N: Tạo mới</a:t>
             </a:r>
           </a:p>
         </p:txBody>
@@ -4910,8 +4910,8 @@
         </p:nvSpPr>
         <p:spPr>
           <a:xfrm>
-            <a:off x="365760" y="3602736"/>
-            <a:ext cx="4754880" cy="868679"/>
+            <a:off x="365760" y="3236976"/>
+            <a:ext cx="4389120" cy="685800"/>
           </a:xfrm>
           <a:prstGeom prst="chevron">
             <a:avLst/>
@@ -4953,8 +4953,8 @@
         </p:nvSpPr>
         <p:spPr>
           <a:xfrm>
-            <a:off x="640080" y="3675887"/>
-            <a:ext cx="4206240" cy="731519"/>
+            <a:off x="594360" y="3310128"/>
+            <a:ext cx="3840480" cy="548639"/>
           </a:xfrm>
           <a:prstGeom prst="rect">
             <a:avLst/>
@@ -4976,7 +4976,7 @@
               </a:defRPr>
             </a:pPr>
             <a:r>
-              <a:t>3. Bật phần mềm diệt virus (Windows Defender)</a:t>
+              <a:t>Ctrl+C / Ctrl+X: Copy/Cut</a:t>
             </a:r>
           </a:p>
         </p:txBody>
@@ -4989,8 +4989,8 @@
         </p:nvSpPr>
         <p:spPr>
           <a:xfrm>
-            <a:off x="365760" y="4581144"/>
-            <a:ext cx="4754880" cy="868680"/>
+            <a:off x="365760" y="4032504"/>
+            <a:ext cx="4389120" cy="685800"/>
           </a:xfrm>
           <a:prstGeom prst="chevron">
             <a:avLst/>
@@ -5032,8 +5032,8 @@
         </p:nvSpPr>
         <p:spPr>
           <a:xfrm>
-            <a:off x="640080" y="4654296"/>
-            <a:ext cx="4206240" cy="731519"/>
+            <a:off x="594360" y="4105656"/>
+            <a:ext cx="3840480" cy="548639"/>
           </a:xfrm>
           <a:prstGeom prst="rect">
             <a:avLst/>
@@ -5055,21 +5055,100 @@
               </a:defRPr>
             </a:pPr>
             <a:r>
-              <a:t>4. Tuyệt đối không mở liên kết lạ, tệp đính kèm đáng ngờ</a:t>
-            </a:r>
-          </a:p>
-        </p:txBody>
-      </p:sp>
-      <p:sp>
-        <p:nvSpPr>
-          <p:cNvPr id="14" name="Rounded Rectangle 13"/>
+              <a:t>Ctrl+V: Dán tệp (Paste)</a:t>
+            </a:r>
+          </a:p>
+        </p:txBody>
+      </p:sp>
+      <p:sp>
+        <p:nvSpPr>
+          <p:cNvPr id="14" name="Chevron 13"/>
           <p:cNvSpPr/>
           <p:nvPr/>
         </p:nvSpPr>
         <p:spPr>
           <a:xfrm>
-            <a:off x="5394960" y="1645920"/>
-            <a:ext cx="6309360" cy="3977639"/>
+            <a:off x="365760" y="4828032"/>
+            <a:ext cx="4389120" cy="685800"/>
+          </a:xfrm>
+          <a:prstGeom prst="chevron">
+            <a:avLst/>
+          </a:prstGeom>
+          <a:solidFill>
+            <a:srgbClr val="7C3AED"/>
+          </a:solidFill>
+          <a:ln>
+            <a:noFill/>
+          </a:ln>
+        </p:spPr>
+        <p:style>
+          <a:lnRef idx="1">
+            <a:schemeClr val="accent1"/>
+          </a:lnRef>
+          <a:fillRef idx="3">
+            <a:schemeClr val="accent1"/>
+          </a:fillRef>
+          <a:effectRef idx="2">
+            <a:schemeClr val="accent1"/>
+          </a:effectRef>
+          <a:fontRef idx="minor">
+            <a:schemeClr val="lt1"/>
+          </a:fontRef>
+        </p:style>
+        <p:txBody>
+          <a:bodyPr rtlCol="0" anchor="ctr"/>
+          <a:lstStyle/>
+          <a:p>
+            <a:pPr algn="ctr"/>
+          </a:p>
+        </p:txBody>
+      </p:sp>
+      <p:sp>
+        <p:nvSpPr>
+          <p:cNvPr id="15" name="TextBox 14"/>
+          <p:cNvSpPr txBox="1"/>
+          <p:nvPr/>
+        </p:nvSpPr>
+        <p:spPr>
+          <a:xfrm>
+            <a:off x="594360" y="4901184"/>
+            <a:ext cx="3840480" cy="548639"/>
+          </a:xfrm>
+          <a:prstGeom prst="rect">
+            <a:avLst/>
+          </a:prstGeom>
+          <a:noFill/>
+        </p:spPr>
+        <p:txBody>
+          <a:bodyPr wrap="square" lIns="73152" rIns="73152" tIns="54864" bIns="54864">
+            <a:spAutoFit/>
+          </a:bodyPr>
+          <a:lstStyle/>
+          <a:p>
+            <a:pPr algn="l">
+              <a:defRPr sz="1400" b="1">
+                <a:solidFill>
+                  <a:srgbClr val="FFFFFF"/>
+                </a:solidFill>
+                <a:latin typeface="Arial"/>
+              </a:defRPr>
+            </a:pPr>
+            <a:r>
+              <a:t>Delete: Xóa vào Thùng rác</a:t>
+            </a:r>
+          </a:p>
+        </p:txBody>
+      </p:sp>
+      <p:sp>
+        <p:nvSpPr>
+          <p:cNvPr id="16" name="Rounded Rectangle 15"/>
+          <p:cNvSpPr/>
+          <p:nvPr/>
+        </p:nvSpPr>
+        <p:spPr>
+          <a:xfrm>
+            <a:off x="5029200" y="1645920"/>
+            <a:ext cx="6675120" cy="3977639"/>
           </a:xfrm>
           <a:prstGeom prst="roundRect">
             <a:avLst/>
@@ -5107,7 +5186,7 @@
       </p:sp>
       <p:pic>
         <p:nvPicPr>
-          <p:cNvPr id="15" name="Picture 14" descr="ai_lop7_bai3_data_hub.jpg"/>
+          <p:cNvPr id="17" name="Picture 16" descr="lop7_bai3_phim_tat_thao_tac.png"/>
           <p:cNvPicPr>
             <a:picLocks noChangeAspect="1"/>
           </p:cNvPicPr>
@@ -5121,8 +5200,8 @@
         </p:blipFill>
         <p:spPr>
           <a:xfrm>
-            <a:off x="5486400" y="1737360"/>
-            <a:ext cx="6126480" cy="3794760"/>
+            <a:off x="5120640" y="1737360"/>
+            <a:ext cx="6492240" cy="3794760"/>
           </a:xfrm>
           <a:prstGeom prst="rect">
             <a:avLst/>
@@ -5525,7 +5604,7 @@
               </a:defRPr>
             </a:pPr>
             <a:r>
-              <a:t>KHỞI ĐỘNG &amp; TÌNH HUỐNG</a:t>
+              <a:t>QUY TRÌNH &amp; THAO TÁC</a:t>
             </a:r>
           </a:p>
         </p:txBody>
@@ -5561,21 +5640,416 @@
               </a:defRPr>
             </a:pPr>
             <a:r>
-              <a:t>Thế giới Mạng xã hội &amp; Tấm khiên bảo vệ số</a:t>
-            </a:r>
-          </a:p>
-        </p:txBody>
-      </p:sp>
-      <p:sp>
-        <p:nvSpPr>
-          <p:cNvPr id="6" name="Rounded Rectangle 5"/>
+              <a:t>5 Nguyên tắc vàng an toàn trên Mạng xã hội</a:t>
+            </a:r>
+          </a:p>
+        </p:txBody>
+      </p:sp>
+      <p:sp>
+        <p:nvSpPr>
+          <p:cNvPr id="6" name="Chevron 5"/>
           <p:cNvSpPr/>
           <p:nvPr/>
         </p:nvSpPr>
         <p:spPr>
           <a:xfrm>
             <a:off x="365760" y="1645920"/>
-            <a:ext cx="11247120" cy="2971800"/>
+            <a:ext cx="4389120" cy="685799"/>
+          </a:xfrm>
+          <a:prstGeom prst="chevron">
+            <a:avLst/>
+          </a:prstGeom>
+          <a:solidFill>
+            <a:srgbClr val="0369A1"/>
+          </a:solidFill>
+          <a:ln>
+            <a:noFill/>
+          </a:ln>
+        </p:spPr>
+        <p:style>
+          <a:lnRef idx="1">
+            <a:schemeClr val="accent1"/>
+          </a:lnRef>
+          <a:fillRef idx="3">
+            <a:schemeClr val="accent1"/>
+          </a:fillRef>
+          <a:effectRef idx="2">
+            <a:schemeClr val="accent1"/>
+          </a:effectRef>
+          <a:fontRef idx="minor">
+            <a:schemeClr val="lt1"/>
+          </a:fontRef>
+        </p:style>
+        <p:txBody>
+          <a:bodyPr rtlCol="0" anchor="ctr"/>
+          <a:lstStyle/>
+          <a:p>
+            <a:pPr algn="ctr"/>
+          </a:p>
+        </p:txBody>
+      </p:sp>
+      <p:sp>
+        <p:nvSpPr>
+          <p:cNvPr id="7" name="TextBox 6"/>
+          <p:cNvSpPr txBox="1"/>
+          <p:nvPr/>
+        </p:nvSpPr>
+        <p:spPr>
+          <a:xfrm>
+            <a:off x="594360" y="1719072"/>
+            <a:ext cx="3840480" cy="548639"/>
+          </a:xfrm>
+          <a:prstGeom prst="rect">
+            <a:avLst/>
+          </a:prstGeom>
+          <a:noFill/>
+        </p:spPr>
+        <p:txBody>
+          <a:bodyPr wrap="square" lIns="73152" rIns="73152" tIns="54864" bIns="54864">
+            <a:spAutoFit/>
+          </a:bodyPr>
+          <a:lstStyle/>
+          <a:p>
+            <a:pPr algn="l">
+              <a:defRPr sz="1400" b="1">
+                <a:solidFill>
+                  <a:srgbClr val="FFFFFF"/>
+                </a:solidFill>
+                <a:latin typeface="Arial"/>
+              </a:defRPr>
+            </a:pPr>
+            <a:r>
+              <a:t>1. Bảo vệ mật khẩu</a:t>
+            </a:r>
+          </a:p>
+        </p:txBody>
+      </p:sp>
+      <p:sp>
+        <p:nvSpPr>
+          <p:cNvPr id="8" name="Chevron 7"/>
+          <p:cNvSpPr/>
+          <p:nvPr/>
+        </p:nvSpPr>
+        <p:spPr>
+          <a:xfrm>
+            <a:off x="365760" y="2441448"/>
+            <a:ext cx="4389120" cy="685800"/>
+          </a:xfrm>
+          <a:prstGeom prst="chevron">
+            <a:avLst/>
+          </a:prstGeom>
+          <a:solidFill>
+            <a:srgbClr val="0EA5E9"/>
+          </a:solidFill>
+          <a:ln>
+            <a:noFill/>
+          </a:ln>
+        </p:spPr>
+        <p:style>
+          <a:lnRef idx="1">
+            <a:schemeClr val="accent1"/>
+          </a:lnRef>
+          <a:fillRef idx="3">
+            <a:schemeClr val="accent1"/>
+          </a:fillRef>
+          <a:effectRef idx="2">
+            <a:schemeClr val="accent1"/>
+          </a:effectRef>
+          <a:fontRef idx="minor">
+            <a:schemeClr val="lt1"/>
+          </a:fontRef>
+        </p:style>
+        <p:txBody>
+          <a:bodyPr rtlCol="0" anchor="ctr"/>
+          <a:lstStyle/>
+          <a:p>
+            <a:pPr algn="ctr"/>
+          </a:p>
+        </p:txBody>
+      </p:sp>
+      <p:sp>
+        <p:nvSpPr>
+          <p:cNvPr id="9" name="TextBox 8"/>
+          <p:cNvSpPr txBox="1"/>
+          <p:nvPr/>
+        </p:nvSpPr>
+        <p:spPr>
+          <a:xfrm>
+            <a:off x="594360" y="2514600"/>
+            <a:ext cx="3840480" cy="548640"/>
+          </a:xfrm>
+          <a:prstGeom prst="rect">
+            <a:avLst/>
+          </a:prstGeom>
+          <a:noFill/>
+        </p:spPr>
+        <p:txBody>
+          <a:bodyPr wrap="square" lIns="73152" rIns="73152" tIns="54864" bIns="54864">
+            <a:spAutoFit/>
+          </a:bodyPr>
+          <a:lstStyle/>
+          <a:p>
+            <a:pPr algn="l">
+              <a:defRPr sz="1400" b="1">
+                <a:solidFill>
+                  <a:srgbClr val="FFFFFF"/>
+                </a:solidFill>
+                <a:latin typeface="Arial"/>
+              </a:defRPr>
+            </a:pPr>
+            <a:r>
+              <a:t>2. Quyền riêng tư</a:t>
+            </a:r>
+          </a:p>
+        </p:txBody>
+      </p:sp>
+      <p:sp>
+        <p:nvSpPr>
+          <p:cNvPr id="10" name="Chevron 9"/>
+          <p:cNvSpPr/>
+          <p:nvPr/>
+        </p:nvSpPr>
+        <p:spPr>
+          <a:xfrm>
+            <a:off x="365760" y="3236976"/>
+            <a:ext cx="4389120" cy="685800"/>
+          </a:xfrm>
+          <a:prstGeom prst="chevron">
+            <a:avLst/>
+          </a:prstGeom>
+          <a:solidFill>
+            <a:srgbClr val="0D9488"/>
+          </a:solidFill>
+          <a:ln>
+            <a:noFill/>
+          </a:ln>
+        </p:spPr>
+        <p:style>
+          <a:lnRef idx="1">
+            <a:schemeClr val="accent1"/>
+          </a:lnRef>
+          <a:fillRef idx="3">
+            <a:schemeClr val="accent1"/>
+          </a:fillRef>
+          <a:effectRef idx="2">
+            <a:schemeClr val="accent1"/>
+          </a:effectRef>
+          <a:fontRef idx="minor">
+            <a:schemeClr val="lt1"/>
+          </a:fontRef>
+        </p:style>
+        <p:txBody>
+          <a:bodyPr rtlCol="0" anchor="ctr"/>
+          <a:lstStyle/>
+          <a:p>
+            <a:pPr algn="ctr"/>
+          </a:p>
+        </p:txBody>
+      </p:sp>
+      <p:sp>
+        <p:nvSpPr>
+          <p:cNvPr id="11" name="TextBox 10"/>
+          <p:cNvSpPr txBox="1"/>
+          <p:nvPr/>
+        </p:nvSpPr>
+        <p:spPr>
+          <a:xfrm>
+            <a:off x="594360" y="3310128"/>
+            <a:ext cx="3840480" cy="548639"/>
+          </a:xfrm>
+          <a:prstGeom prst="rect">
+            <a:avLst/>
+          </a:prstGeom>
+          <a:noFill/>
+        </p:spPr>
+        <p:txBody>
+          <a:bodyPr wrap="square" lIns="73152" rIns="73152" tIns="54864" bIns="54864">
+            <a:spAutoFit/>
+          </a:bodyPr>
+          <a:lstStyle/>
+          <a:p>
+            <a:pPr algn="l">
+              <a:defRPr sz="1400" b="1">
+                <a:solidFill>
+                  <a:srgbClr val="FFFFFF"/>
+                </a:solidFill>
+                <a:latin typeface="Arial"/>
+              </a:defRPr>
+            </a:pPr>
+            <a:r>
+              <a:t>3. Kiểm chứng tin tức</a:t>
+            </a:r>
+          </a:p>
+        </p:txBody>
+      </p:sp>
+      <p:sp>
+        <p:nvSpPr>
+          <p:cNvPr id="12" name="Chevron 11"/>
+          <p:cNvSpPr/>
+          <p:nvPr/>
+        </p:nvSpPr>
+        <p:spPr>
+          <a:xfrm>
+            <a:off x="365760" y="4032504"/>
+            <a:ext cx="4389120" cy="685800"/>
+          </a:xfrm>
+          <a:prstGeom prst="chevron">
+            <a:avLst/>
+          </a:prstGeom>
+          <a:solidFill>
+            <a:srgbClr val="D97706"/>
+          </a:solidFill>
+          <a:ln>
+            <a:noFill/>
+          </a:ln>
+        </p:spPr>
+        <p:style>
+          <a:lnRef idx="1">
+            <a:schemeClr val="accent1"/>
+          </a:lnRef>
+          <a:fillRef idx="3">
+            <a:schemeClr val="accent1"/>
+          </a:fillRef>
+          <a:effectRef idx="2">
+            <a:schemeClr val="accent1"/>
+          </a:effectRef>
+          <a:fontRef idx="minor">
+            <a:schemeClr val="lt1"/>
+          </a:fontRef>
+        </p:style>
+        <p:txBody>
+          <a:bodyPr rtlCol="0" anchor="ctr"/>
+          <a:lstStyle/>
+          <a:p>
+            <a:pPr algn="ctr"/>
+          </a:p>
+        </p:txBody>
+      </p:sp>
+      <p:sp>
+        <p:nvSpPr>
+          <p:cNvPr id="13" name="TextBox 12"/>
+          <p:cNvSpPr txBox="1"/>
+          <p:nvPr/>
+        </p:nvSpPr>
+        <p:spPr>
+          <a:xfrm>
+            <a:off x="594360" y="4105656"/>
+            <a:ext cx="3840480" cy="548639"/>
+          </a:xfrm>
+          <a:prstGeom prst="rect">
+            <a:avLst/>
+          </a:prstGeom>
+          <a:noFill/>
+        </p:spPr>
+        <p:txBody>
+          <a:bodyPr wrap="square" lIns="73152" rIns="73152" tIns="54864" bIns="54864">
+            <a:spAutoFit/>
+          </a:bodyPr>
+          <a:lstStyle/>
+          <a:p>
+            <a:pPr algn="l">
+              <a:defRPr sz="1400" b="1">
+                <a:solidFill>
+                  <a:srgbClr val="FFFFFF"/>
+                </a:solidFill>
+                <a:latin typeface="Arial"/>
+              </a:defRPr>
+            </a:pPr>
+            <a:r>
+              <a:t>4. Ứng xử văn minh</a:t>
+            </a:r>
+          </a:p>
+        </p:txBody>
+      </p:sp>
+      <p:sp>
+        <p:nvSpPr>
+          <p:cNvPr id="14" name="Chevron 13"/>
+          <p:cNvSpPr/>
+          <p:nvPr/>
+        </p:nvSpPr>
+        <p:spPr>
+          <a:xfrm>
+            <a:off x="365760" y="4828032"/>
+            <a:ext cx="4389120" cy="685800"/>
+          </a:xfrm>
+          <a:prstGeom prst="chevron">
+            <a:avLst/>
+          </a:prstGeom>
+          <a:solidFill>
+            <a:srgbClr val="7C3AED"/>
+          </a:solidFill>
+          <a:ln>
+            <a:noFill/>
+          </a:ln>
+        </p:spPr>
+        <p:style>
+          <a:lnRef idx="1">
+            <a:schemeClr val="accent1"/>
+          </a:lnRef>
+          <a:fillRef idx="3">
+            <a:schemeClr val="accent1"/>
+          </a:fillRef>
+          <a:effectRef idx="2">
+            <a:schemeClr val="accent1"/>
+          </a:effectRef>
+          <a:fontRef idx="minor">
+            <a:schemeClr val="lt1"/>
+          </a:fontRef>
+        </p:style>
+        <p:txBody>
+          <a:bodyPr rtlCol="0" anchor="ctr"/>
+          <a:lstStyle/>
+          <a:p>
+            <a:pPr algn="ctr"/>
+          </a:p>
+        </p:txBody>
+      </p:sp>
+      <p:sp>
+        <p:nvSpPr>
+          <p:cNvPr id="15" name="TextBox 14"/>
+          <p:cNvSpPr txBox="1"/>
+          <p:nvPr/>
+        </p:nvSpPr>
+        <p:spPr>
+          <a:xfrm>
+            <a:off x="594360" y="4901184"/>
+            <a:ext cx="3840480" cy="548639"/>
+          </a:xfrm>
+          <a:prstGeom prst="rect">
+            <a:avLst/>
+          </a:prstGeom>
+          <a:noFill/>
+        </p:spPr>
+        <p:txBody>
+          <a:bodyPr wrap="square" lIns="73152" rIns="73152" tIns="54864" bIns="54864">
+            <a:spAutoFit/>
+          </a:bodyPr>
+          <a:lstStyle/>
+          <a:p>
+            <a:pPr algn="l">
+              <a:defRPr sz="1400" b="1">
+                <a:solidFill>
+                  <a:srgbClr val="FFFFFF"/>
+                </a:solidFill>
+                <a:latin typeface="Arial"/>
+              </a:defRPr>
+            </a:pPr>
+            <a:r>
+              <a:t>5. Báo cáo nguy hiểm</a:t>
+            </a:r>
+          </a:p>
+        </p:txBody>
+      </p:sp>
+      <p:sp>
+        <p:nvSpPr>
+          <p:cNvPr id="16" name="Rounded Rectangle 15"/>
+          <p:cNvSpPr/>
+          <p:nvPr/>
+        </p:nvSpPr>
+        <p:spPr>
+          <a:xfrm>
+            <a:off x="5029200" y="1645920"/>
+            <a:ext cx="6675120" cy="3977639"/>
           </a:xfrm>
           <a:prstGeom prst="roundRect">
             <a:avLst/>
@@ -5585,7 +6059,7 @@
           </a:solidFill>
           <a:ln w="19050">
             <a:solidFill>
-              <a:srgbClr val="0EA5E9"/>
+              <a:srgbClr val="CBD5E1"/>
             </a:solidFill>
           </a:ln>
         </p:spPr>
@@ -5613,7 +6087,7 @@
       </p:sp>
       <p:pic>
         <p:nvPicPr>
-          <p:cNvPr id="7" name="Picture 6" descr="ai_lop7_bai4_social_networks.jpg"/>
+          <p:cNvPr id="17" name="Picture 16" descr="lop7_bai4_quy_tac_5k_an_toan_so.png"/>
           <p:cNvPicPr>
             <a:picLocks noChangeAspect="1"/>
           </p:cNvPicPr>
@@ -5627,138 +6101,14 @@
         </p:blipFill>
         <p:spPr>
           <a:xfrm>
-            <a:off x="457200" y="1691640"/>
-            <a:ext cx="11064240" cy="2880360"/>
+            <a:off x="5120640" y="1737360"/>
+            <a:ext cx="6492240" cy="3794760"/>
           </a:xfrm>
           <a:prstGeom prst="rect">
             <a:avLst/>
           </a:prstGeom>
         </p:spPr>
       </p:pic>
-      <p:sp>
-        <p:nvSpPr>
-          <p:cNvPr id="8" name="Rounded Rectangle 7"/>
-          <p:cNvSpPr/>
-          <p:nvPr/>
-        </p:nvSpPr>
-        <p:spPr>
-          <a:xfrm>
-            <a:off x="365760" y="4709160"/>
-            <a:ext cx="11247120" cy="960119"/>
-          </a:xfrm>
-          <a:prstGeom prst="roundRect">
-            <a:avLst/>
-          </a:prstGeom>
-          <a:solidFill>
-            <a:srgbClr val="FFFFFF"/>
-          </a:solidFill>
-          <a:ln w="19050">
-            <a:solidFill>
-              <a:srgbClr val="0369A1"/>
-            </a:solidFill>
-          </a:ln>
-        </p:spPr>
-        <p:style>
-          <a:lnRef idx="1">
-            <a:schemeClr val="accent1"/>
-          </a:lnRef>
-          <a:fillRef idx="3">
-            <a:schemeClr val="accent1"/>
-          </a:fillRef>
-          <a:effectRef idx="2">
-            <a:schemeClr val="accent1"/>
-          </a:effectRef>
-          <a:fontRef idx="minor">
-            <a:schemeClr val="lt1"/>
-          </a:fontRef>
-        </p:style>
-        <p:txBody>
-          <a:bodyPr rtlCol="0" anchor="ctr"/>
-          <a:lstStyle/>
-          <a:p>
-            <a:pPr algn="ctr"/>
-          </a:p>
-        </p:txBody>
-      </p:sp>
-      <p:sp>
-        <p:nvSpPr>
-          <p:cNvPr id="9" name="Rounded Rectangle 8"/>
-          <p:cNvSpPr/>
-          <p:nvPr/>
-        </p:nvSpPr>
-        <p:spPr>
-          <a:xfrm>
-            <a:off x="365760" y="4709160"/>
-            <a:ext cx="182880" cy="960119"/>
-          </a:xfrm>
-          <a:prstGeom prst="roundRect">
-            <a:avLst/>
-          </a:prstGeom>
-          <a:solidFill>
-            <a:srgbClr val="0369A1"/>
-          </a:solidFill>
-          <a:ln>
-            <a:noFill/>
-          </a:ln>
-        </p:spPr>
-        <p:style>
-          <a:lnRef idx="1">
-            <a:schemeClr val="accent1"/>
-          </a:lnRef>
-          <a:fillRef idx="3">
-            <a:schemeClr val="accent1"/>
-          </a:fillRef>
-          <a:effectRef idx="2">
-            <a:schemeClr val="accent1"/>
-          </a:effectRef>
-          <a:fontRef idx="minor">
-            <a:schemeClr val="lt1"/>
-          </a:fontRef>
-        </p:style>
-        <p:txBody>
-          <a:bodyPr rtlCol="0" anchor="ctr"/>
-          <a:lstStyle/>
-          <a:p>
-            <a:pPr algn="ctr"/>
-          </a:p>
-        </p:txBody>
-      </p:sp>
-      <p:sp>
-        <p:nvSpPr>
-          <p:cNvPr id="10" name="TextBox 9"/>
-          <p:cNvSpPr txBox="1"/>
-          <p:nvPr/>
-        </p:nvSpPr>
-        <p:spPr>
-          <a:xfrm>
-            <a:off x="685800" y="4800600"/>
-            <a:ext cx="10607040" cy="777239"/>
-          </a:xfrm>
-          <a:prstGeom prst="rect">
-            <a:avLst/>
-          </a:prstGeom>
-          <a:noFill/>
-        </p:spPr>
-        <p:txBody>
-          <a:bodyPr wrap="square" lIns="73152" rIns="73152" tIns="54864" bIns="54864">
-            <a:spAutoFit/>
-          </a:bodyPr>
-          <a:lstStyle/>
-          <a:p>
-            <a:pPr algn="l">
-              <a:defRPr sz="1500" b="1">
-                <a:solidFill>
-                  <a:srgbClr val="0F172A"/>
-                </a:solidFill>
-                <a:latin typeface="Arial"/>
-              </a:defRPr>
-            </a:pPr>
-            <a:r>
-              <a:t>👉 Kết nối bạn bè năm châu &amp; Luôn giữ vững tấm khiên bảo vệ an toàn thông tin cá nhân!</a:t>
-            </a:r>
-          </a:p>
-        </p:txBody>
-      </p:sp>
     </p:spTree>
   </p:cSld>
   <p:clrMapOvr>
@@ -6984,7 +7334,7 @@
       </p:sp>
       <p:pic>
         <p:nvPicPr>
-          <p:cNvPr id="10" name="Picture 9" descr="ai_lop7_bai4_social_networks.jpg"/>
+          <p:cNvPr id="10" name="Picture 9" descr="lop7_bai4_quy_tac_5k_an_toan_so.png"/>
           <p:cNvPicPr>
             <a:picLocks noChangeAspect="1"/>
           </p:cNvPicPr>

--- a/KHBD_Tin_học/Lớp_7/Tuần_04/Slide_Tin_hoc_Lop_7_Bai03_04.pptx
+++ b/KHBD_Tin_học/Lớp_7/Tuần_04/Slide_Tin_hoc_Lop_7_Bai03_04.pptx
@@ -4739,7 +4739,7 @@
               </a:defRPr>
             </a:pPr>
             <a:r>
-              <a:t>Bảng phím tắt thao tác nhanh trên tệp &amp; thư mục</a:t>
+              <a:t>Bộ phím tắt thao tác nhanh trên tệp &amp; thư mục</a:t>
             </a:r>
           </a:p>
         </p:txBody>
@@ -5186,7 +5186,7 @@
       </p:sp>
       <p:pic>
         <p:nvPicPr>
-          <p:cNvPr id="17" name="Picture 16" descr="lop7_bai3_phim_tat_thao_tac.png"/>
+          <p:cNvPr id="17" name="Picture 16" descr="ai_lop7_bai3_shortcuts.jpg"/>
           <p:cNvPicPr>
             <a:picLocks noChangeAspect="1"/>
           </p:cNvPicPr>
@@ -6087,7 +6087,7 @@
       </p:sp>
       <p:pic>
         <p:nvPicPr>
-          <p:cNvPr id="17" name="Picture 16" descr="lop7_bai4_quy_tac_5k_an_toan_so.png"/>
+          <p:cNvPr id="17" name="Picture 16" descr="ai_lop7_bai4_5k_safety.jpg"/>
           <p:cNvPicPr>
             <a:picLocks noChangeAspect="1"/>
           </p:cNvPicPr>
@@ -7334,7 +7334,7 @@
       </p:sp>
       <p:pic>
         <p:nvPicPr>
-          <p:cNvPr id="10" name="Picture 9" descr="lop7_bai4_quy_tac_5k_an_toan_so.png"/>
+          <p:cNvPr id="10" name="Picture 9" descr="ai_lop7_bai4_5k_safety.jpg"/>
           <p:cNvPicPr>
             <a:picLocks noChangeAspect="1"/>
           </p:cNvPicPr>
